--- a/samples/pptcreater-overview-report.pptx
+++ b/samples/pptcreater-overview-report.pptx
@@ -505,9 +505,8 @@
           <a:p>
             <a:r>
               <a:rPr lang="en-US" dirty="0"/>
-              <a:t>Slide 1: 導入判断は表で比較する
-table: table schematic
-table long description: table schematic for a contextual pptcreater sample deck, generated from safe presets.</a:t>
+              <a:t>目的: このpptcreaterツールの価値と使い方を説明し、導入判断につなげる。聴衆: GitHub CopilotやClaude Codeを使う開発者・デザイナー・企画担当。報告資料向けに要点と根拠を整理した構成です。
+Slide 1: AIスライド品質標準</a:t>
             </a:r>
             <a:endParaRPr lang="en-US" dirty="0"/>
           </a:p>
@@ -595,9 +594,8 @@
           <a:p>
             <a:r>
               <a:rPr lang="en-US" dirty="0"/>
-              <a:t>Slide 2: 運用上の論点を一覧化する
-list: list-enumeration schematic
-list long description: list-enumeration schematic for a contextual pptcreater sample deck, generated from safe presets.</a:t>
+              <a:t>目的と聴衆を確認し、構成・可視化・検証へ進めます。
+Slide 2: ヒアリングから可視化までの流れ</a:t>
             </a:r>
             <a:endParaRPr lang="en-US" dirty="0"/>
           </a:p>
@@ -685,9 +683,8 @@
           <a:p>
             <a:r>
               <a:rPr lang="en-US" dirty="0"/>
-              <a:t>Slide 3: リスクと対策を同じ行で示す
-risk: table schematic
-risk long description: table schematic for a contextual pptcreater sample deck, generated from safe presets.</a:t>
+              <a:t>カード・テキストは編集可能なPowerPointオブジェクトです。
+Slide 3: 情報UIとしてのスライド設計</a:t>
             </a:r>
             <a:endParaRPr lang="en-US" dirty="0"/>
           </a:p>
@@ -775,9 +772,8 @@
           <a:p>
             <a:r>
               <a:rPr lang="en-US" dirty="0"/>
-              <a:t>Slide 4: 結論: 標準化対象として検証を進める
-summary: list schematic
-summary long description: list schematic for a contextual pptcreater sample deck, generated from safe presets.</a:t>
+              <a:t>presentation / report / technical で見た目が切り替わります。
+Slide 4: 用途別スタイル選定</a:t>
             </a:r>
             <a:endParaRPr lang="en-US" dirty="0"/>
           </a:p>
@@ -1152,7 +1148,7 @@
       </p:grpSpPr>
       <p:pic>
         <p:nvPicPr>
-          <p:cNvPr id="2" name="Image 0" descr="table schematic">    </p:cNvPr>
+          <p:cNvPr id="2" name="Image 0" descr="preencoded.png">    </p:cNvPr>
           <p:cNvPicPr>
             <a:picLocks noChangeAspect="1"/>
           </p:cNvPicPr>
@@ -1172,14 +1168,434 @@
         </p:blipFill>
         <p:spPr>
           <a:xfrm>
-            <a:off x="502920" y="502920"/>
-            <a:ext cx="11155680" cy="5852160"/>
+            <a:off x="0" y="0"/>
+            <a:ext cx="12191695" cy="6858000"/>
           </a:xfrm>
           <a:prstGeom prst="rect">
             <a:avLst/>
           </a:prstGeom>
         </p:spPr>
       </p:pic>
+      <p:sp>
+        <p:nvSpPr>
+          <p:cNvPr id="3" name="Decorative s1-hero-band" descr="" decorative="1">
+            <a:extLst>
+              <a:ext uri="{C183D7F6-B498-43B3-948B-1728B52AA6E4}">
+                <a16:decorative xmlns:a16="http://schemas.microsoft.com/office/drawing/2014/main">1</a16:decorative>
+              </a:ext>
+            </a:extLst>
+          </p:cNvPr>
+          <p:cNvSpPr/>
+          <p:nvPr/>
+        </p:nvSpPr>
+        <p:spPr>
+          <a:xfrm>
+            <a:off x="0" y="0"/>
+            <a:ext cx="310896" cy="6858000"/>
+          </a:xfrm>
+          <a:prstGeom prst="rect">
+            <a:avLst/>
+          </a:prstGeom>
+          <a:solidFill>
+            <a:srgbClr val="8F3D35"/>
+          </a:solidFill>
+          <a:ln w="1270">
+            <a:solidFill>
+              <a:srgbClr val="8F3D35"/>
+            </a:solidFill>
+            <a:prstDash val="solid"/>
+          </a:ln>
+        </p:spPr>
+      </p:sp>
+      <p:sp>
+        <p:nvSpPr>
+          <p:cNvPr id="4" name="Decorative s1-hero-panel" descr="" decorative="1">
+            <a:extLst>
+              <a:ext uri="{C183D7F6-B498-43B3-948B-1728B52AA6E4}">
+                <a16:decorative xmlns:a16="http://schemas.microsoft.com/office/drawing/2014/main">1</a16:decorative>
+              </a:ext>
+            </a:extLst>
+          </p:cNvPr>
+          <p:cNvSpPr/>
+          <p:nvPr/>
+        </p:nvSpPr>
+        <p:spPr>
+          <a:xfrm>
+            <a:off x="7040880" y="914400"/>
+            <a:ext cx="4480560" cy="4846320"/>
+          </a:xfrm>
+          <a:prstGeom prst="roundRect">
+            <a:avLst/>
+          </a:prstGeom>
+          <a:solidFill>
+            <a:srgbClr val="F1EEE7"/>
+          </a:solidFill>
+          <a:ln w="12700">
+            <a:solidFill>
+              <a:srgbClr val="CBD5E1"/>
+            </a:solidFill>
+            <a:prstDash val="solid"/>
+          </a:ln>
+        </p:spPr>
+      </p:sp>
+      <p:sp>
+        <p:nvSpPr>
+          <p:cNvPr id="5" name="Decorative s1-hero-panel-accent" descr="" decorative="1">
+            <a:extLst>
+              <a:ext uri="{C183D7F6-B498-43B3-948B-1728B52AA6E4}">
+                <a16:decorative xmlns:a16="http://schemas.microsoft.com/office/drawing/2014/main">1</a16:decorative>
+              </a:ext>
+            </a:extLst>
+          </p:cNvPr>
+          <p:cNvSpPr/>
+          <p:nvPr/>
+        </p:nvSpPr>
+        <p:spPr>
+          <a:xfrm>
+            <a:off x="7406640" y="1371600"/>
+            <a:ext cx="1463040" cy="201168"/>
+          </a:xfrm>
+          <a:prstGeom prst="roundRect">
+            <a:avLst/>
+          </a:prstGeom>
+          <a:solidFill>
+            <a:srgbClr val="8F3D35"/>
+          </a:solidFill>
+          <a:ln w="1270">
+            <a:solidFill>
+              <a:srgbClr val="8F3D35"/>
+            </a:solidFill>
+            <a:prstDash val="solid"/>
+          </a:ln>
+        </p:spPr>
+      </p:sp>
+      <p:pic>
+        <p:nvPicPr>
+          <p:cNvPr id="6" name="Image 1" descr="preencoded.png">    </p:cNvPr>
+          <p:cNvPicPr>
+            <a:picLocks noChangeAspect="1"/>
+          </p:cNvPicPr>
+          <p:nvPr/>
+        </p:nvPicPr>
+        <p:blipFill>
+          <a:blip r:embed="rId3">
+            <a:extLst>
+              <a:ext uri="{96DAC541-7B7A-43D3-8B79-37D633B846F1}">
+                <asvg:svgBlip xmlns:asvg="http://schemas.microsoft.com/office/drawing/2016/SVG/main" r:embed="rId4"/>
+              </a:ext>
+            </a:extLst>
+          </a:blip>
+          <a:stretch>
+            <a:fillRect/>
+          </a:stretch>
+        </p:blipFill>
+        <p:spPr>
+          <a:xfrm>
+            <a:off x="10515600" y="1783080"/>
+            <a:ext cx="548640" cy="548640"/>
+          </a:xfrm>
+          <a:prstGeom prst="rect">
+            <a:avLst/>
+          </a:prstGeom>
+        </p:spPr>
+      </p:pic>
+      <p:sp>
+        <p:nvSpPr>
+          <p:cNvPr id="7" name="Text 3"/>
+          <p:cNvSpPr/>
+          <p:nvPr/>
+        </p:nvSpPr>
+        <p:spPr>
+          <a:xfrm>
+            <a:off x="731520" y="713232"/>
+            <a:ext cx="5669280" cy="365760"/>
+          </a:xfrm>
+          <a:prstGeom prst="rect">
+            <a:avLst/>
+          </a:prstGeom>
+          <a:noFill/>
+          <a:ln/>
+        </p:spPr>
+        <p:txBody>
+          <a:bodyPr wrap="square" lIns="254" tIns="254" rIns="254" bIns="254" rtlCol="0" anchor="ctr">
+            <a:normAutofit/>
+          </a:bodyPr>
+          <a:lstStyle/>
+          <a:p>
+            <a:pPr algn="l" indent="0" marL="0">
+              <a:buNone/>
+            </a:pPr>
+            <a:r>
+              <a:rPr lang="en-US" sz="1400" dirty="0">
+                <a:solidFill>
+                  <a:srgbClr val="8F3D35"/>
+                </a:solidFill>
+                <a:latin typeface="Yu Gothic" pitchFamily="34" charset="0"/>
+                <a:ea typeface="Yu Gothic" pitchFamily="34" charset="-122"/>
+                <a:cs typeface="Yu Gothic" pitchFamily="34" charset="-120"/>
+              </a:rPr>
+              <a:t>PPTCREATER DECK</a:t>
+            </a:r>
+            <a:endParaRPr lang="en-US" sz="1400" dirty="0"/>
+          </a:p>
+        </p:txBody>
+      </p:sp>
+      <p:sp>
+        <p:nvSpPr>
+          <p:cNvPr id="8" name="Text 4"/>
+          <p:cNvSpPr/>
+          <p:nvPr/>
+        </p:nvSpPr>
+        <p:spPr>
+          <a:xfrm>
+            <a:off x="731520" y="1234440"/>
+            <a:ext cx="5943600" cy="2103120"/>
+          </a:xfrm>
+          <a:prstGeom prst="rect">
+            <a:avLst/>
+          </a:prstGeom>
+          <a:noFill/>
+          <a:ln/>
+        </p:spPr>
+        <p:txBody>
+          <a:bodyPr wrap="square" lIns="254" tIns="254" rIns="254" bIns="254" rtlCol="0" anchor="t">
+            <a:normAutofit/>
+          </a:bodyPr>
+          <a:lstStyle/>
+          <a:p>
+            <a:pPr algn="l" indent="0" marL="0">
+              <a:buNone/>
+            </a:pPr>
+            <a:r>
+              <a:rPr lang="en-US" sz="3000" b="1" spc="-40" kern="0" dirty="0">
+                <a:solidFill>
+                  <a:srgbClr val="24211D"/>
+                </a:solidFill>
+                <a:latin typeface="Yu Gothic" pitchFamily="34" charset="0"/>
+                <a:ea typeface="Yu Gothic" pitchFamily="34" charset="-122"/>
+                <a:cs typeface="Yu Gothic" pitchFamily="34" charset="-120"/>
+              </a:rPr>
+              <a:t>AIスライド品質標準</a:t>
+            </a:r>
+            <a:endParaRPr lang="en-US" sz="3000" dirty="0"/>
+          </a:p>
+        </p:txBody>
+      </p:sp>
+      <p:sp>
+        <p:nvSpPr>
+          <p:cNvPr id="9" name="Text 5"/>
+          <p:cNvSpPr/>
+          <p:nvPr/>
+        </p:nvSpPr>
+        <p:spPr>
+          <a:xfrm>
+            <a:off x="731520" y="3611880"/>
+            <a:ext cx="5852160" cy="1280160"/>
+          </a:xfrm>
+          <a:prstGeom prst="rect">
+            <a:avLst/>
+          </a:prstGeom>
+          <a:noFill/>
+          <a:ln/>
+        </p:spPr>
+        <p:txBody>
+          <a:bodyPr wrap="square" lIns="254" tIns="254" rIns="254" bIns="254" rtlCol="0" anchor="t">
+            <a:normAutofit/>
+          </a:bodyPr>
+          <a:lstStyle/>
+          <a:p>
+            <a:pPr algn="l" indent="0" marL="0">
+              <a:buNone/>
+            </a:pPr>
+            <a:r>
+              <a:rPr lang="en-US" sz="2000" dirty="0">
+                <a:solidFill>
+                  <a:srgbClr val="5F5A52"/>
+                </a:solidFill>
+                <a:latin typeface="Yu Gothic" pitchFamily="34" charset="0"/>
+                <a:ea typeface="Yu Gothic" pitchFamily="34" charset="-122"/>
+                <a:cs typeface="Yu Gothic" pitchFamily="34" charset="-120"/>
+              </a:rPr>
+              <a:t>用途・聴衆・ボリュームを先に固定</a:t>
+            </a:r>
+            <a:endParaRPr lang="en-US" sz="2000" dirty="0"/>
+          </a:p>
+          <a:p>
+            <a:pPr algn="l" indent="0" marL="0">
+              <a:buNone/>
+            </a:pPr>
+            <a:r>
+              <a:rPr lang="en-US" sz="2000" dirty="0">
+                <a:solidFill>
+                  <a:srgbClr val="5F5A52"/>
+                </a:solidFill>
+                <a:latin typeface="Yu Gothic" pitchFamily="34" charset="0"/>
+                <a:ea typeface="Yu Gothic" pitchFamily="34" charset="-122"/>
+                <a:cs typeface="Yu Gothic" pitchFamily="34" charset="-120"/>
+              </a:rPr>
+              <a:t>し、編集可能な図形で表現します。</a:t>
+            </a:r>
+            <a:endParaRPr lang="en-US" sz="2000" dirty="0"/>
+          </a:p>
+        </p:txBody>
+      </p:sp>
+      <p:sp>
+        <p:nvSpPr>
+          <p:cNvPr id="10" name="Text 6"/>
+          <p:cNvSpPr/>
+          <p:nvPr/>
+        </p:nvSpPr>
+        <p:spPr>
+          <a:xfrm>
+            <a:off x="731520" y="5212080"/>
+            <a:ext cx="5852160" cy="548640"/>
+          </a:xfrm>
+          <a:prstGeom prst="rect">
+            <a:avLst/>
+          </a:prstGeom>
+          <a:noFill/>
+          <a:ln/>
+        </p:spPr>
+        <p:txBody>
+          <a:bodyPr wrap="square" lIns="254" tIns="254" rIns="254" bIns="254" rtlCol="0" anchor="ctr">
+            <a:normAutofit/>
+          </a:bodyPr>
+          <a:lstStyle/>
+          <a:p>
+            <a:pPr algn="l" indent="0" marL="0">
+              <a:buNone/>
+            </a:pPr>
+            <a:r>
+              <a:rPr lang="en-US" sz="1200" dirty="0">
+                <a:solidFill>
+                  <a:srgbClr val="5F5A52"/>
+                </a:solidFill>
+                <a:latin typeface="Yu Gothic" pitchFamily="34" charset="0"/>
+                <a:ea typeface="Yu Gothic" pitchFamily="34" charset="-122"/>
+                <a:cs typeface="Yu Gothic" pitchFamily="34" charset="-120"/>
+              </a:rPr>
+              <a:t>対象: GitHub CopilotやClaude Codeを使う開発者・デザイナー・企画担当</a:t>
+            </a:r>
+            <a:endParaRPr lang="en-US" sz="1200" dirty="0"/>
+          </a:p>
+        </p:txBody>
+      </p:sp>
+      <p:sp>
+        <p:nvSpPr>
+          <p:cNvPr id="11" name="Text 7"/>
+          <p:cNvSpPr/>
+          <p:nvPr/>
+        </p:nvSpPr>
+        <p:spPr>
+          <a:xfrm>
+            <a:off x="7406640" y="1783080"/>
+            <a:ext cx="2926080" cy="548640"/>
+          </a:xfrm>
+          <a:prstGeom prst="rect">
+            <a:avLst/>
+          </a:prstGeom>
+          <a:noFill/>
+          <a:ln/>
+        </p:spPr>
+        <p:txBody>
+          <a:bodyPr wrap="square" lIns="254" tIns="254" rIns="254" bIns="254" rtlCol="0" anchor="ctr">
+            <a:normAutofit/>
+          </a:bodyPr>
+          <a:lstStyle/>
+          <a:p>
+            <a:pPr algn="l" indent="0" marL="0">
+              <a:buNone/>
+            </a:pPr>
+            <a:r>
+              <a:rPr lang="en-US" sz="2000" b="1" spc="-40" kern="0" dirty="0">
+                <a:solidFill>
+                  <a:srgbClr val="24211D"/>
+                </a:solidFill>
+                <a:latin typeface="Yu Gothic" pitchFamily="34" charset="0"/>
+                <a:ea typeface="Yu Gothic" pitchFamily="34" charset="-122"/>
+                <a:cs typeface="Yu Gothic" pitchFamily="34" charset="-120"/>
+              </a:rPr>
+              <a:t>このデッキの読み方</a:t>
+            </a:r>
+            <a:endParaRPr lang="en-US" sz="2000" dirty="0"/>
+          </a:p>
+        </p:txBody>
+      </p:sp>
+      <p:sp>
+        <p:nvSpPr>
+          <p:cNvPr id="12" name="Text 8"/>
+          <p:cNvSpPr/>
+          <p:nvPr/>
+        </p:nvSpPr>
+        <p:spPr>
+          <a:xfrm>
+            <a:off x="7406640" y="2468880"/>
+            <a:ext cx="3749040" cy="2926080"/>
+          </a:xfrm>
+          <a:prstGeom prst="rect">
+            <a:avLst/>
+          </a:prstGeom>
+          <a:noFill/>
+          <a:ln/>
+        </p:spPr>
+        <p:txBody>
+          <a:bodyPr wrap="square" lIns="254" tIns="254" rIns="254" bIns="254" rtlCol="0" anchor="t">
+            <a:normAutofit/>
+          </a:bodyPr>
+          <a:lstStyle/>
+          <a:p>
+            <a:pPr algn="l" indent="0" marL="0">
+              <a:buNone/>
+            </a:pPr>
+            <a:r>
+              <a:rPr lang="en-US" sz="2000" dirty="0">
+                <a:solidFill>
+                  <a:srgbClr val="5F5A52"/>
+                </a:solidFill>
+                <a:latin typeface="Yu Gothic" pitchFamily="34" charset="0"/>
+                <a:ea typeface="Yu Gothic" pitchFamily="34" charset="-122"/>
+                <a:cs typeface="Yu Gothic" pitchFamily="34" charset="-120"/>
+              </a:rPr>
+              <a:t>各スライドは1メッセージ。図</a:t>
+            </a:r>
+            <a:endParaRPr lang="en-US" sz="2000" dirty="0"/>
+          </a:p>
+          <a:p>
+            <a:pPr algn="l" indent="0" marL="0">
+              <a:buNone/>
+            </a:pPr>
+            <a:r>
+              <a:rPr lang="en-US" sz="2000" dirty="0">
+                <a:solidFill>
+                  <a:srgbClr val="5F5A52"/>
+                </a:solidFill>
+                <a:latin typeface="Yu Gothic" pitchFamily="34" charset="0"/>
+                <a:ea typeface="Yu Gothic" pitchFamily="34" charset="-122"/>
+                <a:cs typeface="Yu Gothic" pitchFamily="34" charset="-120"/>
+              </a:rPr>
+              <a:t>やカードは編集可能な</a:t>
+            </a:r>
+            <a:endParaRPr lang="en-US" sz="2000" dirty="0"/>
+          </a:p>
+          <a:p>
+            <a:pPr algn="l" indent="0" marL="0">
+              <a:buNone/>
+            </a:pPr>
+            <a:r>
+              <a:rPr lang="en-US" sz="2000" dirty="0">
+                <a:solidFill>
+                  <a:srgbClr val="5F5A52"/>
+                </a:solidFill>
+                <a:latin typeface="Yu Gothic" pitchFamily="34" charset="0"/>
+                <a:ea typeface="Yu Gothic" pitchFamily="34" charset="-122"/>
+                <a:cs typeface="Yu Gothic" pitchFamily="34" charset="-120"/>
+              </a:rPr>
+              <a:t>PowerPointオブジェクトです。</a:t>
+            </a:r>
+            <a:endParaRPr lang="en-US" sz="2000" dirty="0"/>
+          </a:p>
+        </p:txBody>
+      </p:sp>
     </p:spTree>
   </p:cSld>
   <p:clrMapOvr>
@@ -1214,7 +1630,7 @@
       </p:grpSpPr>
       <p:pic>
         <p:nvPicPr>
-          <p:cNvPr id="2" name="Image 0" descr="list-enumeration schematic">    </p:cNvPr>
+          <p:cNvPr id="2" name="Image 0" descr="preencoded.png">    </p:cNvPr>
           <p:cNvPicPr>
             <a:picLocks noChangeAspect="1"/>
           </p:cNvPicPr>
@@ -1234,14 +1650,839 @@
         </p:blipFill>
         <p:spPr>
           <a:xfrm>
-            <a:off x="502920" y="502920"/>
-            <a:ext cx="11155680" cy="5852160"/>
+            <a:off x="0" y="0"/>
+            <a:ext cx="12191695" cy="6858000"/>
           </a:xfrm>
           <a:prstGeom prst="rect">
             <a:avLst/>
           </a:prstGeom>
         </p:spPr>
       </p:pic>
+      <p:sp>
+        <p:nvSpPr>
+          <p:cNvPr id="3" name="Decorative s2-track" descr="" decorative="1">
+            <a:extLst>
+              <a:ext uri="{C183D7F6-B498-43B3-948B-1728B52AA6E4}">
+                <a16:decorative xmlns:a16="http://schemas.microsoft.com/office/drawing/2014/main">1</a16:decorative>
+              </a:ext>
+            </a:extLst>
+          </p:cNvPr>
+          <p:cNvSpPr/>
+          <p:nvPr/>
+        </p:nvSpPr>
+        <p:spPr>
+          <a:xfrm>
+            <a:off x="1097280" y="3108960"/>
+            <a:ext cx="10058400" cy="0"/>
+          </a:xfrm>
+          <a:prstGeom prst="line">
+            <a:avLst/>
+          </a:prstGeom>
+          <a:ln w="38100">
+            <a:solidFill>
+              <a:srgbClr val="CBD5E1"/>
+            </a:solidFill>
+            <a:prstDash val="solid"/>
+          </a:ln>
+        </p:spPr>
+      </p:sp>
+      <p:sp>
+        <p:nvSpPr>
+          <p:cNvPr id="4" name="Decorative s2-node-0" descr="" decorative="1">
+            <a:extLst>
+              <a:ext uri="{C183D7F6-B498-43B3-948B-1728B52AA6E4}">
+                <a16:decorative xmlns:a16="http://schemas.microsoft.com/office/drawing/2014/main">1</a16:decorative>
+              </a:ext>
+            </a:extLst>
+          </p:cNvPr>
+          <p:cNvSpPr/>
+          <p:nvPr/>
+        </p:nvSpPr>
+        <p:spPr>
+          <a:xfrm>
+            <a:off x="1463040" y="2697480"/>
+            <a:ext cx="822960" cy="822960"/>
+          </a:xfrm>
+          <a:prstGeom prst="ellipse">
+            <a:avLst/>
+          </a:prstGeom>
+          <a:solidFill>
+            <a:srgbClr val="8F3D35"/>
+          </a:solidFill>
+          <a:ln w="1270">
+            <a:solidFill>
+              <a:srgbClr val="8F3D35"/>
+            </a:solidFill>
+            <a:prstDash val="solid"/>
+          </a:ln>
+        </p:spPr>
+      </p:sp>
+      <p:pic>
+        <p:nvPicPr>
+          <p:cNvPr id="5" name="Image 1" descr="preencoded.png">    </p:cNvPr>
+          <p:cNvPicPr>
+            <a:picLocks noChangeAspect="1"/>
+          </p:cNvPicPr>
+          <p:nvPr/>
+        </p:nvPicPr>
+        <p:blipFill>
+          <a:blip r:embed="rId3">
+            <a:extLst>
+              <a:ext uri="{96DAC541-7B7A-43D3-8B79-37D633B846F1}">
+                <asvg:svgBlip xmlns:asvg="http://schemas.microsoft.com/office/drawing/2016/SVG/main" r:embed="rId4"/>
+              </a:ext>
+            </a:extLst>
+          </a:blip>
+          <a:stretch>
+            <a:fillRect/>
+          </a:stretch>
+        </p:blipFill>
+        <p:spPr>
+          <a:xfrm>
+            <a:off x="1709928" y="2944368"/>
+            <a:ext cx="329184" cy="329184"/>
+          </a:xfrm>
+          <a:prstGeom prst="rect">
+            <a:avLst/>
+          </a:prstGeom>
+        </p:spPr>
+      </p:pic>
+      <p:sp>
+        <p:nvSpPr>
+          <p:cNvPr id="6" name="Decorative s2-node-1" descr="" decorative="1">
+            <a:extLst>
+              <a:ext uri="{C183D7F6-B498-43B3-948B-1728B52AA6E4}">
+                <a16:decorative xmlns:a16="http://schemas.microsoft.com/office/drawing/2014/main">1</a16:decorative>
+              </a:ext>
+            </a:extLst>
+          </p:cNvPr>
+          <p:cNvSpPr/>
+          <p:nvPr/>
+        </p:nvSpPr>
+        <p:spPr>
+          <a:xfrm>
+            <a:off x="3589020" y="2697480"/>
+            <a:ext cx="822960" cy="822960"/>
+          </a:xfrm>
+          <a:prstGeom prst="ellipse">
+            <a:avLst/>
+          </a:prstGeom>
+          <a:solidFill>
+            <a:srgbClr val="8F3D35"/>
+          </a:solidFill>
+          <a:ln w="1270">
+            <a:solidFill>
+              <a:srgbClr val="8F3D35"/>
+            </a:solidFill>
+            <a:prstDash val="solid"/>
+          </a:ln>
+        </p:spPr>
+      </p:sp>
+      <p:pic>
+        <p:nvPicPr>
+          <p:cNvPr id="7" name="Image 2" descr="preencoded.png">    </p:cNvPr>
+          <p:cNvPicPr>
+            <a:picLocks noChangeAspect="1"/>
+          </p:cNvPicPr>
+          <p:nvPr/>
+        </p:nvPicPr>
+        <p:blipFill>
+          <a:blip r:embed="rId5">
+            <a:extLst>
+              <a:ext uri="{96DAC541-7B7A-43D3-8B79-37D633B846F1}">
+                <asvg:svgBlip xmlns:asvg="http://schemas.microsoft.com/office/drawing/2016/SVG/main" r:embed="rId6"/>
+              </a:ext>
+            </a:extLst>
+          </a:blip>
+          <a:stretch>
+            <a:fillRect/>
+          </a:stretch>
+        </p:blipFill>
+        <p:spPr>
+          <a:xfrm>
+            <a:off x="3835908" y="2944368"/>
+            <a:ext cx="329184" cy="329184"/>
+          </a:xfrm>
+          <a:prstGeom prst="rect">
+            <a:avLst/>
+          </a:prstGeom>
+        </p:spPr>
+      </p:pic>
+      <p:sp>
+        <p:nvSpPr>
+          <p:cNvPr id="8" name="Decorative s2-node-2" descr="" decorative="1">
+            <a:extLst>
+              <a:ext uri="{C183D7F6-B498-43B3-948B-1728B52AA6E4}">
+                <a16:decorative xmlns:a16="http://schemas.microsoft.com/office/drawing/2014/main">1</a16:decorative>
+              </a:ext>
+            </a:extLst>
+          </p:cNvPr>
+          <p:cNvSpPr/>
+          <p:nvPr/>
+        </p:nvSpPr>
+        <p:spPr>
+          <a:xfrm>
+            <a:off x="5715000" y="2697480"/>
+            <a:ext cx="822960" cy="822960"/>
+          </a:xfrm>
+          <a:prstGeom prst="ellipse">
+            <a:avLst/>
+          </a:prstGeom>
+          <a:solidFill>
+            <a:srgbClr val="8F3D35"/>
+          </a:solidFill>
+          <a:ln w="1270">
+            <a:solidFill>
+              <a:srgbClr val="8F3D35"/>
+            </a:solidFill>
+            <a:prstDash val="solid"/>
+          </a:ln>
+        </p:spPr>
+      </p:sp>
+      <p:pic>
+        <p:nvPicPr>
+          <p:cNvPr id="9" name="Image 3" descr="preencoded.png">    </p:cNvPr>
+          <p:cNvPicPr>
+            <a:picLocks noChangeAspect="1"/>
+          </p:cNvPicPr>
+          <p:nvPr/>
+        </p:nvPicPr>
+        <p:blipFill>
+          <a:blip r:embed="rId7">
+            <a:extLst>
+              <a:ext uri="{96DAC541-7B7A-43D3-8B79-37D633B846F1}">
+                <asvg:svgBlip xmlns:asvg="http://schemas.microsoft.com/office/drawing/2016/SVG/main" r:embed="rId8"/>
+              </a:ext>
+            </a:extLst>
+          </a:blip>
+          <a:stretch>
+            <a:fillRect/>
+          </a:stretch>
+        </p:blipFill>
+        <p:spPr>
+          <a:xfrm>
+            <a:off x="5961888" y="2944368"/>
+            <a:ext cx="329184" cy="329184"/>
+          </a:xfrm>
+          <a:prstGeom prst="rect">
+            <a:avLst/>
+          </a:prstGeom>
+        </p:spPr>
+      </p:pic>
+      <p:sp>
+        <p:nvSpPr>
+          <p:cNvPr id="10" name="Decorative s2-node-3" descr="" decorative="1">
+            <a:extLst>
+              <a:ext uri="{C183D7F6-B498-43B3-948B-1728B52AA6E4}">
+                <a16:decorative xmlns:a16="http://schemas.microsoft.com/office/drawing/2014/main">1</a16:decorative>
+              </a:ext>
+            </a:extLst>
+          </p:cNvPr>
+          <p:cNvSpPr/>
+          <p:nvPr/>
+        </p:nvSpPr>
+        <p:spPr>
+          <a:xfrm>
+            <a:off x="7840980" y="2697480"/>
+            <a:ext cx="822960" cy="822960"/>
+          </a:xfrm>
+          <a:prstGeom prst="ellipse">
+            <a:avLst/>
+          </a:prstGeom>
+          <a:solidFill>
+            <a:srgbClr val="8F3D35"/>
+          </a:solidFill>
+          <a:ln w="1270">
+            <a:solidFill>
+              <a:srgbClr val="8F3D35"/>
+            </a:solidFill>
+            <a:prstDash val="solid"/>
+          </a:ln>
+        </p:spPr>
+      </p:sp>
+      <p:pic>
+        <p:nvPicPr>
+          <p:cNvPr id="11" name="Image 4" descr="preencoded.png">    </p:cNvPr>
+          <p:cNvPicPr>
+            <a:picLocks noChangeAspect="1"/>
+          </p:cNvPicPr>
+          <p:nvPr/>
+        </p:nvPicPr>
+        <p:blipFill>
+          <a:blip r:embed="rId9">
+            <a:extLst>
+              <a:ext uri="{96DAC541-7B7A-43D3-8B79-37D633B846F1}">
+                <asvg:svgBlip xmlns:asvg="http://schemas.microsoft.com/office/drawing/2016/SVG/main" r:embed="rId10"/>
+              </a:ext>
+            </a:extLst>
+          </a:blip>
+          <a:stretch>
+            <a:fillRect/>
+          </a:stretch>
+        </p:blipFill>
+        <p:spPr>
+          <a:xfrm>
+            <a:off x="8087868" y="2944368"/>
+            <a:ext cx="329184" cy="329184"/>
+          </a:xfrm>
+          <a:prstGeom prst="rect">
+            <a:avLst/>
+          </a:prstGeom>
+        </p:spPr>
+      </p:pic>
+      <p:sp>
+        <p:nvSpPr>
+          <p:cNvPr id="12" name="Decorative s2-node-4" descr="" decorative="1">
+            <a:extLst>
+              <a:ext uri="{C183D7F6-B498-43B3-948B-1728B52AA6E4}">
+                <a16:decorative xmlns:a16="http://schemas.microsoft.com/office/drawing/2014/main">1</a16:decorative>
+              </a:ext>
+            </a:extLst>
+          </p:cNvPr>
+          <p:cNvSpPr/>
+          <p:nvPr/>
+        </p:nvSpPr>
+        <p:spPr>
+          <a:xfrm>
+            <a:off x="9966960" y="2697480"/>
+            <a:ext cx="822960" cy="822960"/>
+          </a:xfrm>
+          <a:prstGeom prst="ellipse">
+            <a:avLst/>
+          </a:prstGeom>
+          <a:solidFill>
+            <a:srgbClr val="8F3D35"/>
+          </a:solidFill>
+          <a:ln w="1270">
+            <a:solidFill>
+              <a:srgbClr val="8F3D35"/>
+            </a:solidFill>
+            <a:prstDash val="solid"/>
+          </a:ln>
+        </p:spPr>
+      </p:sp>
+      <p:pic>
+        <p:nvPicPr>
+          <p:cNvPr id="13" name="Image 5" descr="preencoded.png">    </p:cNvPr>
+          <p:cNvPicPr>
+            <a:picLocks noChangeAspect="1"/>
+          </p:cNvPicPr>
+          <p:nvPr/>
+        </p:nvPicPr>
+        <p:blipFill>
+          <a:blip r:embed="rId11">
+            <a:extLst>
+              <a:ext uri="{96DAC541-7B7A-43D3-8B79-37D633B846F1}">
+                <asvg:svgBlip xmlns:asvg="http://schemas.microsoft.com/office/drawing/2016/SVG/main" r:embed="rId12"/>
+              </a:ext>
+            </a:extLst>
+          </a:blip>
+          <a:stretch>
+            <a:fillRect/>
+          </a:stretch>
+        </p:blipFill>
+        <p:spPr>
+          <a:xfrm>
+            <a:off x="10213848" y="2944368"/>
+            <a:ext cx="329184" cy="329184"/>
+          </a:xfrm>
+          <a:prstGeom prst="rect">
+            <a:avLst/>
+          </a:prstGeom>
+        </p:spPr>
+      </p:pic>
+      <p:sp>
+        <p:nvSpPr>
+          <p:cNvPr id="14" name="Text 6"/>
+          <p:cNvSpPr/>
+          <p:nvPr/>
+        </p:nvSpPr>
+        <p:spPr>
+          <a:xfrm>
+            <a:off x="731520" y="640080"/>
+            <a:ext cx="10698480" cy="914400"/>
+          </a:xfrm>
+          <a:prstGeom prst="rect">
+            <a:avLst/>
+          </a:prstGeom>
+          <a:noFill/>
+          <a:ln/>
+        </p:spPr>
+        <p:txBody>
+          <a:bodyPr wrap="square" lIns="254" tIns="254" rIns="254" bIns="254" rtlCol="0" anchor="ctr">
+            <a:normAutofit/>
+          </a:bodyPr>
+          <a:lstStyle/>
+          <a:p>
+            <a:pPr algn="l" indent="0" marL="0">
+              <a:buNone/>
+            </a:pPr>
+            <a:r>
+              <a:rPr lang="en-US" sz="2800" b="1" spc="-40" kern="0" dirty="0">
+                <a:solidFill>
+                  <a:srgbClr val="24211D"/>
+                </a:solidFill>
+                <a:latin typeface="Yu Gothic" pitchFamily="34" charset="0"/>
+                <a:ea typeface="Yu Gothic" pitchFamily="34" charset="-122"/>
+                <a:cs typeface="Yu Gothic" pitchFamily="34" charset="-120"/>
+              </a:rPr>
+              <a:t>ヒアリングから可視化までの流れ</a:t>
+            </a:r>
+            <a:endParaRPr lang="en-US" sz="2800" dirty="0"/>
+          </a:p>
+        </p:txBody>
+      </p:sp>
+      <p:sp>
+        <p:nvSpPr>
+          <p:cNvPr id="15" name="Text 7"/>
+          <p:cNvSpPr/>
+          <p:nvPr/>
+        </p:nvSpPr>
+        <p:spPr>
+          <a:xfrm>
+            <a:off x="1097280" y="3657600"/>
+            <a:ext cx="1554480" cy="365760"/>
+          </a:xfrm>
+          <a:prstGeom prst="rect">
+            <a:avLst/>
+          </a:prstGeom>
+          <a:noFill/>
+          <a:ln/>
+        </p:spPr>
+        <p:txBody>
+          <a:bodyPr wrap="square" lIns="254" tIns="254" rIns="254" bIns="254" rtlCol="0" anchor="t">
+            <a:normAutofit/>
+          </a:bodyPr>
+          <a:lstStyle/>
+          <a:p>
+            <a:pPr algn="ctr" indent="0" marL="0">
+              <a:buNone/>
+            </a:pPr>
+            <a:r>
+              <a:rPr lang="en-US" sz="1200" dirty="0">
+                <a:solidFill>
+                  <a:srgbClr val="8F3D35"/>
+                </a:solidFill>
+                <a:latin typeface="Yu Gothic" pitchFamily="34" charset="0"/>
+                <a:ea typeface="Yu Gothic" pitchFamily="34" charset="-122"/>
+                <a:cs typeface="Yu Gothic" pitchFamily="34" charset="-120"/>
+              </a:rPr>
+              <a:t>STEP 1</a:t>
+            </a:r>
+            <a:endParaRPr lang="en-US" sz="1200" dirty="0"/>
+          </a:p>
+        </p:txBody>
+      </p:sp>
+      <p:sp>
+        <p:nvSpPr>
+          <p:cNvPr id="16" name="Text 8"/>
+          <p:cNvSpPr/>
+          <p:nvPr/>
+        </p:nvSpPr>
+        <p:spPr>
+          <a:xfrm>
+            <a:off x="1097280" y="4069080"/>
+            <a:ext cx="1554480" cy="640080"/>
+          </a:xfrm>
+          <a:prstGeom prst="rect">
+            <a:avLst/>
+          </a:prstGeom>
+          <a:noFill/>
+          <a:ln/>
+        </p:spPr>
+        <p:txBody>
+          <a:bodyPr wrap="square" lIns="254" tIns="254" rIns="254" bIns="254" rtlCol="0" anchor="t">
+            <a:normAutofit/>
+          </a:bodyPr>
+          <a:lstStyle/>
+          <a:p>
+            <a:pPr algn="ctr" indent="0" marL="0">
+              <a:buNone/>
+            </a:pPr>
+            <a:r>
+              <a:rPr lang="en-US" sz="1400" dirty="0">
+                <a:solidFill>
+                  <a:srgbClr val="24211D"/>
+                </a:solidFill>
+                <a:latin typeface="Yu Gothic" pitchFamily="34" charset="0"/>
+                <a:ea typeface="Yu Gothic" pitchFamily="34" charset="-122"/>
+                <a:cs typeface="Yu Gothic" pitchFamily="34" charset="-120"/>
+              </a:rPr>
+              <a:t>目的</a:t>
+            </a:r>
+            <a:endParaRPr lang="en-US" sz="1400" dirty="0"/>
+          </a:p>
+        </p:txBody>
+      </p:sp>
+      <p:sp>
+        <p:nvSpPr>
+          <p:cNvPr id="17" name="Text 9"/>
+          <p:cNvSpPr/>
+          <p:nvPr/>
+        </p:nvSpPr>
+        <p:spPr>
+          <a:xfrm>
+            <a:off x="3223260" y="3657600"/>
+            <a:ext cx="1554480" cy="365760"/>
+          </a:xfrm>
+          <a:prstGeom prst="rect">
+            <a:avLst/>
+          </a:prstGeom>
+          <a:noFill/>
+          <a:ln/>
+        </p:spPr>
+        <p:txBody>
+          <a:bodyPr wrap="square" lIns="254" tIns="254" rIns="254" bIns="254" rtlCol="0" anchor="t">
+            <a:normAutofit/>
+          </a:bodyPr>
+          <a:lstStyle/>
+          <a:p>
+            <a:pPr algn="ctr" indent="0" marL="0">
+              <a:buNone/>
+            </a:pPr>
+            <a:r>
+              <a:rPr lang="en-US" sz="1200" dirty="0">
+                <a:solidFill>
+                  <a:srgbClr val="8F3D35"/>
+                </a:solidFill>
+                <a:latin typeface="Yu Gothic" pitchFamily="34" charset="0"/>
+                <a:ea typeface="Yu Gothic" pitchFamily="34" charset="-122"/>
+                <a:cs typeface="Yu Gothic" pitchFamily="34" charset="-120"/>
+              </a:rPr>
+              <a:t>STEP 2</a:t>
+            </a:r>
+            <a:endParaRPr lang="en-US" sz="1200" dirty="0"/>
+          </a:p>
+        </p:txBody>
+      </p:sp>
+      <p:sp>
+        <p:nvSpPr>
+          <p:cNvPr id="18" name="Text 10"/>
+          <p:cNvSpPr/>
+          <p:nvPr/>
+        </p:nvSpPr>
+        <p:spPr>
+          <a:xfrm>
+            <a:off x="3223260" y="4069080"/>
+            <a:ext cx="1554480" cy="640080"/>
+          </a:xfrm>
+          <a:prstGeom prst="rect">
+            <a:avLst/>
+          </a:prstGeom>
+          <a:noFill/>
+          <a:ln/>
+        </p:spPr>
+        <p:txBody>
+          <a:bodyPr wrap="square" lIns="254" tIns="254" rIns="254" bIns="254" rtlCol="0" anchor="t">
+            <a:normAutofit/>
+          </a:bodyPr>
+          <a:lstStyle/>
+          <a:p>
+            <a:pPr algn="ctr" indent="0" marL="0">
+              <a:buNone/>
+            </a:pPr>
+            <a:r>
+              <a:rPr lang="en-US" sz="1400" dirty="0">
+                <a:solidFill>
+                  <a:srgbClr val="24211D"/>
+                </a:solidFill>
+                <a:latin typeface="Yu Gothic" pitchFamily="34" charset="0"/>
+                <a:ea typeface="Yu Gothic" pitchFamily="34" charset="-122"/>
+                <a:cs typeface="Yu Gothic" pitchFamily="34" charset="-120"/>
+              </a:rPr>
+              <a:t>聴衆</a:t>
+            </a:r>
+            <a:endParaRPr lang="en-US" sz="1400" dirty="0"/>
+          </a:p>
+        </p:txBody>
+      </p:sp>
+      <p:sp>
+        <p:nvSpPr>
+          <p:cNvPr id="19" name="Text 11"/>
+          <p:cNvSpPr/>
+          <p:nvPr/>
+        </p:nvSpPr>
+        <p:spPr>
+          <a:xfrm>
+            <a:off x="5349240" y="3657600"/>
+            <a:ext cx="1554480" cy="365760"/>
+          </a:xfrm>
+          <a:prstGeom prst="rect">
+            <a:avLst/>
+          </a:prstGeom>
+          <a:noFill/>
+          <a:ln/>
+        </p:spPr>
+        <p:txBody>
+          <a:bodyPr wrap="square" lIns="254" tIns="254" rIns="254" bIns="254" rtlCol="0" anchor="t">
+            <a:normAutofit/>
+          </a:bodyPr>
+          <a:lstStyle/>
+          <a:p>
+            <a:pPr algn="ctr" indent="0" marL="0">
+              <a:buNone/>
+            </a:pPr>
+            <a:r>
+              <a:rPr lang="en-US" sz="1200" dirty="0">
+                <a:solidFill>
+                  <a:srgbClr val="8F3D35"/>
+                </a:solidFill>
+                <a:latin typeface="Yu Gothic" pitchFamily="34" charset="0"/>
+                <a:ea typeface="Yu Gothic" pitchFamily="34" charset="-122"/>
+                <a:cs typeface="Yu Gothic" pitchFamily="34" charset="-120"/>
+              </a:rPr>
+              <a:t>STEP 3</a:t>
+            </a:r>
+            <a:endParaRPr lang="en-US" sz="1200" dirty="0"/>
+          </a:p>
+        </p:txBody>
+      </p:sp>
+      <p:sp>
+        <p:nvSpPr>
+          <p:cNvPr id="20" name="Text 12"/>
+          <p:cNvSpPr/>
+          <p:nvPr/>
+        </p:nvSpPr>
+        <p:spPr>
+          <a:xfrm>
+            <a:off x="5349240" y="4069080"/>
+            <a:ext cx="1554480" cy="640080"/>
+          </a:xfrm>
+          <a:prstGeom prst="rect">
+            <a:avLst/>
+          </a:prstGeom>
+          <a:noFill/>
+          <a:ln/>
+        </p:spPr>
+        <p:txBody>
+          <a:bodyPr wrap="square" lIns="254" tIns="254" rIns="254" bIns="254" rtlCol="0" anchor="t">
+            <a:normAutofit/>
+          </a:bodyPr>
+          <a:lstStyle/>
+          <a:p>
+            <a:pPr algn="ctr" indent="0" marL="0">
+              <a:buNone/>
+            </a:pPr>
+            <a:r>
+              <a:rPr lang="en-US" sz="1400" dirty="0">
+                <a:solidFill>
+                  <a:srgbClr val="24211D"/>
+                </a:solidFill>
+                <a:latin typeface="Yu Gothic" pitchFamily="34" charset="0"/>
+                <a:ea typeface="Yu Gothic" pitchFamily="34" charset="-122"/>
+                <a:cs typeface="Yu Gothic" pitchFamily="34" charset="-120"/>
+              </a:rPr>
+              <a:t>構成</a:t>
+            </a:r>
+            <a:endParaRPr lang="en-US" sz="1400" dirty="0"/>
+          </a:p>
+        </p:txBody>
+      </p:sp>
+      <p:sp>
+        <p:nvSpPr>
+          <p:cNvPr id="21" name="Text 13"/>
+          <p:cNvSpPr/>
+          <p:nvPr/>
+        </p:nvSpPr>
+        <p:spPr>
+          <a:xfrm>
+            <a:off x="7475220" y="3657600"/>
+            <a:ext cx="1554480" cy="365760"/>
+          </a:xfrm>
+          <a:prstGeom prst="rect">
+            <a:avLst/>
+          </a:prstGeom>
+          <a:noFill/>
+          <a:ln/>
+        </p:spPr>
+        <p:txBody>
+          <a:bodyPr wrap="square" lIns="254" tIns="254" rIns="254" bIns="254" rtlCol="0" anchor="t">
+            <a:normAutofit/>
+          </a:bodyPr>
+          <a:lstStyle/>
+          <a:p>
+            <a:pPr algn="ctr" indent="0" marL="0">
+              <a:buNone/>
+            </a:pPr>
+            <a:r>
+              <a:rPr lang="en-US" sz="1200" dirty="0">
+                <a:solidFill>
+                  <a:srgbClr val="8F3D35"/>
+                </a:solidFill>
+                <a:latin typeface="Yu Gothic" pitchFamily="34" charset="0"/>
+                <a:ea typeface="Yu Gothic" pitchFamily="34" charset="-122"/>
+                <a:cs typeface="Yu Gothic" pitchFamily="34" charset="-120"/>
+              </a:rPr>
+              <a:t>STEP 4</a:t>
+            </a:r>
+            <a:endParaRPr lang="en-US" sz="1200" dirty="0"/>
+          </a:p>
+        </p:txBody>
+      </p:sp>
+      <p:sp>
+        <p:nvSpPr>
+          <p:cNvPr id="22" name="Text 14"/>
+          <p:cNvSpPr/>
+          <p:nvPr/>
+        </p:nvSpPr>
+        <p:spPr>
+          <a:xfrm>
+            <a:off x="7475220" y="4069080"/>
+            <a:ext cx="1554480" cy="640080"/>
+          </a:xfrm>
+          <a:prstGeom prst="rect">
+            <a:avLst/>
+          </a:prstGeom>
+          <a:noFill/>
+          <a:ln/>
+        </p:spPr>
+        <p:txBody>
+          <a:bodyPr wrap="square" lIns="254" tIns="254" rIns="254" bIns="254" rtlCol="0" anchor="t">
+            <a:normAutofit/>
+          </a:bodyPr>
+          <a:lstStyle/>
+          <a:p>
+            <a:pPr algn="ctr" indent="0" marL="0">
+              <a:buNone/>
+            </a:pPr>
+            <a:r>
+              <a:rPr lang="en-US" sz="1400" dirty="0">
+                <a:solidFill>
+                  <a:srgbClr val="24211D"/>
+                </a:solidFill>
+                <a:latin typeface="Yu Gothic" pitchFamily="34" charset="0"/>
+                <a:ea typeface="Yu Gothic" pitchFamily="34" charset="-122"/>
+                <a:cs typeface="Yu Gothic" pitchFamily="34" charset="-120"/>
+              </a:rPr>
+              <a:t>可視化</a:t>
+            </a:r>
+            <a:endParaRPr lang="en-US" sz="1400" dirty="0"/>
+          </a:p>
+        </p:txBody>
+      </p:sp>
+      <p:sp>
+        <p:nvSpPr>
+          <p:cNvPr id="23" name="Text 15"/>
+          <p:cNvSpPr/>
+          <p:nvPr/>
+        </p:nvSpPr>
+        <p:spPr>
+          <a:xfrm>
+            <a:off x="9601200" y="3657600"/>
+            <a:ext cx="1554480" cy="365760"/>
+          </a:xfrm>
+          <a:prstGeom prst="rect">
+            <a:avLst/>
+          </a:prstGeom>
+          <a:noFill/>
+          <a:ln/>
+        </p:spPr>
+        <p:txBody>
+          <a:bodyPr wrap="square" lIns="254" tIns="254" rIns="254" bIns="254" rtlCol="0" anchor="t">
+            <a:normAutofit/>
+          </a:bodyPr>
+          <a:lstStyle/>
+          <a:p>
+            <a:pPr algn="ctr" indent="0" marL="0">
+              <a:buNone/>
+            </a:pPr>
+            <a:r>
+              <a:rPr lang="en-US" sz="1200" dirty="0">
+                <a:solidFill>
+                  <a:srgbClr val="8F3D35"/>
+                </a:solidFill>
+                <a:latin typeface="Yu Gothic" pitchFamily="34" charset="0"/>
+                <a:ea typeface="Yu Gothic" pitchFamily="34" charset="-122"/>
+                <a:cs typeface="Yu Gothic" pitchFamily="34" charset="-120"/>
+              </a:rPr>
+              <a:t>STEP 5</a:t>
+            </a:r>
+            <a:endParaRPr lang="en-US" sz="1200" dirty="0"/>
+          </a:p>
+        </p:txBody>
+      </p:sp>
+      <p:sp>
+        <p:nvSpPr>
+          <p:cNvPr id="24" name="Text 16"/>
+          <p:cNvSpPr/>
+          <p:nvPr/>
+        </p:nvSpPr>
+        <p:spPr>
+          <a:xfrm>
+            <a:off x="9601200" y="4069080"/>
+            <a:ext cx="1554480" cy="640080"/>
+          </a:xfrm>
+          <a:prstGeom prst="rect">
+            <a:avLst/>
+          </a:prstGeom>
+          <a:noFill/>
+          <a:ln/>
+        </p:spPr>
+        <p:txBody>
+          <a:bodyPr wrap="square" lIns="254" tIns="254" rIns="254" bIns="254" rtlCol="0" anchor="t">
+            <a:normAutofit/>
+          </a:bodyPr>
+          <a:lstStyle/>
+          <a:p>
+            <a:pPr algn="ctr" indent="0" marL="0">
+              <a:buNone/>
+            </a:pPr>
+            <a:r>
+              <a:rPr lang="en-US" sz="1400" dirty="0">
+                <a:solidFill>
+                  <a:srgbClr val="24211D"/>
+                </a:solidFill>
+                <a:latin typeface="Yu Gothic" pitchFamily="34" charset="0"/>
+                <a:ea typeface="Yu Gothic" pitchFamily="34" charset="-122"/>
+                <a:cs typeface="Yu Gothic" pitchFamily="34" charset="-120"/>
+              </a:rPr>
+              <a:t>検証</a:t>
+            </a:r>
+            <a:endParaRPr lang="en-US" sz="1400" dirty="0"/>
+          </a:p>
+        </p:txBody>
+      </p:sp>
+      <p:sp>
+        <p:nvSpPr>
+          <p:cNvPr id="25" name="Text 17"/>
+          <p:cNvSpPr/>
+          <p:nvPr/>
+        </p:nvSpPr>
+        <p:spPr>
+          <a:xfrm>
+            <a:off x="1097280" y="5212080"/>
+            <a:ext cx="10058400" cy="914400"/>
+          </a:xfrm>
+          <a:prstGeom prst="rect">
+            <a:avLst/>
+          </a:prstGeom>
+          <a:noFill/>
+          <a:ln/>
+        </p:spPr>
+        <p:txBody>
+          <a:bodyPr wrap="square" lIns="254" tIns="254" rIns="254" bIns="254" rtlCol="0" anchor="t">
+            <a:normAutofit/>
+          </a:bodyPr>
+          <a:lstStyle/>
+          <a:p>
+            <a:pPr algn="l" indent="0" marL="0">
+              <a:buNone/>
+            </a:pPr>
+            <a:r>
+              <a:rPr lang="en-US" sz="2000" dirty="0">
+                <a:solidFill>
+                  <a:srgbClr val="5F5A52"/>
+                </a:solidFill>
+                <a:latin typeface="Yu Gothic" pitchFamily="34" charset="0"/>
+                <a:ea typeface="Yu Gothic" pitchFamily="34" charset="-122"/>
+                <a:cs typeface="Yu Gothic" pitchFamily="34" charset="-120"/>
+              </a:rPr>
+              <a:t>先に聞くほど、後のスライドは短く・強く・見やすくなります。</a:t>
+            </a:r>
+            <a:endParaRPr lang="en-US" sz="2000" dirty="0"/>
+          </a:p>
+        </p:txBody>
+      </p:sp>
     </p:spTree>
   </p:cSld>
   <p:clrMapOvr>
@@ -1276,7 +2517,7 @@
       </p:grpSpPr>
       <p:pic>
         <p:nvPicPr>
-          <p:cNvPr id="2" name="Image 0" descr="table schematic">    </p:cNvPr>
+          <p:cNvPr id="2" name="Image 0" descr="preencoded.png">    </p:cNvPr>
           <p:cNvPicPr>
             <a:picLocks noChangeAspect="1"/>
           </p:cNvPicPr>
@@ -1296,14 +2537,594 @@
         </p:blipFill>
         <p:spPr>
           <a:xfrm>
-            <a:off x="502920" y="502920"/>
-            <a:ext cx="11155680" cy="5852160"/>
+            <a:off x="0" y="0"/>
+            <a:ext cx="12191695" cy="6858000"/>
           </a:xfrm>
           <a:prstGeom prst="rect">
             <a:avLst/>
           </a:prstGeom>
         </p:spPr>
       </p:pic>
+      <p:sp>
+        <p:nvSpPr>
+          <p:cNvPr id="3" name="Decorative s3-card-0" descr="" decorative="1">
+            <a:extLst>
+              <a:ext uri="{C183D7F6-B498-43B3-948B-1728B52AA6E4}">
+                <a16:decorative xmlns:a16="http://schemas.microsoft.com/office/drawing/2014/main">1</a16:decorative>
+              </a:ext>
+            </a:extLst>
+          </p:cNvPr>
+          <p:cNvSpPr/>
+          <p:nvPr/>
+        </p:nvSpPr>
+        <p:spPr>
+          <a:xfrm>
+            <a:off x="636422" y="1920240"/>
+            <a:ext cx="3383280" cy="3383280"/>
+          </a:xfrm>
+          <a:prstGeom prst="roundRect">
+            <a:avLst/>
+          </a:prstGeom>
+          <a:solidFill>
+            <a:srgbClr val="F1EEE7"/>
+          </a:solidFill>
+          <a:ln w="12700">
+            <a:solidFill>
+              <a:srgbClr val="CBD5E1"/>
+            </a:solidFill>
+            <a:prstDash val="solid"/>
+          </a:ln>
+        </p:spPr>
+      </p:sp>
+      <p:sp>
+        <p:nvSpPr>
+          <p:cNvPr id="4" name="Decorative s3-card-accent-0" descr="" decorative="1">
+            <a:extLst>
+              <a:ext uri="{C183D7F6-B498-43B3-948B-1728B52AA6E4}">
+                <a16:decorative xmlns:a16="http://schemas.microsoft.com/office/drawing/2014/main">1</a16:decorative>
+              </a:ext>
+            </a:extLst>
+          </p:cNvPr>
+          <p:cNvSpPr/>
+          <p:nvPr/>
+        </p:nvSpPr>
+        <p:spPr>
+          <a:xfrm>
+            <a:off x="956462" y="2286000"/>
+            <a:ext cx="658368" cy="658368"/>
+          </a:xfrm>
+          <a:prstGeom prst="roundRect">
+            <a:avLst/>
+          </a:prstGeom>
+          <a:solidFill>
+            <a:srgbClr val="8F3D35"/>
+          </a:solidFill>
+          <a:ln w="1270">
+            <a:solidFill>
+              <a:srgbClr val="8F3D35"/>
+            </a:solidFill>
+            <a:prstDash val="solid"/>
+          </a:ln>
+        </p:spPr>
+      </p:sp>
+      <p:pic>
+        <p:nvPicPr>
+          <p:cNvPr id="5" name="Image 1" descr="preencoded.png">    </p:cNvPr>
+          <p:cNvPicPr>
+            <a:picLocks noChangeAspect="1"/>
+          </p:cNvPicPr>
+          <p:nvPr/>
+        </p:nvPicPr>
+        <p:blipFill>
+          <a:blip r:embed="rId3">
+            <a:extLst>
+              <a:ext uri="{96DAC541-7B7A-43D3-8B79-37D633B846F1}">
+                <asvg:svgBlip xmlns:asvg="http://schemas.microsoft.com/office/drawing/2016/SVG/main" r:embed="rId4"/>
+              </a:ext>
+            </a:extLst>
+          </a:blip>
+          <a:stretch>
+            <a:fillRect/>
+          </a:stretch>
+        </p:blipFill>
+        <p:spPr>
+          <a:xfrm>
+            <a:off x="1121054" y="2450592"/>
+            <a:ext cx="329184" cy="329184"/>
+          </a:xfrm>
+          <a:prstGeom prst="rect">
+            <a:avLst/>
+          </a:prstGeom>
+        </p:spPr>
+      </p:pic>
+      <p:sp>
+        <p:nvSpPr>
+          <p:cNvPr id="6" name="Decorative s3-card-1" descr="" decorative="1">
+            <a:extLst>
+              <a:ext uri="{C183D7F6-B498-43B3-948B-1728B52AA6E4}">
+                <a16:decorative xmlns:a16="http://schemas.microsoft.com/office/drawing/2014/main">1</a16:decorative>
+              </a:ext>
+            </a:extLst>
+          </p:cNvPr>
+          <p:cNvSpPr/>
+          <p:nvPr/>
+        </p:nvSpPr>
+        <p:spPr>
+          <a:xfrm>
+            <a:off x="4403750" y="1920240"/>
+            <a:ext cx="3383280" cy="3383280"/>
+          </a:xfrm>
+          <a:prstGeom prst="roundRect">
+            <a:avLst/>
+          </a:prstGeom>
+          <a:solidFill>
+            <a:srgbClr val="F1EEE7"/>
+          </a:solidFill>
+          <a:ln w="12700">
+            <a:solidFill>
+              <a:srgbClr val="CBD5E1"/>
+            </a:solidFill>
+            <a:prstDash val="solid"/>
+          </a:ln>
+        </p:spPr>
+      </p:sp>
+      <p:sp>
+        <p:nvSpPr>
+          <p:cNvPr id="7" name="Decorative s3-card-accent-1" descr="" decorative="1">
+            <a:extLst>
+              <a:ext uri="{C183D7F6-B498-43B3-948B-1728B52AA6E4}">
+                <a16:decorative xmlns:a16="http://schemas.microsoft.com/office/drawing/2014/main">1</a16:decorative>
+              </a:ext>
+            </a:extLst>
+          </p:cNvPr>
+          <p:cNvSpPr/>
+          <p:nvPr/>
+        </p:nvSpPr>
+        <p:spPr>
+          <a:xfrm>
+            <a:off x="4723790" y="2286000"/>
+            <a:ext cx="658368" cy="658368"/>
+          </a:xfrm>
+          <a:prstGeom prst="roundRect">
+            <a:avLst/>
+          </a:prstGeom>
+          <a:solidFill>
+            <a:srgbClr val="8F3D35"/>
+          </a:solidFill>
+          <a:ln w="1270">
+            <a:solidFill>
+              <a:srgbClr val="8F3D35"/>
+            </a:solidFill>
+            <a:prstDash val="solid"/>
+          </a:ln>
+        </p:spPr>
+      </p:sp>
+      <p:pic>
+        <p:nvPicPr>
+          <p:cNvPr id="8" name="Image 2" descr="preencoded.png">    </p:cNvPr>
+          <p:cNvPicPr>
+            <a:picLocks noChangeAspect="1"/>
+          </p:cNvPicPr>
+          <p:nvPr/>
+        </p:nvPicPr>
+        <p:blipFill>
+          <a:blip r:embed="rId5">
+            <a:extLst>
+              <a:ext uri="{96DAC541-7B7A-43D3-8B79-37D633B846F1}">
+                <asvg:svgBlip xmlns:asvg="http://schemas.microsoft.com/office/drawing/2016/SVG/main" r:embed="rId6"/>
+              </a:ext>
+            </a:extLst>
+          </a:blip>
+          <a:stretch>
+            <a:fillRect/>
+          </a:stretch>
+        </p:blipFill>
+        <p:spPr>
+          <a:xfrm>
+            <a:off x="4888382" y="2450592"/>
+            <a:ext cx="329184" cy="329184"/>
+          </a:xfrm>
+          <a:prstGeom prst="rect">
+            <a:avLst/>
+          </a:prstGeom>
+        </p:spPr>
+      </p:pic>
+      <p:sp>
+        <p:nvSpPr>
+          <p:cNvPr id="9" name="Decorative s3-card-2" descr="" decorative="1">
+            <a:extLst>
+              <a:ext uri="{C183D7F6-B498-43B3-948B-1728B52AA6E4}">
+                <a16:decorative xmlns:a16="http://schemas.microsoft.com/office/drawing/2014/main">1</a16:decorative>
+              </a:ext>
+            </a:extLst>
+          </p:cNvPr>
+          <p:cNvSpPr/>
+          <p:nvPr/>
+        </p:nvSpPr>
+        <p:spPr>
+          <a:xfrm>
+            <a:off x="8171078" y="1920240"/>
+            <a:ext cx="3383280" cy="3383280"/>
+          </a:xfrm>
+          <a:prstGeom prst="roundRect">
+            <a:avLst/>
+          </a:prstGeom>
+          <a:solidFill>
+            <a:srgbClr val="F1EEE7"/>
+          </a:solidFill>
+          <a:ln w="12700">
+            <a:solidFill>
+              <a:srgbClr val="CBD5E1"/>
+            </a:solidFill>
+            <a:prstDash val="solid"/>
+          </a:ln>
+        </p:spPr>
+      </p:sp>
+      <p:sp>
+        <p:nvSpPr>
+          <p:cNvPr id="10" name="Decorative s3-card-accent-2" descr="" decorative="1">
+            <a:extLst>
+              <a:ext uri="{C183D7F6-B498-43B3-948B-1728B52AA6E4}">
+                <a16:decorative xmlns:a16="http://schemas.microsoft.com/office/drawing/2014/main">1</a16:decorative>
+              </a:ext>
+            </a:extLst>
+          </p:cNvPr>
+          <p:cNvSpPr/>
+          <p:nvPr/>
+        </p:nvSpPr>
+        <p:spPr>
+          <a:xfrm>
+            <a:off x="8491118" y="2286000"/>
+            <a:ext cx="658368" cy="658368"/>
+          </a:xfrm>
+          <a:prstGeom prst="roundRect">
+            <a:avLst/>
+          </a:prstGeom>
+          <a:solidFill>
+            <a:srgbClr val="8F3D35"/>
+          </a:solidFill>
+          <a:ln w="1270">
+            <a:solidFill>
+              <a:srgbClr val="8F3D35"/>
+            </a:solidFill>
+            <a:prstDash val="solid"/>
+          </a:ln>
+        </p:spPr>
+      </p:sp>
+      <p:pic>
+        <p:nvPicPr>
+          <p:cNvPr id="11" name="Image 3" descr="preencoded.png">    </p:cNvPr>
+          <p:cNvPicPr>
+            <a:picLocks noChangeAspect="1"/>
+          </p:cNvPicPr>
+          <p:nvPr/>
+        </p:nvPicPr>
+        <p:blipFill>
+          <a:blip r:embed="rId7">
+            <a:extLst>
+              <a:ext uri="{96DAC541-7B7A-43D3-8B79-37D633B846F1}">
+                <asvg:svgBlip xmlns:asvg="http://schemas.microsoft.com/office/drawing/2016/SVG/main" r:embed="rId8"/>
+              </a:ext>
+            </a:extLst>
+          </a:blip>
+          <a:stretch>
+            <a:fillRect/>
+          </a:stretch>
+        </p:blipFill>
+        <p:spPr>
+          <a:xfrm>
+            <a:off x="8655710" y="2450592"/>
+            <a:ext cx="329184" cy="329184"/>
+          </a:xfrm>
+          <a:prstGeom prst="rect">
+            <a:avLst/>
+          </a:prstGeom>
+        </p:spPr>
+      </p:pic>
+      <p:sp>
+        <p:nvSpPr>
+          <p:cNvPr id="12" name="Text 6"/>
+          <p:cNvSpPr/>
+          <p:nvPr/>
+        </p:nvSpPr>
+        <p:spPr>
+          <a:xfrm>
+            <a:off x="731520" y="640080"/>
+            <a:ext cx="10698480" cy="914400"/>
+          </a:xfrm>
+          <a:prstGeom prst="rect">
+            <a:avLst/>
+          </a:prstGeom>
+          <a:noFill/>
+          <a:ln/>
+        </p:spPr>
+        <p:txBody>
+          <a:bodyPr wrap="square" lIns="254" tIns="254" rIns="254" bIns="254" rtlCol="0" anchor="ctr">
+            <a:normAutofit/>
+          </a:bodyPr>
+          <a:lstStyle/>
+          <a:p>
+            <a:pPr algn="l" indent="0" marL="0">
+              <a:buNone/>
+            </a:pPr>
+            <a:r>
+              <a:rPr lang="en-US" sz="2800" b="1" spc="-40" kern="0" dirty="0">
+                <a:solidFill>
+                  <a:srgbClr val="24211D"/>
+                </a:solidFill>
+                <a:latin typeface="Yu Gothic" pitchFamily="34" charset="0"/>
+                <a:ea typeface="Yu Gothic" pitchFamily="34" charset="-122"/>
+                <a:cs typeface="Yu Gothic" pitchFamily="34" charset="-120"/>
+              </a:rPr>
+              <a:t>情報UIとしてのスライド設計</a:t>
+            </a:r>
+            <a:endParaRPr lang="en-US" sz="2800" dirty="0"/>
+          </a:p>
+        </p:txBody>
+      </p:sp>
+      <p:sp>
+        <p:nvSpPr>
+          <p:cNvPr id="13" name="Text 7"/>
+          <p:cNvSpPr/>
+          <p:nvPr/>
+        </p:nvSpPr>
+        <p:spPr>
+          <a:xfrm>
+            <a:off x="1002182" y="3154680"/>
+            <a:ext cx="2651760" cy="640080"/>
+          </a:xfrm>
+          <a:prstGeom prst="rect">
+            <a:avLst/>
+          </a:prstGeom>
+          <a:noFill/>
+          <a:ln/>
+        </p:spPr>
+        <p:txBody>
+          <a:bodyPr wrap="square" lIns="254" tIns="254" rIns="254" bIns="254" rtlCol="0" anchor="t">
+            <a:normAutofit/>
+          </a:bodyPr>
+          <a:lstStyle/>
+          <a:p>
+            <a:pPr algn="l" indent="0" marL="0">
+              <a:buNone/>
+            </a:pPr>
+            <a:r>
+              <a:rPr lang="en-US" sz="2200" b="1" spc="-40" kern="0" dirty="0">
+                <a:solidFill>
+                  <a:srgbClr val="24211D"/>
+                </a:solidFill>
+                <a:latin typeface="Yu Gothic" pitchFamily="34" charset="0"/>
+                <a:ea typeface="Yu Gothic" pitchFamily="34" charset="-122"/>
+                <a:cs typeface="Yu Gothic" pitchFamily="34" charset="-120"/>
+              </a:rPr>
+              <a:t>3秒で伝わる</a:t>
+            </a:r>
+            <a:endParaRPr lang="en-US" sz="2200" dirty="0"/>
+          </a:p>
+        </p:txBody>
+      </p:sp>
+      <p:sp>
+        <p:nvSpPr>
+          <p:cNvPr id="14" name="Text 8"/>
+          <p:cNvSpPr/>
+          <p:nvPr/>
+        </p:nvSpPr>
+        <p:spPr>
+          <a:xfrm>
+            <a:off x="1002182" y="3886200"/>
+            <a:ext cx="2651760" cy="1280160"/>
+          </a:xfrm>
+          <a:prstGeom prst="rect">
+            <a:avLst/>
+          </a:prstGeom>
+          <a:noFill/>
+          <a:ln/>
+        </p:spPr>
+        <p:txBody>
+          <a:bodyPr wrap="square" lIns="254" tIns="254" rIns="254" bIns="254" rtlCol="0" anchor="t">
+            <a:normAutofit/>
+          </a:bodyPr>
+          <a:lstStyle/>
+          <a:p>
+            <a:pPr algn="l" indent="0" marL="0">
+              <a:buNone/>
+            </a:pPr>
+            <a:r>
+              <a:rPr lang="en-US" sz="1400" dirty="0">
+                <a:solidFill>
+                  <a:srgbClr val="5F5A52"/>
+                </a:solidFill>
+                <a:latin typeface="Yu Gothic" pitchFamily="34" charset="0"/>
+                <a:ea typeface="Yu Gothic" pitchFamily="34" charset="-122"/>
+                <a:cs typeface="Yu Gothic" pitchFamily="34" charset="-120"/>
+              </a:rPr>
+              <a:t>結論型タイトルで要点を即伝達</a:t>
+            </a:r>
+            <a:endParaRPr lang="en-US" sz="1400" dirty="0"/>
+          </a:p>
+        </p:txBody>
+      </p:sp>
+      <p:sp>
+        <p:nvSpPr>
+          <p:cNvPr id="15" name="Text 9"/>
+          <p:cNvSpPr/>
+          <p:nvPr/>
+        </p:nvSpPr>
+        <p:spPr>
+          <a:xfrm>
+            <a:off x="4769510" y="3154680"/>
+            <a:ext cx="2651760" cy="640080"/>
+          </a:xfrm>
+          <a:prstGeom prst="rect">
+            <a:avLst/>
+          </a:prstGeom>
+          <a:noFill/>
+          <a:ln/>
+        </p:spPr>
+        <p:txBody>
+          <a:bodyPr wrap="square" lIns="254" tIns="254" rIns="254" bIns="254" rtlCol="0" anchor="t">
+            <a:normAutofit/>
+          </a:bodyPr>
+          <a:lstStyle/>
+          <a:p>
+            <a:pPr algn="l" indent="0" marL="0">
+              <a:buNone/>
+            </a:pPr>
+            <a:r>
+              <a:rPr lang="en-US" sz="2200" b="1" spc="-40" kern="0" dirty="0">
+                <a:solidFill>
+                  <a:srgbClr val="24211D"/>
+                </a:solidFill>
+                <a:latin typeface="Yu Gothic" pitchFamily="34" charset="0"/>
+                <a:ea typeface="Yu Gothic" pitchFamily="34" charset="-122"/>
+                <a:cs typeface="Yu Gothic" pitchFamily="34" charset="-120"/>
+              </a:rPr>
+              <a:t>視覚階層</a:t>
+            </a:r>
+            <a:endParaRPr lang="en-US" sz="2200" dirty="0"/>
+          </a:p>
+        </p:txBody>
+      </p:sp>
+      <p:sp>
+        <p:nvSpPr>
+          <p:cNvPr id="16" name="Text 10"/>
+          <p:cNvSpPr/>
+          <p:nvPr/>
+        </p:nvSpPr>
+        <p:spPr>
+          <a:xfrm>
+            <a:off x="4769510" y="3886200"/>
+            <a:ext cx="2651760" cy="1280160"/>
+          </a:xfrm>
+          <a:prstGeom prst="rect">
+            <a:avLst/>
+          </a:prstGeom>
+          <a:noFill/>
+          <a:ln/>
+        </p:spPr>
+        <p:txBody>
+          <a:bodyPr wrap="square" lIns="254" tIns="254" rIns="254" bIns="254" rtlCol="0" anchor="t">
+            <a:normAutofit/>
+          </a:bodyPr>
+          <a:lstStyle/>
+          <a:p>
+            <a:pPr algn="l" indent="0" marL="0">
+              <a:buNone/>
+            </a:pPr>
+            <a:r>
+              <a:rPr lang="en-US" sz="1400" dirty="0">
+                <a:solidFill>
+                  <a:srgbClr val="5F5A52"/>
+                </a:solidFill>
+                <a:latin typeface="Yu Gothic" pitchFamily="34" charset="0"/>
+                <a:ea typeface="Yu Gothic" pitchFamily="34" charset="-122"/>
+                <a:cs typeface="Yu Gothic" pitchFamily="34" charset="-120"/>
+              </a:rPr>
+              <a:t>サイズ・余白・色で視線を設計</a:t>
+            </a:r>
+            <a:endParaRPr lang="en-US" sz="1400" dirty="0"/>
+          </a:p>
+        </p:txBody>
+      </p:sp>
+      <p:sp>
+        <p:nvSpPr>
+          <p:cNvPr id="17" name="Text 11"/>
+          <p:cNvSpPr/>
+          <p:nvPr/>
+        </p:nvSpPr>
+        <p:spPr>
+          <a:xfrm>
+            <a:off x="8536838" y="3154680"/>
+            <a:ext cx="2651760" cy="640080"/>
+          </a:xfrm>
+          <a:prstGeom prst="rect">
+            <a:avLst/>
+          </a:prstGeom>
+          <a:noFill/>
+          <a:ln/>
+        </p:spPr>
+        <p:txBody>
+          <a:bodyPr wrap="square" lIns="254" tIns="254" rIns="254" bIns="254" rtlCol="0" anchor="t">
+            <a:normAutofit/>
+          </a:bodyPr>
+          <a:lstStyle/>
+          <a:p>
+            <a:pPr algn="l" indent="0" marL="0">
+              <a:buNone/>
+            </a:pPr>
+            <a:r>
+              <a:rPr lang="en-US" sz="2200" b="1" spc="-40" kern="0" dirty="0">
+                <a:solidFill>
+                  <a:srgbClr val="24211D"/>
+                </a:solidFill>
+                <a:latin typeface="Yu Gothic" pitchFamily="34" charset="0"/>
+                <a:ea typeface="Yu Gothic" pitchFamily="34" charset="-122"/>
+                <a:cs typeface="Yu Gothic" pitchFamily="34" charset="-120"/>
+              </a:rPr>
+              <a:t>アクセシブル</a:t>
+            </a:r>
+            <a:endParaRPr lang="en-US" sz="2200" dirty="0"/>
+          </a:p>
+        </p:txBody>
+      </p:sp>
+      <p:sp>
+        <p:nvSpPr>
+          <p:cNvPr id="18" name="Text 12"/>
+          <p:cNvSpPr/>
+          <p:nvPr/>
+        </p:nvSpPr>
+        <p:spPr>
+          <a:xfrm>
+            <a:off x="8536838" y="3886200"/>
+            <a:ext cx="2651760" cy="1280160"/>
+          </a:xfrm>
+          <a:prstGeom prst="rect">
+            <a:avLst/>
+          </a:prstGeom>
+          <a:noFill/>
+          <a:ln/>
+        </p:spPr>
+        <p:txBody>
+          <a:bodyPr wrap="square" lIns="254" tIns="254" rIns="254" bIns="254" rtlCol="0" anchor="t">
+            <a:normAutofit/>
+          </a:bodyPr>
+          <a:lstStyle/>
+          <a:p>
+            <a:pPr algn="l" indent="0" marL="0">
+              <a:buNone/>
+            </a:pPr>
+            <a:r>
+              <a:rPr lang="en-US" sz="2000" dirty="0">
+                <a:solidFill>
+                  <a:srgbClr val="5F5A52"/>
+                </a:solidFill>
+                <a:latin typeface="Yu Gothic" pitchFamily="34" charset="0"/>
+                <a:ea typeface="Yu Gothic" pitchFamily="34" charset="-122"/>
+                <a:cs typeface="Yu Gothic" pitchFamily="34" charset="-120"/>
+              </a:rPr>
+              <a:t>コントラスト・読み</a:t>
+            </a:r>
+            <a:endParaRPr lang="en-US" sz="2000" dirty="0"/>
+          </a:p>
+          <a:p>
+            <a:pPr algn="l" indent="0" marL="0">
+              <a:buNone/>
+            </a:pPr>
+            <a:r>
+              <a:rPr lang="en-US" sz="2000" dirty="0">
+                <a:solidFill>
+                  <a:srgbClr val="5F5A52"/>
+                </a:solidFill>
+                <a:latin typeface="Yu Gothic" pitchFamily="34" charset="0"/>
+                <a:ea typeface="Yu Gothic" pitchFamily="34" charset="-122"/>
+                <a:cs typeface="Yu Gothic" pitchFamily="34" charset="-120"/>
+              </a:rPr>
+              <a:t>順・alt textを検証</a:t>
+            </a:r>
+            <a:endParaRPr lang="en-US" sz="2000" dirty="0"/>
+          </a:p>
+        </p:txBody>
+      </p:sp>
     </p:spTree>
   </p:cSld>
   <p:clrMapOvr>
@@ -1338,7 +3159,7 @@
       </p:grpSpPr>
       <p:pic>
         <p:nvPicPr>
-          <p:cNvPr id="2" name="Image 0" descr="list schematic">    </p:cNvPr>
+          <p:cNvPr id="2" name="Image 0" descr="preencoded.png">    </p:cNvPr>
           <p:cNvPicPr>
             <a:picLocks noChangeAspect="1"/>
           </p:cNvPicPr>
@@ -1358,14 +3179,157 @@
         </p:blipFill>
         <p:spPr>
           <a:xfrm>
-            <a:off x="502920" y="502920"/>
-            <a:ext cx="11155680" cy="5852160"/>
+            <a:off x="0" y="0"/>
+            <a:ext cx="12191695" cy="6858000"/>
           </a:xfrm>
           <a:prstGeom prst="rect">
             <a:avLst/>
           </a:prstGeom>
         </p:spPr>
       </p:pic>
+      <p:sp>
+        <p:nvSpPr>
+          <p:cNvPr id="3" name="Decorative s4-closing-rule" descr="" decorative="1">
+            <a:extLst>
+              <a:ext uri="{C183D7F6-B498-43B3-948B-1728B52AA6E4}">
+                <a16:decorative xmlns:a16="http://schemas.microsoft.com/office/drawing/2014/main">1</a16:decorative>
+              </a:ext>
+            </a:extLst>
+          </p:cNvPr>
+          <p:cNvSpPr/>
+          <p:nvPr/>
+        </p:nvSpPr>
+        <p:spPr>
+          <a:xfrm>
+            <a:off x="914400" y="3886200"/>
+            <a:ext cx="2194560" cy="73152"/>
+          </a:xfrm>
+          <a:prstGeom prst="rect">
+            <a:avLst/>
+          </a:prstGeom>
+          <a:solidFill>
+            <a:srgbClr val="FFFFFF"/>
+          </a:solidFill>
+          <a:ln w="1270">
+            <a:solidFill>
+              <a:srgbClr val="FFFFFF"/>
+            </a:solidFill>
+            <a:prstDash val="solid"/>
+          </a:ln>
+        </p:spPr>
+      </p:sp>
+      <p:pic>
+        <p:nvPicPr>
+          <p:cNvPr id="4" name="Image 1" descr="preencoded.png">    </p:cNvPr>
+          <p:cNvPicPr>
+            <a:picLocks noChangeAspect="1"/>
+          </p:cNvPicPr>
+          <p:nvPr/>
+        </p:nvPicPr>
+        <p:blipFill>
+          <a:blip r:embed="rId3">
+            <a:extLst>
+              <a:ext uri="{96DAC541-7B7A-43D3-8B79-37D633B846F1}">
+                <asvg:svgBlip xmlns:asvg="http://schemas.microsoft.com/office/drawing/2016/SVG/main" r:embed="rId4"/>
+              </a:ext>
+            </a:extLst>
+          </a:blip>
+          <a:stretch>
+            <a:fillRect/>
+          </a:stretch>
+        </p:blipFill>
+        <p:spPr>
+          <a:xfrm>
+            <a:off x="914400" y="1371600"/>
+            <a:ext cx="640080" cy="640080"/>
+          </a:xfrm>
+          <a:prstGeom prst="rect">
+            <a:avLst/>
+          </a:prstGeom>
+        </p:spPr>
+      </p:pic>
+      <p:sp>
+        <p:nvSpPr>
+          <p:cNvPr id="5" name="Text 1"/>
+          <p:cNvSpPr/>
+          <p:nvPr/>
+        </p:nvSpPr>
+        <p:spPr>
+          <a:xfrm>
+            <a:off x="914400" y="2194560"/>
+            <a:ext cx="10332720" cy="1645920"/>
+          </a:xfrm>
+          <a:prstGeom prst="rect">
+            <a:avLst/>
+          </a:prstGeom>
+          <a:noFill/>
+          <a:ln/>
+        </p:spPr>
+        <p:txBody>
+          <a:bodyPr wrap="square" lIns="254" tIns="254" rIns="254" bIns="254" rtlCol="0" anchor="t">
+            <a:normAutofit/>
+          </a:bodyPr>
+          <a:lstStyle/>
+          <a:p>
+            <a:pPr algn="l" indent="0" marL="0">
+              <a:buNone/>
+            </a:pPr>
+            <a:r>
+              <a:rPr lang="en-US" sz="3000" b="1" spc="-40" kern="0" dirty="0">
+                <a:solidFill>
+                  <a:srgbClr val="FFFFFF"/>
+                </a:solidFill>
+                <a:latin typeface="Yu Gothic" pitchFamily="34" charset="0"/>
+                <a:ea typeface="Yu Gothic" pitchFamily="34" charset="-122"/>
+                <a:cs typeface="Yu Gothic" pitchFamily="34" charset="-120"/>
+              </a:rPr>
+              <a:t>用途別スタイル選定</a:t>
+            </a:r>
+            <a:endParaRPr lang="en-US" sz="3000" dirty="0"/>
+          </a:p>
+        </p:txBody>
+      </p:sp>
+      <p:sp>
+        <p:nvSpPr>
+          <p:cNvPr id="6" name="Text 2"/>
+          <p:cNvSpPr/>
+          <p:nvPr/>
+        </p:nvSpPr>
+        <p:spPr>
+          <a:xfrm>
+            <a:off x="914400" y="4206240"/>
+            <a:ext cx="10332720" cy="1463040"/>
+          </a:xfrm>
+          <a:prstGeom prst="rect">
+            <a:avLst/>
+          </a:prstGeom>
+          <a:noFill/>
+          <a:ln/>
+        </p:spPr>
+        <p:txBody>
+          <a:bodyPr wrap="square" lIns="254" tIns="254" rIns="254" bIns="254" rtlCol="0" anchor="t">
+            <a:normAutofit/>
+          </a:bodyPr>
+          <a:lstStyle/>
+          <a:p>
+            <a:pPr algn="l" indent="0" marL="0">
+              <a:buNone/>
+            </a:pPr>
+            <a:r>
+              <a:rPr lang="en-US" sz="2000" dirty="0">
+                <a:solidFill>
+                  <a:srgbClr val="FFFFFF"/>
+                </a:solidFill>
+                <a:latin typeface="Yu Gothic" pitchFamily="34" charset="0"/>
+                <a:ea typeface="Yu Gothic" pitchFamily="34" charset="-122"/>
+                <a:cs typeface="Yu Gothic" pitchFamily="34" charset="-120"/>
+              </a:rPr>
+              <a:t>現在のスタイル: report。テンプレート: report-formal。</a:t>
+            </a:r>
+            <a:endParaRPr lang="en-US" sz="2000" dirty="0"/>
+          </a:p>
+        </p:txBody>
+      </p:sp>
     </p:spTree>
   </p:cSld>
   <p:clrMapOvr>

--- a/samples/pptcreater-overview-report.pptx
+++ b/samples/pptcreater-overview-report.pptx
@@ -1530,7 +1530,7 @@
         <p:spPr>
           <a:xfrm>
             <a:off x="7406640" y="2468880"/>
-            <a:ext cx="3749040" cy="2926080"/>
+            <a:ext cx="3851453" cy="2926080"/>
           </a:xfrm>
           <a:prstGeom prst="rect">
             <a:avLst/>
@@ -2912,7 +2912,7 @@
         <p:spPr>
           <a:xfrm>
             <a:off x="1002182" y="3886200"/>
-            <a:ext cx="2651760" cy="1280160"/>
+            <a:ext cx="2702966" cy="1280160"/>
           </a:xfrm>
           <a:prstGeom prst="rect">
             <a:avLst/>
@@ -2994,7 +2994,7 @@
         <p:spPr>
           <a:xfrm>
             <a:off x="4769510" y="3886200"/>
-            <a:ext cx="2651760" cy="1280160"/>
+            <a:ext cx="2702966" cy="1280160"/>
           </a:xfrm>
           <a:prstGeom prst="rect">
             <a:avLst/>

--- a/samples/pptcreater-overview-report.pptx
+++ b/samples/pptcreater-overview-report.pptx
@@ -4,15 +4,15 @@
   <p:sldMasterIdLst>
     <p:sldMasterId id="2147483648" r:id="rId1"/>
   </p:sldMasterIdLst>
+  <p:notesMasterIdLst>
+    <p:notesMasterId r:id="rId6"/>
+  </p:notesMasterIdLst>
   <p:sldIdLst>
     <p:sldId id="256" r:id="rId2"/>
     <p:sldId id="257" r:id="rId3"/>
     <p:sldId id="258" r:id="rId4"/>
     <p:sldId id="259" r:id="rId5"/>
   </p:sldIdLst>
-  <p:notesMasterIdLst>
-    <p:notesMasterId r:id="rId6"/>
-  </p:notesMasterIdLst>
   <p:sldSz cx="12192000" cy="6858000"/>
   <p:notesSz cx="6858000" cy="12192000"/>
   <p:defaultTextStyle>
@@ -1178,10 +1178,10 @@
       </p:pic>
       <p:sp>
         <p:nvSpPr>
-          <p:cNvPr id="3" name="Decorative s1-hero-band" descr="" decorative="1">
+          <p:cNvPr id="3" name="Decorative s1-hero-band" descr="">
             <a:extLst>
               <a:ext uri="{C183D7F6-B498-43B3-948B-1728B52AA6E4}">
-                <a16:decorative xmlns:a16="http://schemas.microsoft.com/office/drawing/2014/main">1</a16:decorative>
+                <adec:decorative xmlns:adec="http://schemas.microsoft.com/office/drawing/2017/decorative" val="1"/>
               </a:ext>
             </a:extLst>
           </p:cNvPr>
@@ -1209,10 +1209,10 @@
       </p:sp>
       <p:sp>
         <p:nvSpPr>
-          <p:cNvPr id="4" name="Decorative s1-hero-panel" descr="" decorative="1">
+          <p:cNvPr id="4" name="Decorative s1-hero-panel" descr="">
             <a:extLst>
               <a:ext uri="{C183D7F6-B498-43B3-948B-1728B52AA6E4}">
-                <a16:decorative xmlns:a16="http://schemas.microsoft.com/office/drawing/2014/main">1</a16:decorative>
+                <adec:decorative xmlns:adec="http://schemas.microsoft.com/office/drawing/2017/decorative" val="1"/>
               </a:ext>
             </a:extLst>
           </p:cNvPr>
@@ -1240,10 +1240,10 @@
       </p:sp>
       <p:sp>
         <p:nvSpPr>
-          <p:cNvPr id="5" name="Decorative s1-hero-panel-accent" descr="" decorative="1">
+          <p:cNvPr id="5" name="Decorative s1-hero-panel-accent" descr="">
             <a:extLst>
               <a:ext uri="{C183D7F6-B498-43B3-948B-1728B52AA6E4}">
-                <a16:decorative xmlns:a16="http://schemas.microsoft.com/office/drawing/2014/main">1</a16:decorative>
+                <adec:decorative xmlns:adec="http://schemas.microsoft.com/office/drawing/2017/decorative" val="1"/>
               </a:ext>
             </a:extLst>
           </p:cNvPr>
@@ -1660,10 +1660,10 @@
       </p:pic>
       <p:sp>
         <p:nvSpPr>
-          <p:cNvPr id="3" name="Decorative s2-track" descr="" decorative="1">
+          <p:cNvPr id="3" name="Decorative s2-track" descr="">
             <a:extLst>
               <a:ext uri="{C183D7F6-B498-43B3-948B-1728B52AA6E4}">
-                <a16:decorative xmlns:a16="http://schemas.microsoft.com/office/drawing/2014/main">1</a16:decorative>
+                <adec:decorative xmlns:adec="http://schemas.microsoft.com/office/drawing/2017/decorative" val="1"/>
               </a:ext>
             </a:extLst>
           </p:cNvPr>
@@ -1688,10 +1688,10 @@
       </p:sp>
       <p:sp>
         <p:nvSpPr>
-          <p:cNvPr id="4" name="Decorative s2-node-0" descr="" decorative="1">
+          <p:cNvPr id="4" name="Decorative s2-node-0" descr="">
             <a:extLst>
               <a:ext uri="{C183D7F6-B498-43B3-948B-1728B52AA6E4}">
-                <a16:decorative xmlns:a16="http://schemas.microsoft.com/office/drawing/2014/main">1</a16:decorative>
+                <adec:decorative xmlns:adec="http://schemas.microsoft.com/office/drawing/2017/decorative" val="1"/>
               </a:ext>
             </a:extLst>
           </p:cNvPr>
@@ -1749,10 +1749,10 @@
       </p:pic>
       <p:sp>
         <p:nvSpPr>
-          <p:cNvPr id="6" name="Decorative s2-node-1" descr="" decorative="1">
+          <p:cNvPr id="6" name="Decorative s2-node-1" descr="">
             <a:extLst>
               <a:ext uri="{C183D7F6-B498-43B3-948B-1728B52AA6E4}">
-                <a16:decorative xmlns:a16="http://schemas.microsoft.com/office/drawing/2014/main">1</a16:decorative>
+                <adec:decorative xmlns:adec="http://schemas.microsoft.com/office/drawing/2017/decorative" val="1"/>
               </a:ext>
             </a:extLst>
           </p:cNvPr>
@@ -1810,10 +1810,10 @@
       </p:pic>
       <p:sp>
         <p:nvSpPr>
-          <p:cNvPr id="8" name="Decorative s2-node-2" descr="" decorative="1">
+          <p:cNvPr id="8" name="Decorative s2-node-2" descr="">
             <a:extLst>
               <a:ext uri="{C183D7F6-B498-43B3-948B-1728B52AA6E4}">
-                <a16:decorative xmlns:a16="http://schemas.microsoft.com/office/drawing/2014/main">1</a16:decorative>
+                <adec:decorative xmlns:adec="http://schemas.microsoft.com/office/drawing/2017/decorative" val="1"/>
               </a:ext>
             </a:extLst>
           </p:cNvPr>
@@ -1871,10 +1871,10 @@
       </p:pic>
       <p:sp>
         <p:nvSpPr>
-          <p:cNvPr id="10" name="Decorative s2-node-3" descr="" decorative="1">
+          <p:cNvPr id="10" name="Decorative s2-node-3" descr="">
             <a:extLst>
               <a:ext uri="{C183D7F6-B498-43B3-948B-1728B52AA6E4}">
-                <a16:decorative xmlns:a16="http://schemas.microsoft.com/office/drawing/2014/main">1</a16:decorative>
+                <adec:decorative xmlns:adec="http://schemas.microsoft.com/office/drawing/2017/decorative" val="1"/>
               </a:ext>
             </a:extLst>
           </p:cNvPr>
@@ -1932,10 +1932,10 @@
       </p:pic>
       <p:sp>
         <p:nvSpPr>
-          <p:cNvPr id="12" name="Decorative s2-node-4" descr="" decorative="1">
+          <p:cNvPr id="12" name="Decorative s2-node-4" descr="">
             <a:extLst>
               <a:ext uri="{C183D7F6-B498-43B3-948B-1728B52AA6E4}">
-                <a16:decorative xmlns:a16="http://schemas.microsoft.com/office/drawing/2014/main">1</a16:decorative>
+                <adec:decorative xmlns:adec="http://schemas.microsoft.com/office/drawing/2017/decorative" val="1"/>
               </a:ext>
             </a:extLst>
           </p:cNvPr>
@@ -2547,10 +2547,10 @@
       </p:pic>
       <p:sp>
         <p:nvSpPr>
-          <p:cNvPr id="3" name="Decorative s3-card-0" descr="" decorative="1">
+          <p:cNvPr id="3" name="Decorative s3-card-0" descr="">
             <a:extLst>
               <a:ext uri="{C183D7F6-B498-43B3-948B-1728B52AA6E4}">
-                <a16:decorative xmlns:a16="http://schemas.microsoft.com/office/drawing/2014/main">1</a16:decorative>
+                <adec:decorative xmlns:adec="http://schemas.microsoft.com/office/drawing/2017/decorative" val="1"/>
               </a:ext>
             </a:extLst>
           </p:cNvPr>
@@ -2578,10 +2578,10 @@
       </p:sp>
       <p:sp>
         <p:nvSpPr>
-          <p:cNvPr id="4" name="Decorative s3-card-accent-0" descr="" decorative="1">
+          <p:cNvPr id="4" name="Decorative s3-card-accent-0" descr="">
             <a:extLst>
               <a:ext uri="{C183D7F6-B498-43B3-948B-1728B52AA6E4}">
-                <a16:decorative xmlns:a16="http://schemas.microsoft.com/office/drawing/2014/main">1</a16:decorative>
+                <adec:decorative xmlns:adec="http://schemas.microsoft.com/office/drawing/2017/decorative" val="1"/>
               </a:ext>
             </a:extLst>
           </p:cNvPr>
@@ -2639,10 +2639,10 @@
       </p:pic>
       <p:sp>
         <p:nvSpPr>
-          <p:cNvPr id="6" name="Decorative s3-card-1" descr="" decorative="1">
+          <p:cNvPr id="6" name="Decorative s3-card-1" descr="">
             <a:extLst>
               <a:ext uri="{C183D7F6-B498-43B3-948B-1728B52AA6E4}">
-                <a16:decorative xmlns:a16="http://schemas.microsoft.com/office/drawing/2014/main">1</a16:decorative>
+                <adec:decorative xmlns:adec="http://schemas.microsoft.com/office/drawing/2017/decorative" val="1"/>
               </a:ext>
             </a:extLst>
           </p:cNvPr>
@@ -2670,10 +2670,10 @@
       </p:sp>
       <p:sp>
         <p:nvSpPr>
-          <p:cNvPr id="7" name="Decorative s3-card-accent-1" descr="" decorative="1">
+          <p:cNvPr id="7" name="Decorative s3-card-accent-1" descr="">
             <a:extLst>
               <a:ext uri="{C183D7F6-B498-43B3-948B-1728B52AA6E4}">
-                <a16:decorative xmlns:a16="http://schemas.microsoft.com/office/drawing/2014/main">1</a16:decorative>
+                <adec:decorative xmlns:adec="http://schemas.microsoft.com/office/drawing/2017/decorative" val="1"/>
               </a:ext>
             </a:extLst>
           </p:cNvPr>
@@ -2731,10 +2731,10 @@
       </p:pic>
       <p:sp>
         <p:nvSpPr>
-          <p:cNvPr id="9" name="Decorative s3-card-2" descr="" decorative="1">
+          <p:cNvPr id="9" name="Decorative s3-card-2" descr="">
             <a:extLst>
               <a:ext uri="{C183D7F6-B498-43B3-948B-1728B52AA6E4}">
-                <a16:decorative xmlns:a16="http://schemas.microsoft.com/office/drawing/2014/main">1</a16:decorative>
+                <adec:decorative xmlns:adec="http://schemas.microsoft.com/office/drawing/2017/decorative" val="1"/>
               </a:ext>
             </a:extLst>
           </p:cNvPr>
@@ -2762,10 +2762,10 @@
       </p:sp>
       <p:sp>
         <p:nvSpPr>
-          <p:cNvPr id="10" name="Decorative s3-card-accent-2" descr="" decorative="1">
+          <p:cNvPr id="10" name="Decorative s3-card-accent-2" descr="">
             <a:extLst>
               <a:ext uri="{C183D7F6-B498-43B3-948B-1728B52AA6E4}">
-                <a16:decorative xmlns:a16="http://schemas.microsoft.com/office/drawing/2014/main">1</a16:decorative>
+                <adec:decorative xmlns:adec="http://schemas.microsoft.com/office/drawing/2017/decorative" val="1"/>
               </a:ext>
             </a:extLst>
           </p:cNvPr>
@@ -3189,10 +3189,10 @@
       </p:pic>
       <p:sp>
         <p:nvSpPr>
-          <p:cNvPr id="3" name="Decorative s4-closing-rule" descr="" decorative="1">
+          <p:cNvPr id="3" name="Decorative s4-closing-rule" descr="">
             <a:extLst>
               <a:ext uri="{C183D7F6-B498-43B3-948B-1728B52AA6E4}">
-                <a16:decorative xmlns:a16="http://schemas.microsoft.com/office/drawing/2014/main">1</a16:decorative>
+                <adec:decorative xmlns:adec="http://schemas.microsoft.com/office/drawing/2017/decorative" val="1"/>
               </a:ext>
             </a:extLst>
           </p:cNvPr>

--- a/samples/pptcreater-overview-report.pptx
+++ b/samples/pptcreater-overview-report.pptx
@@ -4,15 +4,15 @@
   <p:sldMasterIdLst>
     <p:sldMasterId id="2147483648" r:id="rId1"/>
   </p:sldMasterIdLst>
-  <p:notesMasterIdLst>
-    <p:notesMasterId r:id="rId6"/>
-  </p:notesMasterIdLst>
   <p:sldIdLst>
     <p:sldId id="256" r:id="rId2"/>
     <p:sldId id="257" r:id="rId3"/>
     <p:sldId id="258" r:id="rId4"/>
     <p:sldId id="259" r:id="rId5"/>
   </p:sldIdLst>
+  <p:notesMasterIdLst>
+    <p:notesMasterId r:id="rId6"/>
+  </p:notesMasterIdLst>
   <p:sldSz cx="12192000" cy="6858000"/>
   <p:notesSz cx="6858000" cy="12192000"/>
   <p:defaultTextStyle>
@@ -1155,13 +1155,7 @@
           <p:nvPr/>
         </p:nvPicPr>
         <p:blipFill>
-          <a:blip r:embed="rId1">
-            <a:extLst>
-              <a:ext uri="{96DAC541-7B7A-43D3-8B79-37D633B846F1}">
-                <asvg:svgBlip xmlns:asvg="http://schemas.microsoft.com/office/drawing/2016/SVG/main" r:embed="rId2"/>
-              </a:ext>
-            </a:extLst>
-          </a:blip>
+          <a:blip r:embed="rId1"/>
           <a:stretch>
             <a:fillRect/>
           </a:stretch>
@@ -1278,13 +1272,7 @@
           <p:nvPr/>
         </p:nvPicPr>
         <p:blipFill>
-          <a:blip r:embed="rId3">
-            <a:extLst>
-              <a:ext uri="{96DAC541-7B7A-43D3-8B79-37D633B846F1}">
-                <asvg:svgBlip xmlns:asvg="http://schemas.microsoft.com/office/drawing/2016/SVG/main" r:embed="rId4"/>
-              </a:ext>
-            </a:extLst>
-          </a:blip>
+          <a:blip r:embed="rId2"/>
           <a:stretch>
             <a:fillRect/>
           </a:stretch>
@@ -1637,13 +1625,7 @@
           <p:nvPr/>
         </p:nvPicPr>
         <p:blipFill>
-          <a:blip r:embed="rId1">
-            <a:extLst>
-              <a:ext uri="{96DAC541-7B7A-43D3-8B79-37D633B846F1}">
-                <asvg:svgBlip xmlns:asvg="http://schemas.microsoft.com/office/drawing/2016/SVG/main" r:embed="rId2"/>
-              </a:ext>
-            </a:extLst>
-          </a:blip>
+          <a:blip r:embed="rId1"/>
           <a:stretch>
             <a:fillRect/>
           </a:stretch>
@@ -1726,13 +1708,7 @@
           <p:nvPr/>
         </p:nvPicPr>
         <p:blipFill>
-          <a:blip r:embed="rId3">
-            <a:extLst>
-              <a:ext uri="{96DAC541-7B7A-43D3-8B79-37D633B846F1}">
-                <asvg:svgBlip xmlns:asvg="http://schemas.microsoft.com/office/drawing/2016/SVG/main" r:embed="rId4"/>
-              </a:ext>
-            </a:extLst>
-          </a:blip>
+          <a:blip r:embed="rId2"/>
           <a:stretch>
             <a:fillRect/>
           </a:stretch>
@@ -1787,13 +1763,7 @@
           <p:nvPr/>
         </p:nvPicPr>
         <p:blipFill>
-          <a:blip r:embed="rId5">
-            <a:extLst>
-              <a:ext uri="{96DAC541-7B7A-43D3-8B79-37D633B846F1}">
-                <asvg:svgBlip xmlns:asvg="http://schemas.microsoft.com/office/drawing/2016/SVG/main" r:embed="rId6"/>
-              </a:ext>
-            </a:extLst>
-          </a:blip>
+          <a:blip r:embed="rId3"/>
           <a:stretch>
             <a:fillRect/>
           </a:stretch>
@@ -1848,13 +1818,7 @@
           <p:nvPr/>
         </p:nvPicPr>
         <p:blipFill>
-          <a:blip r:embed="rId7">
-            <a:extLst>
-              <a:ext uri="{96DAC541-7B7A-43D3-8B79-37D633B846F1}">
-                <asvg:svgBlip xmlns:asvg="http://schemas.microsoft.com/office/drawing/2016/SVG/main" r:embed="rId8"/>
-              </a:ext>
-            </a:extLst>
-          </a:blip>
+          <a:blip r:embed="rId4"/>
           <a:stretch>
             <a:fillRect/>
           </a:stretch>
@@ -1909,13 +1873,7 @@
           <p:nvPr/>
         </p:nvPicPr>
         <p:blipFill>
-          <a:blip r:embed="rId9">
-            <a:extLst>
-              <a:ext uri="{96DAC541-7B7A-43D3-8B79-37D633B846F1}">
-                <asvg:svgBlip xmlns:asvg="http://schemas.microsoft.com/office/drawing/2016/SVG/main" r:embed="rId10"/>
-              </a:ext>
-            </a:extLst>
-          </a:blip>
+          <a:blip r:embed="rId5"/>
           <a:stretch>
             <a:fillRect/>
           </a:stretch>
@@ -1970,13 +1928,7 @@
           <p:nvPr/>
         </p:nvPicPr>
         <p:blipFill>
-          <a:blip r:embed="rId11">
-            <a:extLst>
-              <a:ext uri="{96DAC541-7B7A-43D3-8B79-37D633B846F1}">
-                <asvg:svgBlip xmlns:asvg="http://schemas.microsoft.com/office/drawing/2016/SVG/main" r:embed="rId12"/>
-              </a:ext>
-            </a:extLst>
-          </a:blip>
+          <a:blip r:embed="rId6"/>
           <a:stretch>
             <a:fillRect/>
           </a:stretch>
@@ -2524,13 +2476,7 @@
           <p:nvPr/>
         </p:nvPicPr>
         <p:blipFill>
-          <a:blip r:embed="rId1">
-            <a:extLst>
-              <a:ext uri="{96DAC541-7B7A-43D3-8B79-37D633B846F1}">
-                <asvg:svgBlip xmlns:asvg="http://schemas.microsoft.com/office/drawing/2016/SVG/main" r:embed="rId2"/>
-              </a:ext>
-            </a:extLst>
-          </a:blip>
+          <a:blip r:embed="rId1"/>
           <a:stretch>
             <a:fillRect/>
           </a:stretch>
@@ -2616,13 +2562,7 @@
           <p:nvPr/>
         </p:nvPicPr>
         <p:blipFill>
-          <a:blip r:embed="rId3">
-            <a:extLst>
-              <a:ext uri="{96DAC541-7B7A-43D3-8B79-37D633B846F1}">
-                <asvg:svgBlip xmlns:asvg="http://schemas.microsoft.com/office/drawing/2016/SVG/main" r:embed="rId4"/>
-              </a:ext>
-            </a:extLst>
-          </a:blip>
+          <a:blip r:embed="rId2"/>
           <a:stretch>
             <a:fillRect/>
           </a:stretch>
@@ -2708,13 +2648,7 @@
           <p:nvPr/>
         </p:nvPicPr>
         <p:blipFill>
-          <a:blip r:embed="rId5">
-            <a:extLst>
-              <a:ext uri="{96DAC541-7B7A-43D3-8B79-37D633B846F1}">
-                <asvg:svgBlip xmlns:asvg="http://schemas.microsoft.com/office/drawing/2016/SVG/main" r:embed="rId6"/>
-              </a:ext>
-            </a:extLst>
-          </a:blip>
+          <a:blip r:embed="rId3"/>
           <a:stretch>
             <a:fillRect/>
           </a:stretch>
@@ -2800,13 +2734,7 @@
           <p:nvPr/>
         </p:nvPicPr>
         <p:blipFill>
-          <a:blip r:embed="rId7">
-            <a:extLst>
-              <a:ext uri="{96DAC541-7B7A-43D3-8B79-37D633B846F1}">
-                <asvg:svgBlip xmlns:asvg="http://schemas.microsoft.com/office/drawing/2016/SVG/main" r:embed="rId8"/>
-              </a:ext>
-            </a:extLst>
-          </a:blip>
+          <a:blip r:embed="rId4"/>
           <a:stretch>
             <a:fillRect/>
           </a:stretch>
@@ -3166,13 +3094,7 @@
           <p:nvPr/>
         </p:nvPicPr>
         <p:blipFill>
-          <a:blip r:embed="rId1">
-            <a:extLst>
-              <a:ext uri="{96DAC541-7B7A-43D3-8B79-37D633B846F1}">
-                <asvg:svgBlip xmlns:asvg="http://schemas.microsoft.com/office/drawing/2016/SVG/main" r:embed="rId2"/>
-              </a:ext>
-            </a:extLst>
-          </a:blip>
+          <a:blip r:embed="rId1"/>
           <a:stretch>
             <a:fillRect/>
           </a:stretch>
@@ -3227,13 +3149,7 @@
           <p:nvPr/>
         </p:nvPicPr>
         <p:blipFill>
-          <a:blip r:embed="rId3">
-            <a:extLst>
-              <a:ext uri="{96DAC541-7B7A-43D3-8B79-37D633B846F1}">
-                <asvg:svgBlip xmlns:asvg="http://schemas.microsoft.com/office/drawing/2016/SVG/main" r:embed="rId4"/>
-              </a:ext>
-            </a:extLst>
-          </a:blip>
+          <a:blip r:embed="rId2"/>
           <a:stretch>
             <a:fillRect/>
           </a:stretch>

--- a/samples/pptcreater-overview-report.pptx
+++ b/samples/pptcreater-overview-report.pptx
@@ -9,10 +9,33 @@
     <p:sldId id="257" r:id="rId3"/>
     <p:sldId id="258" r:id="rId4"/>
     <p:sldId id="259" r:id="rId5"/>
+    <p:sldId id="260" r:id="rId6"/>
+    <p:sldId id="261" r:id="rId7"/>
+    <p:sldId id="262" r:id="rId8"/>
+    <p:sldId id="263" r:id="rId9"/>
+    <p:sldId id="264" r:id="rId10"/>
+    <p:sldId id="265" r:id="rId11"/>
+    <p:sldId id="266" r:id="rId12"/>
+    <p:sldId id="267" r:id="rId13"/>
+    <p:sldId id="268" r:id="rId14"/>
+    <p:sldId id="269" r:id="rId15"/>
+    <p:sldId id="270" r:id="rId16"/>
+    <p:sldId id="271" r:id="rId17"/>
+    <p:sldId id="272" r:id="rId18"/>
+    <p:sldId id="273" r:id="rId19"/>
+    <p:sldId id="274" r:id="rId20"/>
+    <p:sldId id="275" r:id="rId21"/>
+    <p:sldId id="276" r:id="rId22"/>
+    <p:sldId id="277" r:id="rId23"/>
+    <p:sldId id="278" r:id="rId24"/>
+    <p:sldId id="279" r:id="rId25"/>
+    <p:sldId id="280" r:id="rId26"/>
+    <p:sldId id="281" r:id="rId27"/>
+    <p:sldId id="282" r:id="rId28"/>
+    <p:sldId id="283" r:id="rId29"/>
+    <p:sldId id="284" r:id="rId30"/>
+    <p:sldId id="285" r:id="rId31"/>
   </p:sldIdLst>
-  <p:notesMasterIdLst>
-    <p:notesMasterId r:id="rId6"/>
-  </p:notesMasterIdLst>
   <p:sldSz cx="12192000" cy="6858000"/>
   <p:notesSz cx="6858000" cy="12192000"/>
   <p:defaultTextStyle>
@@ -110,355 +133,6 @@
 </p:presentation>
 </file>
 
-<file path=ppt/notesMasters/notesMaster1.xml><?xml version="1.0" encoding="utf-8"?>
-<p:notesMaster xmlns:a="http://schemas.openxmlformats.org/drawingml/2006/main" xmlns:r="http://schemas.openxmlformats.org/officeDocument/2006/relationships" xmlns:p="http://schemas.openxmlformats.org/presentationml/2006/main">
-  <p:cSld>
-    <p:bg>
-      <p:bgRef idx="1001">
-        <a:schemeClr val="bg1"/>
-      </p:bgRef>
-    </p:bg>
-    <p:spTree>
-      <p:nvGrpSpPr>
-        <p:cNvPr id="1" name=""/>
-        <p:cNvGrpSpPr/>
-        <p:nvPr/>
-      </p:nvGrpSpPr>
-      <p:grpSpPr>
-        <a:xfrm>
-          <a:off x="0" y="0"/>
-          <a:ext cx="0" cy="0"/>
-          <a:chOff x="0" y="0"/>
-          <a:chExt cx="0" cy="0"/>
-        </a:xfrm>
-      </p:grpSpPr>
-      <p:sp>
-        <p:nvSpPr>
-          <p:cNvPr id="2" name="Header Placeholder 1"/>
-          <p:cNvSpPr>
-            <a:spLocks noGrp="1"/>
-          </p:cNvSpPr>
-          <p:nvPr>
-            <p:ph type="hdr" sz="quarter"/>
-          </p:nvPr>
-        </p:nvSpPr>
-        <p:spPr>
-          <a:xfrm>
-            <a:off x="0" y="0"/>
-            <a:ext cx="2971800" cy="458788"/>
-          </a:xfrm>
-          <a:prstGeom prst="rect">
-            <a:avLst/>
-          </a:prstGeom>
-        </p:spPr>
-        <p:txBody>
-          <a:bodyPr vert="horz" lIns="91440" tIns="45720" rIns="91440" bIns="45720" rtlCol="0"/>
-          <a:lstStyle>
-            <a:lvl1pPr algn="l">
-              <a:defRPr sz="1200"/>
-            </a:lvl1pPr>
-          </a:lstStyle>
-          <a:p>
-            <a:endParaRPr lang="en-US"/>
-          </a:p>
-        </p:txBody>
-      </p:sp>
-      <p:sp>
-        <p:nvSpPr>
-          <p:cNvPr id="3" name="Date Placeholder 2"/>
-          <p:cNvSpPr>
-            <a:spLocks noGrp="1"/>
-          </p:cNvSpPr>
-          <p:nvPr>
-            <p:ph type="dt" idx="1"/>
-          </p:nvPr>
-        </p:nvSpPr>
-        <p:spPr>
-          <a:xfrm>
-            <a:off x="3884613" y="0"/>
-            <a:ext cx="2971800" cy="458788"/>
-          </a:xfrm>
-          <a:prstGeom prst="rect">
-            <a:avLst/>
-          </a:prstGeom>
-        </p:spPr>
-        <p:txBody>
-          <a:bodyPr vert="horz" lIns="91440" tIns="45720" rIns="91440" bIns="45720" rtlCol="0"/>
-          <a:lstStyle>
-            <a:lvl1pPr algn="r">
-              <a:defRPr sz="1200"/>
-            </a:lvl1pPr>
-          </a:lstStyle>
-          <a:p>
-            <a:fld id="{5282F153-3F37-0F45-9E97-73ACFA13230C}" type="datetimeFigureOut">
-              <a:rPr lang="en-US"/>
-              <a:t>7/23/19</a:t>
-            </a:fld>
-            <a:endParaRPr lang="en-US"/>
-          </a:p>
-        </p:txBody>
-      </p:sp>
-      <p:sp>
-        <p:nvSpPr>
-          <p:cNvPr id="4" name="Slide Image Placeholder 3"/>
-          <p:cNvSpPr>
-            <a:spLocks noGrp="1" noRot="1" noChangeAspect="1"/>
-          </p:cNvSpPr>
-          <p:nvPr>
-            <p:ph type="sldImg" idx="2"/>
-          </p:nvPr>
-        </p:nvSpPr>
-        <p:spPr>
-          <a:xfrm>
-            <a:off x="685800" y="1143000"/>
-            <a:ext cx="5486400" cy="3086100"/>
-          </a:xfrm>
-          <a:prstGeom prst="rect">
-            <a:avLst/>
-          </a:prstGeom>
-          <a:noFill/>
-          <a:ln w="12700">
-            <a:solidFill>
-              <a:prstClr val="black"/>
-            </a:solidFill>
-          </a:ln>
-        </p:spPr>
-        <p:txBody>
-          <a:bodyPr vert="horz" lIns="91440" tIns="45720" rIns="91440" bIns="45720" rtlCol="0" anchor="ctr"/>
-          <a:lstStyle/>
-          <a:p>
-            <a:endParaRPr lang="en-US"/>
-          </a:p>
-        </p:txBody>
-      </p:sp>
-      <p:sp>
-        <p:nvSpPr>
-          <p:cNvPr id="5" name="Notes Placeholder 4"/>
-          <p:cNvSpPr>
-            <a:spLocks noGrp="1"/>
-          </p:cNvSpPr>
-          <p:nvPr>
-            <p:ph type="body" sz="quarter" idx="3"/>
-          </p:nvPr>
-        </p:nvSpPr>
-        <p:spPr>
-          <a:xfrm>
-            <a:off x="685800" y="4400550"/>
-            <a:ext cx="5486400" cy="3600450"/>
-          </a:xfrm>
-          <a:prstGeom prst="rect">
-            <a:avLst/>
-          </a:prstGeom>
-        </p:spPr>
-        <p:txBody>
-          <a:bodyPr vert="horz" lIns="91440" tIns="45720" rIns="91440" bIns="45720" rtlCol="0"/>
-          <a:lstStyle/>
-          <a:p>
-            <a:pPr lvl="0"/>
-            <a:r>
-              <a:rPr lang="en-US"/>
-              <a:t>Click to edit Master text styles</a:t>
-            </a:r>
-          </a:p>
-          <a:p>
-            <a:pPr lvl="1"/>
-            <a:r>
-              <a:rPr lang="en-US"/>
-              <a:t>Second level</a:t>
-            </a:r>
-          </a:p>
-          <a:p>
-            <a:pPr lvl="2"/>
-            <a:r>
-              <a:rPr lang="en-US"/>
-              <a:t>Third level</a:t>
-            </a:r>
-          </a:p>
-          <a:p>
-            <a:pPr lvl="3"/>
-            <a:r>
-              <a:rPr lang="en-US"/>
-              <a:t>Fourth level</a:t>
-            </a:r>
-          </a:p>
-          <a:p>
-            <a:pPr lvl="4"/>
-            <a:r>
-              <a:rPr lang="en-US"/>
-              <a:t>Fifth level</a:t>
-            </a:r>
-          </a:p>
-        </p:txBody>
-      </p:sp>
-      <p:sp>
-        <p:nvSpPr>
-          <p:cNvPr id="6" name="Footer Placeholder 5"/>
-          <p:cNvSpPr>
-            <a:spLocks noGrp="1"/>
-          </p:cNvSpPr>
-          <p:nvPr>
-            <p:ph type="ftr" sz="quarter" idx="4"/>
-          </p:nvPr>
-        </p:nvSpPr>
-        <p:spPr>
-          <a:xfrm>
-            <a:off x="0" y="8685213"/>
-            <a:ext cx="2971800" cy="458787"/>
-          </a:xfrm>
-          <a:prstGeom prst="rect">
-            <a:avLst/>
-          </a:prstGeom>
-        </p:spPr>
-        <p:txBody>
-          <a:bodyPr vert="horz" lIns="91440" tIns="45720" rIns="91440" bIns="45720" rtlCol="0" anchor="b"/>
-          <a:lstStyle>
-            <a:lvl1pPr algn="l">
-              <a:defRPr sz="1200"/>
-            </a:lvl1pPr>
-          </a:lstStyle>
-          <a:p>
-            <a:endParaRPr lang="en-US"/>
-          </a:p>
-        </p:txBody>
-      </p:sp>
-      <p:sp>
-        <p:nvSpPr>
-          <p:cNvPr id="7" name="Slide Number Placeholder 6"/>
-          <p:cNvSpPr>
-            <a:spLocks noGrp="1"/>
-          </p:cNvSpPr>
-          <p:nvPr>
-            <p:ph type="sldNum" sz="quarter" idx="5"/>
-          </p:nvPr>
-        </p:nvSpPr>
-        <p:spPr>
-          <a:xfrm>
-            <a:off x="3884613" y="8685213"/>
-            <a:ext cx="2971800" cy="458787"/>
-          </a:xfrm>
-          <a:prstGeom prst="rect">
-            <a:avLst/>
-          </a:prstGeom>
-        </p:spPr>
-        <p:txBody>
-          <a:bodyPr vert="horz" lIns="91440" tIns="45720" rIns="91440" bIns="45720" rtlCol="0" anchor="b"/>
-          <a:lstStyle>
-            <a:lvl1pPr algn="r">
-              <a:defRPr sz="1200"/>
-            </a:lvl1pPr>
-          </a:lstStyle>
-          <a:p>
-            <a:fld id="{CE5E9CC1-C706-0F49-92D6-E571CC5EEA8F}" type="slidenum">
-              <a:rPr lang="en-US"/>
-              <a:t>‹#›</a:t>
-            </a:fld>
-            <a:endParaRPr lang="en-US"/>
-          </a:p>
-        </p:txBody>
-      </p:sp>
-    </p:spTree>
-    <p:extLst>
-      <p:ext uri="{BB962C8B-B14F-4D97-AF65-F5344CB8AC3E}">
-        <p14:creationId xmlns:p14="http://schemas.microsoft.com/office/powerpoint/2010/main" val="1024086991"/>
-      </p:ext>
-    </p:extLst>
-  </p:cSld>
-  <p:clrMap bg1="lt1" tx1="dk1" bg2="lt2" tx2="dk2" accent1="accent1" accent2="accent2" accent3="accent3" accent4="accent4" accent5="accent5" accent6="accent6" hlink="hlink" folHlink="folHlink"/>
-  <p:notesStyle>
-    <a:lvl1pPr marL="0" algn="l" defTabSz="914400" rtl="0" eaLnBrk="1" latinLnBrk="0" hangingPunct="1">
-      <a:defRPr sz="1200" kern="1200">
-        <a:solidFill>
-          <a:schemeClr val="tx1"/>
-        </a:solidFill>
-        <a:latin typeface="+mn-lt"/>
-        <a:ea typeface="+mn-ea"/>
-        <a:cs typeface="+mn-cs"/>
-      </a:defRPr>
-    </a:lvl1pPr>
-    <a:lvl2pPr marL="457200" algn="l" defTabSz="914400" rtl="0" eaLnBrk="1" latinLnBrk="0" hangingPunct="1">
-      <a:defRPr sz="1200" kern="1200">
-        <a:solidFill>
-          <a:schemeClr val="tx1"/>
-        </a:solidFill>
-        <a:latin typeface="+mn-lt"/>
-        <a:ea typeface="+mn-ea"/>
-        <a:cs typeface="+mn-cs"/>
-      </a:defRPr>
-    </a:lvl2pPr>
-    <a:lvl3pPr marL="914400" algn="l" defTabSz="914400" rtl="0" eaLnBrk="1" latinLnBrk="0" hangingPunct="1">
-      <a:defRPr sz="1200" kern="1200">
-        <a:solidFill>
-          <a:schemeClr val="tx1"/>
-        </a:solidFill>
-        <a:latin typeface="+mn-lt"/>
-        <a:ea typeface="+mn-ea"/>
-        <a:cs typeface="+mn-cs"/>
-      </a:defRPr>
-    </a:lvl3pPr>
-    <a:lvl4pPr marL="1371600" algn="l" defTabSz="914400" rtl="0" eaLnBrk="1" latinLnBrk="0" hangingPunct="1">
-      <a:defRPr sz="1200" kern="1200">
-        <a:solidFill>
-          <a:schemeClr val="tx1"/>
-        </a:solidFill>
-        <a:latin typeface="+mn-lt"/>
-        <a:ea typeface="+mn-ea"/>
-        <a:cs typeface="+mn-cs"/>
-      </a:defRPr>
-    </a:lvl4pPr>
-    <a:lvl5pPr marL="1828800" algn="l" defTabSz="914400" rtl="0" eaLnBrk="1" latinLnBrk="0" hangingPunct="1">
-      <a:defRPr sz="1200" kern="1200">
-        <a:solidFill>
-          <a:schemeClr val="tx1"/>
-        </a:solidFill>
-        <a:latin typeface="+mn-lt"/>
-        <a:ea typeface="+mn-ea"/>
-        <a:cs typeface="+mn-cs"/>
-      </a:defRPr>
-    </a:lvl5pPr>
-    <a:lvl6pPr marL="2286000" algn="l" defTabSz="914400" rtl="0" eaLnBrk="1" latinLnBrk="0" hangingPunct="1">
-      <a:defRPr sz="1200" kern="1200">
-        <a:solidFill>
-          <a:schemeClr val="tx1"/>
-        </a:solidFill>
-        <a:latin typeface="+mn-lt"/>
-        <a:ea typeface="+mn-ea"/>
-        <a:cs typeface="+mn-cs"/>
-      </a:defRPr>
-    </a:lvl6pPr>
-    <a:lvl7pPr marL="2743200" algn="l" defTabSz="914400" rtl="0" eaLnBrk="1" latinLnBrk="0" hangingPunct="1">
-      <a:defRPr sz="1200" kern="1200">
-        <a:solidFill>
-          <a:schemeClr val="tx1"/>
-        </a:solidFill>
-        <a:latin typeface="+mn-lt"/>
-        <a:ea typeface="+mn-ea"/>
-        <a:cs typeface="+mn-cs"/>
-      </a:defRPr>
-    </a:lvl7pPr>
-    <a:lvl8pPr marL="3200400" algn="l" defTabSz="914400" rtl="0" eaLnBrk="1" latinLnBrk="0" hangingPunct="1">
-      <a:defRPr sz="1200" kern="1200">
-        <a:solidFill>
-          <a:schemeClr val="tx1"/>
-        </a:solidFill>
-        <a:latin typeface="+mn-lt"/>
-        <a:ea typeface="+mn-ea"/>
-        <a:cs typeface="+mn-cs"/>
-      </a:defRPr>
-    </a:lvl8pPr>
-    <a:lvl9pPr marL="3657600" algn="l" defTabSz="914400" rtl="0" eaLnBrk="1" latinLnBrk="0" hangingPunct="1">
-      <a:defRPr sz="1200" kern="1200">
-        <a:solidFill>
-          <a:schemeClr val="tx1"/>
-        </a:solidFill>
-        <a:latin typeface="+mn-lt"/>
-        <a:ea typeface="+mn-ea"/>
-        <a:cs typeface="+mn-cs"/>
-      </a:defRPr>
-    </a:lvl9pPr>
-  </p:notesStyle>
-</p:notesMaster>
-</file>
-
 <file path=ppt/notesSlides/notesSlide1.xml><?xml version="1.0" encoding="utf-8"?>
 <p:notes xmlns:a="http://schemas.openxmlformats.org/drawingml/2006/main" xmlns:r="http://schemas.openxmlformats.org/officeDocument/2006/relationships" xmlns:p="http://schemas.openxmlformats.org/presentationml/2006/main">
   <p:cSld>
@@ -530,6 +204,916 @@
             <a:fld id="{F7021451-1387-4CA6-816F-3879F97B5CBC}" type="slidenum">
               <a:rPr lang="en-US"/>
               <a:t>1</a:t>
+            </a:fld>
+            <a:endParaRPr lang="en-US"/>
+          </a:p>
+        </p:txBody>
+      </p:sp>
+    </p:spTree>
+    <p:extLst>
+      <p:ext uri="{BB962C8B-B14F-4D97-AF65-F5344CB8AC3E}">
+        <p14:creationId xmlns:p14="http://schemas.microsoft.com/office/powerpoint/2010/main" val="1024086991"/>
+      </p:ext>
+    </p:extLst>
+  </p:cSld>
+  <p:clrMapOvr>
+    <a:masterClrMapping/>
+  </p:clrMapOvr>
+</p:notes>
+</file>
+
+<file path=ppt/notesSlides/notesSlide10.xml><?xml version="1.0" encoding="utf-8"?>
+<p:notes xmlns:a="http://schemas.openxmlformats.org/drawingml/2006/main" xmlns:r="http://schemas.openxmlformats.org/officeDocument/2006/relationships" xmlns:p="http://schemas.openxmlformats.org/presentationml/2006/main">
+  <p:cSld>
+    <p:spTree>
+      <p:nvGrpSpPr>
+        <p:cNvPr id="1" name=""/>
+        <p:cNvGrpSpPr/>
+        <p:nvPr/>
+      </p:nvGrpSpPr>
+      <p:grpSpPr>
+        <a:xfrm>
+          <a:off x="0" y="0"/>
+          <a:ext cx="0" cy="0"/>
+          <a:chOff x="0" y="0"/>
+          <a:chExt cx="0" cy="0"/>
+        </a:xfrm>
+      </p:grpSpPr>
+      <p:sp>
+        <p:nvSpPr>
+          <p:cNvPr id="2" name="Slide Image Placeholder 1"/>
+          <p:cNvSpPr>
+            <a:spLocks noGrp="1" noRot="1" noChangeAspect="1"/>
+          </p:cNvSpPr>
+          <p:nvPr>
+            <p:ph type="sldImg"/>
+          </p:nvPr>
+        </p:nvSpPr>
+        <p:spPr/>
+      </p:sp>
+      <p:sp>
+        <p:nvSpPr>
+          <p:cNvPr id="3" name="Notes Placeholder 2"/>
+          <p:cNvSpPr>
+            <a:spLocks noGrp="1"/>
+          </p:cNvSpPr>
+          <p:nvPr>
+            <p:ph type="body" idx="1"/>
+          </p:nvPr>
+        </p:nvSpPr>
+        <p:spPr/>
+        <p:txBody>
+          <a:bodyPr/>
+          <a:lstStyle/>
+          <a:p>
+            <a:r>
+              <a:rPr lang="en-US" dirty="0"/>
+              <a:t>Pattern 6: before-after. 説明責任、比較、証跡、表形式の読みやすさを優先するモード向けテンプレート。
+Slide 10: 前後比較テンプレート
+report-before-after-visual: 前後比較 (before-after) report schematic template
+report-before-after-visual long description: 現在の課題と改善後の状態を左右に置き、中央の遷移で変化の意味を説明する図解です。 説明責任、比較、証跡、表形式の読みやすさを優先するモード向けテンプレート。</a:t>
+            </a:r>
+            <a:endParaRPr lang="en-US" dirty="0"/>
+          </a:p>
+        </p:txBody>
+      </p:sp>
+      <p:sp>
+        <p:nvSpPr>
+          <p:cNvPr id="4" name="Slide Number Placeholder 3"/>
+          <p:cNvSpPr>
+            <a:spLocks noGrp="1"/>
+          </p:cNvSpPr>
+          <p:nvPr>
+            <p:ph type="sldNum" sz="quarter" idx="10"/>
+          </p:nvPr>
+        </p:nvSpPr>
+        <p:spPr/>
+        <p:txBody>
+          <a:bodyPr/>
+          <a:lstStyle/>
+          <a:p>
+            <a:fld id="{F7021451-1387-4CA6-816F-3879F97B5CBC}" type="slidenum">
+              <a:rPr lang="en-US"/>
+              <a:t>10</a:t>
+            </a:fld>
+            <a:endParaRPr lang="en-US"/>
+          </a:p>
+        </p:txBody>
+      </p:sp>
+    </p:spTree>
+    <p:extLst>
+      <p:ext uri="{BB962C8B-B14F-4D97-AF65-F5344CB8AC3E}">
+        <p14:creationId xmlns:p14="http://schemas.microsoft.com/office/powerpoint/2010/main" val="1024086991"/>
+      </p:ext>
+    </p:extLst>
+  </p:cSld>
+  <p:clrMapOvr>
+    <a:masterClrMapping/>
+  </p:clrMapOvr>
+</p:notes>
+</file>
+
+<file path=ppt/notesSlides/notesSlide11.xml><?xml version="1.0" encoding="utf-8"?>
+<p:notes xmlns:a="http://schemas.openxmlformats.org/drawingml/2006/main" xmlns:r="http://schemas.openxmlformats.org/officeDocument/2006/relationships" xmlns:p="http://schemas.openxmlformats.org/presentationml/2006/main">
+  <p:cSld>
+    <p:spTree>
+      <p:nvGrpSpPr>
+        <p:cNvPr id="1" name=""/>
+        <p:cNvGrpSpPr/>
+        <p:nvPr/>
+      </p:nvGrpSpPr>
+      <p:grpSpPr>
+        <a:xfrm>
+          <a:off x="0" y="0"/>
+          <a:ext cx="0" cy="0"/>
+          <a:chOff x="0" y="0"/>
+          <a:chExt cx="0" cy="0"/>
+        </a:xfrm>
+      </p:grpSpPr>
+      <p:sp>
+        <p:nvSpPr>
+          <p:cNvPr id="2" name="Slide Image Placeholder 1"/>
+          <p:cNvSpPr>
+            <a:spLocks noGrp="1" noRot="1" noChangeAspect="1"/>
+          </p:cNvSpPr>
+          <p:nvPr>
+            <p:ph type="sldImg"/>
+          </p:nvPr>
+        </p:nvSpPr>
+        <p:spPr/>
+      </p:sp>
+      <p:sp>
+        <p:nvSpPr>
+          <p:cNvPr id="3" name="Notes Placeholder 2"/>
+          <p:cNvSpPr>
+            <a:spLocks noGrp="1"/>
+          </p:cNvSpPr>
+          <p:nvPr>
+            <p:ph type="body" idx="1"/>
+          </p:nvPr>
+        </p:nvSpPr>
+        <p:spPr/>
+        <p:txBody>
+          <a:bodyPr/>
+          <a:lstStyle/>
+          <a:p>
+            <a:r>
+              <a:rPr lang="en-US" dirty="0"/>
+              <a:t>Pattern 7: map. 説明責任、比較、証跡、表形式の読みやすさを優先するモード向けテンプレート。
+Slide 11: マップテンプレート
+report-map-visual: マップ (map) report schematic template
+report-map-visual long description: 複数の重要地点を空間的に配置し、どこを確認・制御するかを直感的に把握するための図解です。 説明責任、比較、証跡、表形式の読みやすさを優先するモード向けテンプレート。</a:t>
+            </a:r>
+            <a:endParaRPr lang="en-US" dirty="0"/>
+          </a:p>
+        </p:txBody>
+      </p:sp>
+      <p:sp>
+        <p:nvSpPr>
+          <p:cNvPr id="4" name="Slide Number Placeholder 3"/>
+          <p:cNvSpPr>
+            <a:spLocks noGrp="1"/>
+          </p:cNvSpPr>
+          <p:nvPr>
+            <p:ph type="sldNum" sz="quarter" idx="10"/>
+          </p:nvPr>
+        </p:nvSpPr>
+        <p:spPr/>
+        <p:txBody>
+          <a:bodyPr/>
+          <a:lstStyle/>
+          <a:p>
+            <a:fld id="{F7021451-1387-4CA6-816F-3879F97B5CBC}" type="slidenum">
+              <a:rPr lang="en-US"/>
+              <a:t>11</a:t>
+            </a:fld>
+            <a:endParaRPr lang="en-US"/>
+          </a:p>
+        </p:txBody>
+      </p:sp>
+    </p:spTree>
+    <p:extLst>
+      <p:ext uri="{BB962C8B-B14F-4D97-AF65-F5344CB8AC3E}">
+        <p14:creationId xmlns:p14="http://schemas.microsoft.com/office/powerpoint/2010/main" val="1024086991"/>
+      </p:ext>
+    </p:extLst>
+  </p:cSld>
+  <p:clrMapOvr>
+    <a:masterClrMapping/>
+  </p:clrMapOvr>
+</p:notes>
+</file>
+
+<file path=ppt/notesSlides/notesSlide12.xml><?xml version="1.0" encoding="utf-8"?>
+<p:notes xmlns:a="http://schemas.openxmlformats.org/drawingml/2006/main" xmlns:r="http://schemas.openxmlformats.org/officeDocument/2006/relationships" xmlns:p="http://schemas.openxmlformats.org/presentationml/2006/main">
+  <p:cSld>
+    <p:spTree>
+      <p:nvGrpSpPr>
+        <p:cNvPr id="1" name=""/>
+        <p:cNvGrpSpPr/>
+        <p:nvPr/>
+      </p:nvGrpSpPr>
+      <p:grpSpPr>
+        <a:xfrm>
+          <a:off x="0" y="0"/>
+          <a:ext cx="0" cy="0"/>
+          <a:chOff x="0" y="0"/>
+          <a:chExt cx="0" cy="0"/>
+        </a:xfrm>
+      </p:grpSpPr>
+      <p:sp>
+        <p:nvSpPr>
+          <p:cNvPr id="2" name="Slide Image Placeholder 1"/>
+          <p:cNvSpPr>
+            <a:spLocks noGrp="1" noRot="1" noChangeAspect="1"/>
+          </p:cNvSpPr>
+          <p:nvPr>
+            <p:ph type="sldImg"/>
+          </p:nvPr>
+        </p:nvSpPr>
+        <p:spPr/>
+      </p:sp>
+      <p:sp>
+        <p:nvSpPr>
+          <p:cNvPr id="3" name="Notes Placeholder 2"/>
+          <p:cNvSpPr>
+            <a:spLocks noGrp="1"/>
+          </p:cNvSpPr>
+          <p:nvPr>
+            <p:ph type="body" idx="1"/>
+          </p:nvPr>
+        </p:nvSpPr>
+        <p:spPr/>
+        <p:txBody>
+          <a:bodyPr/>
+          <a:lstStyle/>
+          <a:p>
+            <a:r>
+              <a:rPr lang="en-US" dirty="0"/>
+              <a:t>Pattern 8: puzzle. 説明責任、比較、証跡、表形式の読みやすさを優先するモード向けテンプレート。
+Slide 12: パズル/ハニカムテンプレート
+report-puzzle-visual: パズル/ハニカム (puzzle) report schematic template
+report-puzzle-visual long description: 複数の機能や観点が連動して一つの価値を作ることを、ハニカム状のまとまりで示す図解です。 説明責任、比較、証跡、表形式の読みやすさを優先するモード向けテンプレート。</a:t>
+            </a:r>
+            <a:endParaRPr lang="en-US" dirty="0"/>
+          </a:p>
+        </p:txBody>
+      </p:sp>
+      <p:sp>
+        <p:nvSpPr>
+          <p:cNvPr id="4" name="Slide Number Placeholder 3"/>
+          <p:cNvSpPr>
+            <a:spLocks noGrp="1"/>
+          </p:cNvSpPr>
+          <p:nvPr>
+            <p:ph type="sldNum" sz="quarter" idx="10"/>
+          </p:nvPr>
+        </p:nvSpPr>
+        <p:spPr/>
+        <p:txBody>
+          <a:bodyPr/>
+          <a:lstStyle/>
+          <a:p>
+            <a:fld id="{F7021451-1387-4CA6-816F-3879F97B5CBC}" type="slidenum">
+              <a:rPr lang="en-US"/>
+              <a:t>12</a:t>
+            </a:fld>
+            <a:endParaRPr lang="en-US"/>
+          </a:p>
+        </p:txBody>
+      </p:sp>
+    </p:spTree>
+    <p:extLst>
+      <p:ext uri="{BB962C8B-B14F-4D97-AF65-F5344CB8AC3E}">
+        <p14:creationId xmlns:p14="http://schemas.microsoft.com/office/powerpoint/2010/main" val="1024086991"/>
+      </p:ext>
+    </p:extLst>
+  </p:cSld>
+  <p:clrMapOvr>
+    <a:masterClrMapping/>
+  </p:clrMapOvr>
+</p:notes>
+</file>
+
+<file path=ppt/notesSlides/notesSlide13.xml><?xml version="1.0" encoding="utf-8"?>
+<p:notes xmlns:a="http://schemas.openxmlformats.org/drawingml/2006/main" xmlns:r="http://schemas.openxmlformats.org/officeDocument/2006/relationships" xmlns:p="http://schemas.openxmlformats.org/presentationml/2006/main">
+  <p:cSld>
+    <p:spTree>
+      <p:nvGrpSpPr>
+        <p:cNvPr id="1" name=""/>
+        <p:cNvGrpSpPr/>
+        <p:nvPr/>
+      </p:nvGrpSpPr>
+      <p:grpSpPr>
+        <a:xfrm>
+          <a:off x="0" y="0"/>
+          <a:ext cx="0" cy="0"/>
+          <a:chOff x="0" y="0"/>
+          <a:chExt cx="0" cy="0"/>
+        </a:xfrm>
+      </p:grpSpPr>
+      <p:sp>
+        <p:nvSpPr>
+          <p:cNvPr id="2" name="Slide Image Placeholder 1"/>
+          <p:cNvSpPr>
+            <a:spLocks noGrp="1" noRot="1" noChangeAspect="1"/>
+          </p:cNvSpPr>
+          <p:nvPr>
+            <p:ph type="sldImg"/>
+          </p:nvPr>
+        </p:nvSpPr>
+        <p:spPr/>
+      </p:sp>
+      <p:sp>
+        <p:nvSpPr>
+          <p:cNvPr id="3" name="Notes Placeholder 2"/>
+          <p:cNvSpPr>
+            <a:spLocks noGrp="1"/>
+          </p:cNvSpPr>
+          <p:nvPr>
+            <p:ph type="body" idx="1"/>
+          </p:nvPr>
+        </p:nvSpPr>
+        <p:spPr/>
+        <p:txBody>
+          <a:bodyPr/>
+          <a:lstStyle/>
+          <a:p>
+            <a:r>
+              <a:rPr lang="en-US" dirty="0"/>
+              <a:t>Pattern 9: correlation. 説明責任、比較、証跡、表形式の読みやすさを優先するモード向けテンプレート。
+Slide 13: 相関図/概念図テンプレート
+report-correlation-visual: 相関図/概念図 (correlation) report schematic template
+report-correlation-visual long description: 中心となる概念と周辺要素の関係を放射状に整理し、全体像と関連性を一度に説明する図解です。 説明責任、比較、証跡、表形式の読みやすさを優先するモード向けテンプレート。</a:t>
+            </a:r>
+            <a:endParaRPr lang="en-US" dirty="0"/>
+          </a:p>
+        </p:txBody>
+      </p:sp>
+      <p:sp>
+        <p:nvSpPr>
+          <p:cNvPr id="4" name="Slide Number Placeholder 3"/>
+          <p:cNvSpPr>
+            <a:spLocks noGrp="1"/>
+          </p:cNvSpPr>
+          <p:nvPr>
+            <p:ph type="sldNum" sz="quarter" idx="10"/>
+          </p:nvPr>
+        </p:nvSpPr>
+        <p:spPr/>
+        <p:txBody>
+          <a:bodyPr/>
+          <a:lstStyle/>
+          <a:p>
+            <a:fld id="{F7021451-1387-4CA6-816F-3879F97B5CBC}" type="slidenum">
+              <a:rPr lang="en-US"/>
+              <a:t>13</a:t>
+            </a:fld>
+            <a:endParaRPr lang="en-US"/>
+          </a:p>
+        </p:txBody>
+      </p:sp>
+    </p:spTree>
+    <p:extLst>
+      <p:ext uri="{BB962C8B-B14F-4D97-AF65-F5344CB8AC3E}">
+        <p14:creationId xmlns:p14="http://schemas.microsoft.com/office/powerpoint/2010/main" val="1024086991"/>
+      </p:ext>
+    </p:extLst>
+  </p:cSld>
+  <p:clrMapOvr>
+    <a:masterClrMapping/>
+  </p:clrMapOvr>
+</p:notes>
+</file>
+
+<file path=ppt/notesSlides/notesSlide14.xml><?xml version="1.0" encoding="utf-8"?>
+<p:notes xmlns:a="http://schemas.openxmlformats.org/drawingml/2006/main" xmlns:r="http://schemas.openxmlformats.org/officeDocument/2006/relationships" xmlns:p="http://schemas.openxmlformats.org/presentationml/2006/main">
+  <p:cSld>
+    <p:spTree>
+      <p:nvGrpSpPr>
+        <p:cNvPr id="1" name=""/>
+        <p:cNvGrpSpPr/>
+        <p:nvPr/>
+      </p:nvGrpSpPr>
+      <p:grpSpPr>
+        <a:xfrm>
+          <a:off x="0" y="0"/>
+          <a:ext cx="0" cy="0"/>
+          <a:chOff x="0" y="0"/>
+          <a:chExt cx="0" cy="0"/>
+        </a:xfrm>
+      </p:grpSpPr>
+      <p:sp>
+        <p:nvSpPr>
+          <p:cNvPr id="2" name="Slide Image Placeholder 1"/>
+          <p:cNvSpPr>
+            <a:spLocks noGrp="1" noRot="1" noChangeAspect="1"/>
+          </p:cNvSpPr>
+          <p:nvPr>
+            <p:ph type="sldImg"/>
+          </p:nvPr>
+        </p:nvSpPr>
+        <p:spPr/>
+      </p:sp>
+      <p:sp>
+        <p:nvSpPr>
+          <p:cNvPr id="3" name="Notes Placeholder 2"/>
+          <p:cNvSpPr>
+            <a:spLocks noGrp="1"/>
+          </p:cNvSpPr>
+          <p:nvPr>
+            <p:ph type="body" idx="1"/>
+          </p:nvPr>
+        </p:nvSpPr>
+        <p:spPr/>
+        <p:txBody>
+          <a:bodyPr/>
+          <a:lstStyle/>
+          <a:p>
+            <a:r>
+              <a:rPr lang="en-US" dirty="0"/>
+              <a:t>Pattern 10: matrix. 説明責任、比較、証跡、表形式の読みやすさを優先するモード向けテンプレート。
+Slide 14: マトリクステンプレート
+report-matrix-visual: マトリクス (matrix) report schematic template
+report-matrix-visual long description: 二つの評価軸で施策や論点を配置し、優先順位や位置づけを判断しやすくする図解です。 説明責任、比較、証跡、表形式の読みやすさを優先するモード向けテンプレート。</a:t>
+            </a:r>
+            <a:endParaRPr lang="en-US" dirty="0"/>
+          </a:p>
+        </p:txBody>
+      </p:sp>
+      <p:sp>
+        <p:nvSpPr>
+          <p:cNvPr id="4" name="Slide Number Placeholder 3"/>
+          <p:cNvSpPr>
+            <a:spLocks noGrp="1"/>
+          </p:cNvSpPr>
+          <p:nvPr>
+            <p:ph type="sldNum" sz="quarter" idx="10"/>
+          </p:nvPr>
+        </p:nvSpPr>
+        <p:spPr/>
+        <p:txBody>
+          <a:bodyPr/>
+          <a:lstStyle/>
+          <a:p>
+            <a:fld id="{F7021451-1387-4CA6-816F-3879F97B5CBC}" type="slidenum">
+              <a:rPr lang="en-US"/>
+              <a:t>14</a:t>
+            </a:fld>
+            <a:endParaRPr lang="en-US"/>
+          </a:p>
+        </p:txBody>
+      </p:sp>
+    </p:spTree>
+    <p:extLst>
+      <p:ext uri="{BB962C8B-B14F-4D97-AF65-F5344CB8AC3E}">
+        <p14:creationId xmlns:p14="http://schemas.microsoft.com/office/powerpoint/2010/main" val="1024086991"/>
+      </p:ext>
+    </p:extLst>
+  </p:cSld>
+  <p:clrMapOvr>
+    <a:masterClrMapping/>
+  </p:clrMapOvr>
+</p:notes>
+</file>
+
+<file path=ppt/notesSlides/notesSlide15.xml><?xml version="1.0" encoding="utf-8"?>
+<p:notes xmlns:a="http://schemas.openxmlformats.org/drawingml/2006/main" xmlns:r="http://schemas.openxmlformats.org/officeDocument/2006/relationships" xmlns:p="http://schemas.openxmlformats.org/presentationml/2006/main">
+  <p:cSld>
+    <p:spTree>
+      <p:nvGrpSpPr>
+        <p:cNvPr id="1" name=""/>
+        <p:cNvGrpSpPr/>
+        <p:nvPr/>
+      </p:nvGrpSpPr>
+      <p:grpSpPr>
+        <a:xfrm>
+          <a:off x="0" y="0"/>
+          <a:ext cx="0" cy="0"/>
+          <a:chOff x="0" y="0"/>
+          <a:chExt cx="0" cy="0"/>
+        </a:xfrm>
+      </p:grpSpPr>
+      <p:sp>
+        <p:nvSpPr>
+          <p:cNvPr id="2" name="Slide Image Placeholder 1"/>
+          <p:cNvSpPr>
+            <a:spLocks noGrp="1" noRot="1" noChangeAspect="1"/>
+          </p:cNvSpPr>
+          <p:nvPr>
+            <p:ph type="sldImg"/>
+          </p:nvPr>
+        </p:nvSpPr>
+        <p:spPr/>
+      </p:sp>
+      <p:sp>
+        <p:nvSpPr>
+          <p:cNvPr id="3" name="Notes Placeholder 2"/>
+          <p:cNvSpPr>
+            <a:spLocks noGrp="1"/>
+          </p:cNvSpPr>
+          <p:nvPr>
+            <p:ph type="body" idx="1"/>
+          </p:nvPr>
+        </p:nvSpPr>
+        <p:spPr/>
+        <p:txBody>
+          <a:bodyPr/>
+          <a:lstStyle/>
+          <a:p>
+            <a:r>
+              <a:rPr lang="en-US" dirty="0"/>
+              <a:t>Pattern 11: venn. 説明責任、比較、証跡、表形式の読みやすさを優先するモード向けテンプレート。
+Slide 15: ベン図テンプレート
+report-venn-visual: ベン図 (venn) report schematic template
+report-venn-visual long description: 二つまたは三つの領域の重なりを示し、共通価値や交差領域を説明する図解です。 説明責任、比較、証跡、表形式の読みやすさを優先するモード向けテンプレート。</a:t>
+            </a:r>
+            <a:endParaRPr lang="en-US" dirty="0"/>
+          </a:p>
+        </p:txBody>
+      </p:sp>
+      <p:sp>
+        <p:nvSpPr>
+          <p:cNvPr id="4" name="Slide Number Placeholder 3"/>
+          <p:cNvSpPr>
+            <a:spLocks noGrp="1"/>
+          </p:cNvSpPr>
+          <p:nvPr>
+            <p:ph type="sldNum" sz="quarter" idx="10"/>
+          </p:nvPr>
+        </p:nvSpPr>
+        <p:spPr/>
+        <p:txBody>
+          <a:bodyPr/>
+          <a:lstStyle/>
+          <a:p>
+            <a:fld id="{F7021451-1387-4CA6-816F-3879F97B5CBC}" type="slidenum">
+              <a:rPr lang="en-US"/>
+              <a:t>15</a:t>
+            </a:fld>
+            <a:endParaRPr lang="en-US"/>
+          </a:p>
+        </p:txBody>
+      </p:sp>
+    </p:spTree>
+    <p:extLst>
+      <p:ext uri="{BB962C8B-B14F-4D97-AF65-F5344CB8AC3E}">
+        <p14:creationId xmlns:p14="http://schemas.microsoft.com/office/powerpoint/2010/main" val="1024086991"/>
+      </p:ext>
+    </p:extLst>
+  </p:cSld>
+  <p:clrMapOvr>
+    <a:masterClrMapping/>
+  </p:clrMapOvr>
+</p:notes>
+</file>
+
+<file path=ppt/notesSlides/notesSlide16.xml><?xml version="1.0" encoding="utf-8"?>
+<p:notes xmlns:a="http://schemas.openxmlformats.org/drawingml/2006/main" xmlns:r="http://schemas.openxmlformats.org/officeDocument/2006/relationships" xmlns:p="http://schemas.openxmlformats.org/presentationml/2006/main">
+  <p:cSld>
+    <p:spTree>
+      <p:nvGrpSpPr>
+        <p:cNvPr id="1" name=""/>
+        <p:cNvGrpSpPr/>
+        <p:nvPr/>
+      </p:nvGrpSpPr>
+      <p:grpSpPr>
+        <a:xfrm>
+          <a:off x="0" y="0"/>
+          <a:ext cx="0" cy="0"/>
+          <a:chOff x="0" y="0"/>
+          <a:chExt cx="0" cy="0"/>
+        </a:xfrm>
+      </p:grpSpPr>
+      <p:sp>
+        <p:nvSpPr>
+          <p:cNvPr id="2" name="Slide Image Placeholder 1"/>
+          <p:cNvSpPr>
+            <a:spLocks noGrp="1" noRot="1" noChangeAspect="1"/>
+          </p:cNvSpPr>
+          <p:nvPr>
+            <p:ph type="sldImg"/>
+          </p:nvPr>
+        </p:nvSpPr>
+        <p:spPr/>
+      </p:sp>
+      <p:sp>
+        <p:nvSpPr>
+          <p:cNvPr id="3" name="Notes Placeholder 2"/>
+          <p:cNvSpPr>
+            <a:spLocks noGrp="1"/>
+          </p:cNvSpPr>
+          <p:nvPr>
+            <p:ph type="body" idx="1"/>
+          </p:nvPr>
+        </p:nvSpPr>
+        <p:spPr/>
+        <p:txBody>
+          <a:bodyPr/>
+          <a:lstStyle/>
+          <a:p>
+            <a:r>
+              <a:rPr lang="en-US" dirty="0"/>
+              <a:t>Pattern 12: cross. 説明責任、比較、証跡、表形式の読みやすさを優先するモード向けテンプレート。
+Slide 16: 数式テンプレート
+report-cross-visual: 数式 (cross) report schematic template
+report-cross-visual long description: 複数の入力や条件が組み合わさって成果へつながることを、数式のように簡潔に示す図解です。 説明責任、比較、証跡、表形式の読みやすさを優先するモード向けテンプレート。</a:t>
+            </a:r>
+            <a:endParaRPr lang="en-US" dirty="0"/>
+          </a:p>
+        </p:txBody>
+      </p:sp>
+      <p:sp>
+        <p:nvSpPr>
+          <p:cNvPr id="4" name="Slide Number Placeholder 3"/>
+          <p:cNvSpPr>
+            <a:spLocks noGrp="1"/>
+          </p:cNvSpPr>
+          <p:nvPr>
+            <p:ph type="sldNum" sz="quarter" idx="10"/>
+          </p:nvPr>
+        </p:nvSpPr>
+        <p:spPr/>
+        <p:txBody>
+          <a:bodyPr/>
+          <a:lstStyle/>
+          <a:p>
+            <a:fld id="{F7021451-1387-4CA6-816F-3879F97B5CBC}" type="slidenum">
+              <a:rPr lang="en-US"/>
+              <a:t>16</a:t>
+            </a:fld>
+            <a:endParaRPr lang="en-US"/>
+          </a:p>
+        </p:txBody>
+      </p:sp>
+    </p:spTree>
+    <p:extLst>
+      <p:ext uri="{BB962C8B-B14F-4D97-AF65-F5344CB8AC3E}">
+        <p14:creationId xmlns:p14="http://schemas.microsoft.com/office/powerpoint/2010/main" val="1024086991"/>
+      </p:ext>
+    </p:extLst>
+  </p:cSld>
+  <p:clrMapOvr>
+    <a:masterClrMapping/>
+  </p:clrMapOvr>
+</p:notes>
+</file>
+
+<file path=ppt/notesSlides/notesSlide17.xml><?xml version="1.0" encoding="utf-8"?>
+<p:notes xmlns:a="http://schemas.openxmlformats.org/drawingml/2006/main" xmlns:r="http://schemas.openxmlformats.org/officeDocument/2006/relationships" xmlns:p="http://schemas.openxmlformats.org/presentationml/2006/main">
+  <p:cSld>
+    <p:spTree>
+      <p:nvGrpSpPr>
+        <p:cNvPr id="1" name=""/>
+        <p:cNvGrpSpPr/>
+        <p:nvPr/>
+      </p:nvGrpSpPr>
+      <p:grpSpPr>
+        <a:xfrm>
+          <a:off x="0" y="0"/>
+          <a:ext cx="0" cy="0"/>
+          <a:chOff x="0" y="0"/>
+          <a:chExt cx="0" cy="0"/>
+        </a:xfrm>
+      </p:grpSpPr>
+      <p:sp>
+        <p:nvSpPr>
+          <p:cNvPr id="2" name="Slide Image Placeholder 1"/>
+          <p:cNvSpPr>
+            <a:spLocks noGrp="1" noRot="1" noChangeAspect="1"/>
+          </p:cNvSpPr>
+          <p:nvPr>
+            <p:ph type="sldImg"/>
+          </p:nvPr>
+        </p:nvSpPr>
+        <p:spPr/>
+      </p:sp>
+      <p:sp>
+        <p:nvSpPr>
+          <p:cNvPr id="3" name="Notes Placeholder 2"/>
+          <p:cNvSpPr>
+            <a:spLocks noGrp="1"/>
+          </p:cNvSpPr>
+          <p:nvPr>
+            <p:ph type="body" idx="1"/>
+          </p:nvPr>
+        </p:nvSpPr>
+        <p:spPr/>
+        <p:txBody>
+          <a:bodyPr/>
+          <a:lstStyle/>
+          <a:p>
+            <a:r>
+              <a:rPr lang="en-US" dirty="0"/>
+              <a:t>Pattern 13: set. 説明責任、比較、証跡、表形式の読みやすさを優先するモード向けテンプレート。
+Slide 17: グループ/集合テンプレート
+report-set-visual: グループ/集合 (set) report schematic template
+report-set-visual long description: 関連する要素をグループに分け、どの要素がどのまとまりに属するかを整理する図解です。 説明責任、比較、証跡、表形式の読みやすさを優先するモード向けテンプレート。</a:t>
+            </a:r>
+            <a:endParaRPr lang="en-US" dirty="0"/>
+          </a:p>
+        </p:txBody>
+      </p:sp>
+      <p:sp>
+        <p:nvSpPr>
+          <p:cNvPr id="4" name="Slide Number Placeholder 3"/>
+          <p:cNvSpPr>
+            <a:spLocks noGrp="1"/>
+          </p:cNvSpPr>
+          <p:nvPr>
+            <p:ph type="sldNum" sz="quarter" idx="10"/>
+          </p:nvPr>
+        </p:nvSpPr>
+        <p:spPr/>
+        <p:txBody>
+          <a:bodyPr/>
+          <a:lstStyle/>
+          <a:p>
+            <a:fld id="{F7021451-1387-4CA6-816F-3879F97B5CBC}" type="slidenum">
+              <a:rPr lang="en-US"/>
+              <a:t>17</a:t>
+            </a:fld>
+            <a:endParaRPr lang="en-US"/>
+          </a:p>
+        </p:txBody>
+      </p:sp>
+    </p:spTree>
+    <p:extLst>
+      <p:ext uri="{BB962C8B-B14F-4D97-AF65-F5344CB8AC3E}">
+        <p14:creationId xmlns:p14="http://schemas.microsoft.com/office/powerpoint/2010/main" val="1024086991"/>
+      </p:ext>
+    </p:extLst>
+  </p:cSld>
+  <p:clrMapOvr>
+    <a:masterClrMapping/>
+  </p:clrMapOvr>
+</p:notes>
+</file>
+
+<file path=ppt/notesSlides/notesSlide18.xml><?xml version="1.0" encoding="utf-8"?>
+<p:notes xmlns:a="http://schemas.openxmlformats.org/drawingml/2006/main" xmlns:r="http://schemas.openxmlformats.org/officeDocument/2006/relationships" xmlns:p="http://schemas.openxmlformats.org/presentationml/2006/main">
+  <p:cSld>
+    <p:spTree>
+      <p:nvGrpSpPr>
+        <p:cNvPr id="1" name=""/>
+        <p:cNvGrpSpPr/>
+        <p:nvPr/>
+      </p:nvGrpSpPr>
+      <p:grpSpPr>
+        <a:xfrm>
+          <a:off x="0" y="0"/>
+          <a:ext cx="0" cy="0"/>
+          <a:chOff x="0" y="0"/>
+          <a:chExt cx="0" cy="0"/>
+        </a:xfrm>
+      </p:grpSpPr>
+      <p:sp>
+        <p:nvSpPr>
+          <p:cNvPr id="2" name="Slide Image Placeholder 1"/>
+          <p:cNvSpPr>
+            <a:spLocks noGrp="1" noRot="1" noChangeAspect="1"/>
+          </p:cNvSpPr>
+          <p:nvPr>
+            <p:ph type="sldImg"/>
+          </p:nvPr>
+        </p:nvSpPr>
+        <p:spPr/>
+      </p:sp>
+      <p:sp>
+        <p:nvSpPr>
+          <p:cNvPr id="3" name="Notes Placeholder 2"/>
+          <p:cNvSpPr>
+            <a:spLocks noGrp="1"/>
+          </p:cNvSpPr>
+          <p:nvPr>
+            <p:ph type="body" idx="1"/>
+          </p:nvPr>
+        </p:nvSpPr>
+        <p:spPr/>
+        <p:txBody>
+          <a:bodyPr/>
+          <a:lstStyle/>
+          <a:p>
+            <a:r>
+              <a:rPr lang="en-US" dirty="0"/>
+              <a:t>Pattern 14: contrast. 説明責任、比較、証跡、表形式の読みやすさを優先するモード向けテンプレート。
+Slide 18: 項目比較テンプレート
+report-contrast-visual: 項目比較 (contrast) report schematic template
+report-contrast-visual long description: 二つの選択肢や状態を左右に並べ、差分と判断材料を強調する比較図です。 説明責任、比較、証跡、表形式の読みやすさを優先するモード向けテンプレート。</a:t>
+            </a:r>
+            <a:endParaRPr lang="en-US" dirty="0"/>
+          </a:p>
+        </p:txBody>
+      </p:sp>
+      <p:sp>
+        <p:nvSpPr>
+          <p:cNvPr id="4" name="Slide Number Placeholder 3"/>
+          <p:cNvSpPr>
+            <a:spLocks noGrp="1"/>
+          </p:cNvSpPr>
+          <p:nvPr>
+            <p:ph type="sldNum" sz="quarter" idx="10"/>
+          </p:nvPr>
+        </p:nvSpPr>
+        <p:spPr/>
+        <p:txBody>
+          <a:bodyPr/>
+          <a:lstStyle/>
+          <a:p>
+            <a:fld id="{F7021451-1387-4CA6-816F-3879F97B5CBC}" type="slidenum">
+              <a:rPr lang="en-US"/>
+              <a:t>18</a:t>
+            </a:fld>
+            <a:endParaRPr lang="en-US"/>
+          </a:p>
+        </p:txBody>
+      </p:sp>
+    </p:spTree>
+    <p:extLst>
+      <p:ext uri="{BB962C8B-B14F-4D97-AF65-F5344CB8AC3E}">
+        <p14:creationId xmlns:p14="http://schemas.microsoft.com/office/powerpoint/2010/main" val="1024086991"/>
+      </p:ext>
+    </p:extLst>
+  </p:cSld>
+  <p:clrMapOvr>
+    <a:masterClrMapping/>
+  </p:clrMapOvr>
+</p:notes>
+</file>
+
+<file path=ppt/notesSlides/notesSlide19.xml><?xml version="1.0" encoding="utf-8"?>
+<p:notes xmlns:a="http://schemas.openxmlformats.org/drawingml/2006/main" xmlns:r="http://schemas.openxmlformats.org/officeDocument/2006/relationships" xmlns:p="http://schemas.openxmlformats.org/presentationml/2006/main">
+  <p:cSld>
+    <p:spTree>
+      <p:nvGrpSpPr>
+        <p:cNvPr id="1" name=""/>
+        <p:cNvGrpSpPr/>
+        <p:nvPr/>
+      </p:nvGrpSpPr>
+      <p:grpSpPr>
+        <a:xfrm>
+          <a:off x="0" y="0"/>
+          <a:ext cx="0" cy="0"/>
+          <a:chOff x="0" y="0"/>
+          <a:chExt cx="0" cy="0"/>
+        </a:xfrm>
+      </p:grpSpPr>
+      <p:sp>
+        <p:nvSpPr>
+          <p:cNvPr id="2" name="Slide Image Placeholder 1"/>
+          <p:cNvSpPr>
+            <a:spLocks noGrp="1" noRot="1" noChangeAspect="1"/>
+          </p:cNvSpPr>
+          <p:nvPr>
+            <p:ph type="sldImg"/>
+          </p:nvPr>
+        </p:nvSpPr>
+        <p:spPr/>
+      </p:sp>
+      <p:sp>
+        <p:nvSpPr>
+          <p:cNvPr id="3" name="Notes Placeholder 2"/>
+          <p:cNvSpPr>
+            <a:spLocks noGrp="1"/>
+          </p:cNvSpPr>
+          <p:nvPr>
+            <p:ph type="body" idx="1"/>
+          </p:nvPr>
+        </p:nvSpPr>
+        <p:spPr/>
+        <p:txBody>
+          <a:bodyPr/>
+          <a:lstStyle/>
+          <a:p>
+            <a:r>
+              <a:rPr lang="en-US" dirty="0"/>
+              <a:t>Pattern 15: scale-contrast. 説明責任、比較、証跡、表形式の読みやすさを優先するモード向けテンプレート。
+Slide 19: 規模比較テンプレート
+report-scale-contrast-visual: 規模比較 (scale-contrast) report schematic template
+report-scale-contrast-visual long description: 複数の数値差を円の面積で表し、大小関係を直感的に伝える図解です。 説明責任、比較、証跡、表形式の読みやすさを優先するモード向けテンプレート。</a:t>
+            </a:r>
+            <a:endParaRPr lang="en-US" dirty="0"/>
+          </a:p>
+        </p:txBody>
+      </p:sp>
+      <p:sp>
+        <p:nvSpPr>
+          <p:cNvPr id="4" name="Slide Number Placeholder 3"/>
+          <p:cNvSpPr>
+            <a:spLocks noGrp="1"/>
+          </p:cNvSpPr>
+          <p:nvPr>
+            <p:ph type="sldNum" sz="quarter" idx="10"/>
+          </p:nvPr>
+        </p:nvSpPr>
+        <p:spPr/>
+        <p:txBody>
+          <a:bodyPr/>
+          <a:lstStyle/>
+          <a:p>
+            <a:fld id="{F7021451-1387-4CA6-816F-3879F97B5CBC}" type="slidenum">
+              <a:rPr lang="en-US"/>
+              <a:t>19</a:t>
             </a:fld>
             <a:endParaRPr lang="en-US"/>
           </a:p>
@@ -637,6 +1221,916 @@
 </p:notes>
 </file>
 
+<file path=ppt/notesSlides/notesSlide20.xml><?xml version="1.0" encoding="utf-8"?>
+<p:notes xmlns:a="http://schemas.openxmlformats.org/drawingml/2006/main" xmlns:r="http://schemas.openxmlformats.org/officeDocument/2006/relationships" xmlns:p="http://schemas.openxmlformats.org/presentationml/2006/main">
+  <p:cSld>
+    <p:spTree>
+      <p:nvGrpSpPr>
+        <p:cNvPr id="1" name=""/>
+        <p:cNvGrpSpPr/>
+        <p:nvPr/>
+      </p:nvGrpSpPr>
+      <p:grpSpPr>
+        <a:xfrm>
+          <a:off x="0" y="0"/>
+          <a:ext cx="0" cy="0"/>
+          <a:chOff x="0" y="0"/>
+          <a:chExt cx="0" cy="0"/>
+        </a:xfrm>
+      </p:grpSpPr>
+      <p:sp>
+        <p:nvSpPr>
+          <p:cNvPr id="2" name="Slide Image Placeholder 1"/>
+          <p:cNvSpPr>
+            <a:spLocks noGrp="1" noRot="1" noChangeAspect="1"/>
+          </p:cNvSpPr>
+          <p:nvPr>
+            <p:ph type="sldImg"/>
+          </p:nvPr>
+        </p:nvSpPr>
+        <p:spPr/>
+      </p:sp>
+      <p:sp>
+        <p:nvSpPr>
+          <p:cNvPr id="3" name="Notes Placeholder 2"/>
+          <p:cNvSpPr>
+            <a:spLocks noGrp="1"/>
+          </p:cNvSpPr>
+          <p:nvPr>
+            <p:ph type="body" idx="1"/>
+          </p:nvPr>
+        </p:nvSpPr>
+        <p:spPr/>
+        <p:txBody>
+          <a:bodyPr/>
+          <a:lstStyle/>
+          <a:p>
+            <a:r>
+              <a:rPr lang="en-US" dirty="0"/>
+              <a:t>Pattern 16: grow. 説明責任、比較、証跡、表形式の読みやすさを優先するモード向けテンプレート。
+Slide 20: 規模分析テンプレート
+report-grow-visual: 規模分析 (grow) report schematic template
+report-grow-visual long description: 全体から到達可能範囲、初期対象へと段階的に絞り込む考え方を同心円で示す図解です。 説明責任、比較、証跡、表形式の読みやすさを優先するモード向けテンプレート。</a:t>
+            </a:r>
+            <a:endParaRPr lang="en-US" dirty="0"/>
+          </a:p>
+        </p:txBody>
+      </p:sp>
+      <p:sp>
+        <p:nvSpPr>
+          <p:cNvPr id="4" name="Slide Number Placeholder 3"/>
+          <p:cNvSpPr>
+            <a:spLocks noGrp="1"/>
+          </p:cNvSpPr>
+          <p:nvPr>
+            <p:ph type="sldNum" sz="quarter" idx="10"/>
+          </p:nvPr>
+        </p:nvSpPr>
+        <p:spPr/>
+        <p:txBody>
+          <a:bodyPr/>
+          <a:lstStyle/>
+          <a:p>
+            <a:fld id="{F7021451-1387-4CA6-816F-3879F97B5CBC}" type="slidenum">
+              <a:rPr lang="en-US"/>
+              <a:t>20</a:t>
+            </a:fld>
+            <a:endParaRPr lang="en-US"/>
+          </a:p>
+        </p:txBody>
+      </p:sp>
+    </p:spTree>
+    <p:extLst>
+      <p:ext uri="{BB962C8B-B14F-4D97-AF65-F5344CB8AC3E}">
+        <p14:creationId xmlns:p14="http://schemas.microsoft.com/office/powerpoint/2010/main" val="1024086991"/>
+      </p:ext>
+    </p:extLst>
+  </p:cSld>
+  <p:clrMapOvr>
+    <a:masterClrMapping/>
+  </p:clrMapOvr>
+</p:notes>
+</file>
+
+<file path=ppt/notesSlides/notesSlide21.xml><?xml version="1.0" encoding="utf-8"?>
+<p:notes xmlns:a="http://schemas.openxmlformats.org/drawingml/2006/main" xmlns:r="http://schemas.openxmlformats.org/officeDocument/2006/relationships" xmlns:p="http://schemas.openxmlformats.org/presentationml/2006/main">
+  <p:cSld>
+    <p:spTree>
+      <p:nvGrpSpPr>
+        <p:cNvPr id="1" name=""/>
+        <p:cNvGrpSpPr/>
+        <p:nvPr/>
+      </p:nvGrpSpPr>
+      <p:grpSpPr>
+        <a:xfrm>
+          <a:off x="0" y="0"/>
+          <a:ext cx="0" cy="0"/>
+          <a:chOff x="0" y="0"/>
+          <a:chExt cx="0" cy="0"/>
+        </a:xfrm>
+      </p:grpSpPr>
+      <p:sp>
+        <p:nvSpPr>
+          <p:cNvPr id="2" name="Slide Image Placeholder 1"/>
+          <p:cNvSpPr>
+            <a:spLocks noGrp="1" noRot="1" noChangeAspect="1"/>
+          </p:cNvSpPr>
+          <p:nvPr>
+            <p:ph type="sldImg"/>
+          </p:nvPr>
+        </p:nvSpPr>
+        <p:spPr/>
+      </p:sp>
+      <p:sp>
+        <p:nvSpPr>
+          <p:cNvPr id="3" name="Notes Placeholder 2"/>
+          <p:cNvSpPr>
+            <a:spLocks noGrp="1"/>
+          </p:cNvSpPr>
+          <p:nvPr>
+            <p:ph type="body" idx="1"/>
+          </p:nvPr>
+        </p:nvSpPr>
+        <p:spPr/>
+        <p:txBody>
+          <a:bodyPr/>
+          <a:lstStyle/>
+          <a:p>
+            <a:r>
+              <a:rPr lang="en-US" dirty="0"/>
+              <a:t>Pattern 17: layer. 説明責任、比較、証跡、表形式の読みやすさを優先するモード向けテンプレート。
+Slide 21: レイヤー構造テンプレート
+report-layer-visual: レイヤー構造 (layer) report schematic template
+report-layer-visual long description: 上位から下位、または体験から基盤までの役割を層として積み上げる図解です。 説明責任、比較、証跡、表形式の読みやすさを優先するモード向けテンプレート。</a:t>
+            </a:r>
+            <a:endParaRPr lang="en-US" dirty="0"/>
+          </a:p>
+        </p:txBody>
+      </p:sp>
+      <p:sp>
+        <p:nvSpPr>
+          <p:cNvPr id="4" name="Slide Number Placeholder 3"/>
+          <p:cNvSpPr>
+            <a:spLocks noGrp="1"/>
+          </p:cNvSpPr>
+          <p:nvPr>
+            <p:ph type="sldNum" sz="quarter" idx="10"/>
+          </p:nvPr>
+        </p:nvSpPr>
+        <p:spPr/>
+        <p:txBody>
+          <a:bodyPr/>
+          <a:lstStyle/>
+          <a:p>
+            <a:fld id="{F7021451-1387-4CA6-816F-3879F97B5CBC}" type="slidenum">
+              <a:rPr lang="en-US"/>
+              <a:t>21</a:t>
+            </a:fld>
+            <a:endParaRPr lang="en-US"/>
+          </a:p>
+        </p:txBody>
+      </p:sp>
+    </p:spTree>
+    <p:extLst>
+      <p:ext uri="{BB962C8B-B14F-4D97-AF65-F5344CB8AC3E}">
+        <p14:creationId xmlns:p14="http://schemas.microsoft.com/office/powerpoint/2010/main" val="1024086991"/>
+      </p:ext>
+    </p:extLst>
+  </p:cSld>
+  <p:clrMapOvr>
+    <a:masterClrMapping/>
+  </p:clrMapOvr>
+</p:notes>
+</file>
+
+<file path=ppt/notesSlides/notesSlide22.xml><?xml version="1.0" encoding="utf-8"?>
+<p:notes xmlns:a="http://schemas.openxmlformats.org/drawingml/2006/main" xmlns:r="http://schemas.openxmlformats.org/officeDocument/2006/relationships" xmlns:p="http://schemas.openxmlformats.org/presentationml/2006/main">
+  <p:cSld>
+    <p:spTree>
+      <p:nvGrpSpPr>
+        <p:cNvPr id="1" name=""/>
+        <p:cNvGrpSpPr/>
+        <p:nvPr/>
+      </p:nvGrpSpPr>
+      <p:grpSpPr>
+        <a:xfrm>
+          <a:off x="0" y="0"/>
+          <a:ext cx="0" cy="0"/>
+          <a:chOff x="0" y="0"/>
+          <a:chExt cx="0" cy="0"/>
+        </a:xfrm>
+      </p:grpSpPr>
+      <p:sp>
+        <p:nvSpPr>
+          <p:cNvPr id="2" name="Slide Image Placeholder 1"/>
+          <p:cNvSpPr>
+            <a:spLocks noGrp="1" noRot="1" noChangeAspect="1"/>
+          </p:cNvSpPr>
+          <p:nvPr>
+            <p:ph type="sldImg"/>
+          </p:nvPr>
+        </p:nvSpPr>
+        <p:spPr/>
+      </p:sp>
+      <p:sp>
+        <p:nvSpPr>
+          <p:cNvPr id="3" name="Notes Placeholder 2"/>
+          <p:cNvSpPr>
+            <a:spLocks noGrp="1"/>
+          </p:cNvSpPr>
+          <p:nvPr>
+            <p:ph type="body" idx="1"/>
+          </p:nvPr>
+        </p:nvSpPr>
+        <p:spPr/>
+        <p:txBody>
+          <a:bodyPr/>
+          <a:lstStyle/>
+          <a:p>
+            <a:r>
+              <a:rPr lang="en-US" dirty="0"/>
+              <a:t>Pattern 18: triangle. 説明責任、比較、証跡、表形式の読みやすさを優先するモード向けテンプレート。
+Slide 22: トライアングルテンプレート
+report-triangle-visual: トライアングル (triangle) report schematic template
+report-triangle-visual long description: 下層の基盤から上層の成果へ段階的に積み上がる関係を示す図解です。 説明責任、比較、証跡、表形式の読みやすさを優先するモード向けテンプレート。</a:t>
+            </a:r>
+            <a:endParaRPr lang="en-US" dirty="0"/>
+          </a:p>
+        </p:txBody>
+      </p:sp>
+      <p:sp>
+        <p:nvSpPr>
+          <p:cNvPr id="4" name="Slide Number Placeholder 3"/>
+          <p:cNvSpPr>
+            <a:spLocks noGrp="1"/>
+          </p:cNvSpPr>
+          <p:nvPr>
+            <p:ph type="sldNum" sz="quarter" idx="10"/>
+          </p:nvPr>
+        </p:nvSpPr>
+        <p:spPr/>
+        <p:txBody>
+          <a:bodyPr/>
+          <a:lstStyle/>
+          <a:p>
+            <a:fld id="{F7021451-1387-4CA6-816F-3879F97B5CBC}" type="slidenum">
+              <a:rPr lang="en-US"/>
+              <a:t>22</a:t>
+            </a:fld>
+            <a:endParaRPr lang="en-US"/>
+          </a:p>
+        </p:txBody>
+      </p:sp>
+    </p:spTree>
+    <p:extLst>
+      <p:ext uri="{BB962C8B-B14F-4D97-AF65-F5344CB8AC3E}">
+        <p14:creationId xmlns:p14="http://schemas.microsoft.com/office/powerpoint/2010/main" val="1024086991"/>
+      </p:ext>
+    </p:extLst>
+  </p:cSld>
+  <p:clrMapOvr>
+    <a:masterClrMapping/>
+  </p:clrMapOvr>
+</p:notes>
+</file>
+
+<file path=ppt/notesSlides/notesSlide23.xml><?xml version="1.0" encoding="utf-8"?>
+<p:notes xmlns:a="http://schemas.openxmlformats.org/drawingml/2006/main" xmlns:r="http://schemas.openxmlformats.org/officeDocument/2006/relationships" xmlns:p="http://schemas.openxmlformats.org/presentationml/2006/main">
+  <p:cSld>
+    <p:spTree>
+      <p:nvGrpSpPr>
+        <p:cNvPr id="1" name=""/>
+        <p:cNvGrpSpPr/>
+        <p:nvPr/>
+      </p:nvGrpSpPr>
+      <p:grpSpPr>
+        <a:xfrm>
+          <a:off x="0" y="0"/>
+          <a:ext cx="0" cy="0"/>
+          <a:chOff x="0" y="0"/>
+          <a:chExt cx="0" cy="0"/>
+        </a:xfrm>
+      </p:grpSpPr>
+      <p:sp>
+        <p:nvSpPr>
+          <p:cNvPr id="2" name="Slide Image Placeholder 1"/>
+          <p:cNvSpPr>
+            <a:spLocks noGrp="1" noRot="1" noChangeAspect="1"/>
+          </p:cNvSpPr>
+          <p:nvPr>
+            <p:ph type="sldImg"/>
+          </p:nvPr>
+        </p:nvSpPr>
+        <p:spPr/>
+      </p:sp>
+      <p:sp>
+        <p:nvSpPr>
+          <p:cNvPr id="3" name="Notes Placeholder 2"/>
+          <p:cNvSpPr>
+            <a:spLocks noGrp="1"/>
+          </p:cNvSpPr>
+          <p:nvPr>
+            <p:ph type="body" idx="1"/>
+          </p:nvPr>
+        </p:nvSpPr>
+        <p:spPr/>
+        <p:txBody>
+          <a:bodyPr/>
+          <a:lstStyle/>
+          <a:p>
+            <a:r>
+              <a:rPr lang="en-US" dirty="0"/>
+              <a:t>Pattern 19: step. 説明責任、比較、証跡、表形式の読みやすさを優先するモード向けテンプレート。
+Slide 23: 階段/ステップテンプレート
+report-step-visual: 階段/ステップ (step) report schematic template
+report-step-visual long description: 導入から展開までの成長段階を階段状に示し、進むべき順序を明確にする図解です。 説明責任、比較、証跡、表形式の読みやすさを優先するモード向けテンプレート。</a:t>
+            </a:r>
+            <a:endParaRPr lang="en-US" dirty="0"/>
+          </a:p>
+        </p:txBody>
+      </p:sp>
+      <p:sp>
+        <p:nvSpPr>
+          <p:cNvPr id="4" name="Slide Number Placeholder 3"/>
+          <p:cNvSpPr>
+            <a:spLocks noGrp="1"/>
+          </p:cNvSpPr>
+          <p:nvPr>
+            <p:ph type="sldNum" sz="quarter" idx="10"/>
+          </p:nvPr>
+        </p:nvSpPr>
+        <p:spPr/>
+        <p:txBody>
+          <a:bodyPr/>
+          <a:lstStyle/>
+          <a:p>
+            <a:fld id="{F7021451-1387-4CA6-816F-3879F97B5CBC}" type="slidenum">
+              <a:rPr lang="en-US"/>
+              <a:t>23</a:t>
+            </a:fld>
+            <a:endParaRPr lang="en-US"/>
+          </a:p>
+        </p:txBody>
+      </p:sp>
+    </p:spTree>
+    <p:extLst>
+      <p:ext uri="{BB962C8B-B14F-4D97-AF65-F5344CB8AC3E}">
+        <p14:creationId xmlns:p14="http://schemas.microsoft.com/office/powerpoint/2010/main" val="1024086991"/>
+      </p:ext>
+    </p:extLst>
+  </p:cSld>
+  <p:clrMapOvr>
+    <a:masterClrMapping/>
+  </p:clrMapOvr>
+</p:notes>
+</file>
+
+<file path=ppt/notesSlides/notesSlide24.xml><?xml version="1.0" encoding="utf-8"?>
+<p:notes xmlns:a="http://schemas.openxmlformats.org/drawingml/2006/main" xmlns:r="http://schemas.openxmlformats.org/officeDocument/2006/relationships" xmlns:p="http://schemas.openxmlformats.org/presentationml/2006/main">
+  <p:cSld>
+    <p:spTree>
+      <p:nvGrpSpPr>
+        <p:cNvPr id="1" name=""/>
+        <p:cNvGrpSpPr/>
+        <p:nvPr/>
+      </p:nvGrpSpPr>
+      <p:grpSpPr>
+        <a:xfrm>
+          <a:off x="0" y="0"/>
+          <a:ext cx="0" cy="0"/>
+          <a:chOff x="0" y="0"/>
+          <a:chExt cx="0" cy="0"/>
+        </a:xfrm>
+      </p:grpSpPr>
+      <p:sp>
+        <p:nvSpPr>
+          <p:cNvPr id="2" name="Slide Image Placeholder 1"/>
+          <p:cNvSpPr>
+            <a:spLocks noGrp="1" noRot="1" noChangeAspect="1"/>
+          </p:cNvSpPr>
+          <p:nvPr>
+            <p:ph type="sldImg"/>
+          </p:nvPr>
+        </p:nvSpPr>
+        <p:spPr/>
+      </p:sp>
+      <p:sp>
+        <p:nvSpPr>
+          <p:cNvPr id="3" name="Notes Placeholder 2"/>
+          <p:cNvSpPr>
+            <a:spLocks noGrp="1"/>
+          </p:cNvSpPr>
+          <p:nvPr>
+            <p:ph type="body" idx="1"/>
+          </p:nvPr>
+        </p:nvSpPr>
+        <p:spPr/>
+        <p:txBody>
+          <a:bodyPr/>
+          <a:lstStyle/>
+          <a:p>
+            <a:r>
+              <a:rPr lang="en-US" dirty="0"/>
+              <a:t>Pattern 20: gantt. 説明責任、比較、証跡、表形式の読みやすさを優先するモード向けテンプレート。
+Slide 24: ガントチャートテンプレート
+report-gantt-visual: ガントチャート (gantt) report schematic template
+report-gantt-visual long description: タスクと期間を同じ表面に並べ、進行計画や担当タイミングを把握しやすくする図解です。 説明責任、比較、証跡、表形式の読みやすさを優先するモード向けテンプレート。</a:t>
+            </a:r>
+            <a:endParaRPr lang="en-US" dirty="0"/>
+          </a:p>
+        </p:txBody>
+      </p:sp>
+      <p:sp>
+        <p:nvSpPr>
+          <p:cNvPr id="4" name="Slide Number Placeholder 3"/>
+          <p:cNvSpPr>
+            <a:spLocks noGrp="1"/>
+          </p:cNvSpPr>
+          <p:nvPr>
+            <p:ph type="sldNum" sz="quarter" idx="10"/>
+          </p:nvPr>
+        </p:nvSpPr>
+        <p:spPr/>
+        <p:txBody>
+          <a:bodyPr/>
+          <a:lstStyle/>
+          <a:p>
+            <a:fld id="{F7021451-1387-4CA6-816F-3879F97B5CBC}" type="slidenum">
+              <a:rPr lang="en-US"/>
+              <a:t>24</a:t>
+            </a:fld>
+            <a:endParaRPr lang="en-US"/>
+          </a:p>
+        </p:txBody>
+      </p:sp>
+    </p:spTree>
+    <p:extLst>
+      <p:ext uri="{BB962C8B-B14F-4D97-AF65-F5344CB8AC3E}">
+        <p14:creationId xmlns:p14="http://schemas.microsoft.com/office/powerpoint/2010/main" val="1024086991"/>
+      </p:ext>
+    </p:extLst>
+  </p:cSld>
+  <p:clrMapOvr>
+    <a:masterClrMapping/>
+  </p:clrMapOvr>
+</p:notes>
+</file>
+
+<file path=ppt/notesSlides/notesSlide25.xml><?xml version="1.0" encoding="utf-8"?>
+<p:notes xmlns:a="http://schemas.openxmlformats.org/drawingml/2006/main" xmlns:r="http://schemas.openxmlformats.org/officeDocument/2006/relationships" xmlns:p="http://schemas.openxmlformats.org/presentationml/2006/main">
+  <p:cSld>
+    <p:spTree>
+      <p:nvGrpSpPr>
+        <p:cNvPr id="1" name=""/>
+        <p:cNvGrpSpPr/>
+        <p:nvPr/>
+      </p:nvGrpSpPr>
+      <p:grpSpPr>
+        <a:xfrm>
+          <a:off x="0" y="0"/>
+          <a:ext cx="0" cy="0"/>
+          <a:chOff x="0" y="0"/>
+          <a:chExt cx="0" cy="0"/>
+        </a:xfrm>
+      </p:grpSpPr>
+      <p:sp>
+        <p:nvSpPr>
+          <p:cNvPr id="2" name="Slide Image Placeholder 1"/>
+          <p:cNvSpPr>
+            <a:spLocks noGrp="1" noRot="1" noChangeAspect="1"/>
+          </p:cNvSpPr>
+          <p:nvPr>
+            <p:ph type="sldImg"/>
+          </p:nvPr>
+        </p:nvSpPr>
+        <p:spPr/>
+      </p:sp>
+      <p:sp>
+        <p:nvSpPr>
+          <p:cNvPr id="3" name="Notes Placeholder 2"/>
+          <p:cNvSpPr>
+            <a:spLocks noGrp="1"/>
+          </p:cNvSpPr>
+          <p:nvPr>
+            <p:ph type="body" idx="1"/>
+          </p:nvPr>
+        </p:nvSpPr>
+        <p:spPr/>
+        <p:txBody>
+          <a:bodyPr/>
+          <a:lstStyle/>
+          <a:p>
+            <a:r>
+              <a:rPr lang="en-US" dirty="0"/>
+              <a:t>Pattern 21: ranking. 説明責任、比較、証跡、表形式の読みやすさを優先するモード向けテンプレート。
+Slide 25: ランキングテンプレート
+report-ranking-visual: ランキング (ranking) report schematic template
+report-ranking-visual long description: 順位だけでなく数値差も棒で示し、優先順位の意味を伝えやすくする図解です。 説明責任、比較、証跡、表形式の読みやすさを優先するモード向けテンプレート。</a:t>
+            </a:r>
+            <a:endParaRPr lang="en-US" dirty="0"/>
+          </a:p>
+        </p:txBody>
+      </p:sp>
+      <p:sp>
+        <p:nvSpPr>
+          <p:cNvPr id="4" name="Slide Number Placeholder 3"/>
+          <p:cNvSpPr>
+            <a:spLocks noGrp="1"/>
+          </p:cNvSpPr>
+          <p:nvPr>
+            <p:ph type="sldNum" sz="quarter" idx="10"/>
+          </p:nvPr>
+        </p:nvSpPr>
+        <p:spPr/>
+        <p:txBody>
+          <a:bodyPr/>
+          <a:lstStyle/>
+          <a:p>
+            <a:fld id="{F7021451-1387-4CA6-816F-3879F97B5CBC}" type="slidenum">
+              <a:rPr lang="en-US"/>
+              <a:t>25</a:t>
+            </a:fld>
+            <a:endParaRPr lang="en-US"/>
+          </a:p>
+        </p:txBody>
+      </p:sp>
+    </p:spTree>
+    <p:extLst>
+      <p:ext uri="{BB962C8B-B14F-4D97-AF65-F5344CB8AC3E}">
+        <p14:creationId xmlns:p14="http://schemas.microsoft.com/office/powerpoint/2010/main" val="1024086991"/>
+      </p:ext>
+    </p:extLst>
+  </p:cSld>
+  <p:clrMapOvr>
+    <a:masterClrMapping/>
+  </p:clrMapOvr>
+</p:notes>
+</file>
+
+<file path=ppt/notesSlides/notesSlide26.xml><?xml version="1.0" encoding="utf-8"?>
+<p:notes xmlns:a="http://schemas.openxmlformats.org/drawingml/2006/main" xmlns:r="http://schemas.openxmlformats.org/officeDocument/2006/relationships" xmlns:p="http://schemas.openxmlformats.org/presentationml/2006/main">
+  <p:cSld>
+    <p:spTree>
+      <p:nvGrpSpPr>
+        <p:cNvPr id="1" name=""/>
+        <p:cNvGrpSpPr/>
+        <p:nvPr/>
+      </p:nvGrpSpPr>
+      <p:grpSpPr>
+        <a:xfrm>
+          <a:off x="0" y="0"/>
+          <a:ext cx="0" cy="0"/>
+          <a:chOff x="0" y="0"/>
+          <a:chExt cx="0" cy="0"/>
+        </a:xfrm>
+      </p:grpSpPr>
+      <p:sp>
+        <p:nvSpPr>
+          <p:cNvPr id="2" name="Slide Image Placeholder 1"/>
+          <p:cNvSpPr>
+            <a:spLocks noGrp="1" noRot="1" noChangeAspect="1"/>
+          </p:cNvSpPr>
+          <p:nvPr>
+            <p:ph type="sldImg"/>
+          </p:nvPr>
+        </p:nvSpPr>
+        <p:spPr/>
+      </p:sp>
+      <p:sp>
+        <p:nvSpPr>
+          <p:cNvPr id="3" name="Notes Placeholder 2"/>
+          <p:cNvSpPr>
+            <a:spLocks noGrp="1"/>
+          </p:cNvSpPr>
+          <p:nvPr>
+            <p:ph type="body" idx="1"/>
+          </p:nvPr>
+        </p:nvSpPr>
+        <p:spPr/>
+        <p:txBody>
+          <a:bodyPr/>
+          <a:lstStyle/>
+          <a:p>
+            <a:r>
+              <a:rPr lang="en-US" dirty="0"/>
+              <a:t>Pattern 22: list. 説明責任、比較、証跡、表形式の読みやすさを優先するモード向けテンプレート。
+Slide 26: 箇条書き縦テンプレート
+report-list-visual: 箇条書き縦 (list) report schematic template
+report-list-visual long description: 複数の要点を縦方向に並べ、読み順と視線移動を安定させる図解です。 説明責任、比較、証跡、表形式の読みやすさを優先するモード向けテンプレート。</a:t>
+            </a:r>
+            <a:endParaRPr lang="en-US" dirty="0"/>
+          </a:p>
+        </p:txBody>
+      </p:sp>
+      <p:sp>
+        <p:nvSpPr>
+          <p:cNvPr id="4" name="Slide Number Placeholder 3"/>
+          <p:cNvSpPr>
+            <a:spLocks noGrp="1"/>
+          </p:cNvSpPr>
+          <p:nvPr>
+            <p:ph type="sldNum" sz="quarter" idx="10"/>
+          </p:nvPr>
+        </p:nvSpPr>
+        <p:spPr/>
+        <p:txBody>
+          <a:bodyPr/>
+          <a:lstStyle/>
+          <a:p>
+            <a:fld id="{F7021451-1387-4CA6-816F-3879F97B5CBC}" type="slidenum">
+              <a:rPr lang="en-US"/>
+              <a:t>26</a:t>
+            </a:fld>
+            <a:endParaRPr lang="en-US"/>
+          </a:p>
+        </p:txBody>
+      </p:sp>
+    </p:spTree>
+    <p:extLst>
+      <p:ext uri="{BB962C8B-B14F-4D97-AF65-F5344CB8AC3E}">
+        <p14:creationId xmlns:p14="http://schemas.microsoft.com/office/powerpoint/2010/main" val="1024086991"/>
+      </p:ext>
+    </p:extLst>
+  </p:cSld>
+  <p:clrMapOvr>
+    <a:masterClrMapping/>
+  </p:clrMapOvr>
+</p:notes>
+</file>
+
+<file path=ppt/notesSlides/notesSlide27.xml><?xml version="1.0" encoding="utf-8"?>
+<p:notes xmlns:a="http://schemas.openxmlformats.org/drawingml/2006/main" xmlns:r="http://schemas.openxmlformats.org/officeDocument/2006/relationships" xmlns:p="http://schemas.openxmlformats.org/presentationml/2006/main">
+  <p:cSld>
+    <p:spTree>
+      <p:nvGrpSpPr>
+        <p:cNvPr id="1" name=""/>
+        <p:cNvGrpSpPr/>
+        <p:nvPr/>
+      </p:nvGrpSpPr>
+      <p:grpSpPr>
+        <a:xfrm>
+          <a:off x="0" y="0"/>
+          <a:ext cx="0" cy="0"/>
+          <a:chOff x="0" y="0"/>
+          <a:chExt cx="0" cy="0"/>
+        </a:xfrm>
+      </p:grpSpPr>
+      <p:sp>
+        <p:nvSpPr>
+          <p:cNvPr id="2" name="Slide Image Placeholder 1"/>
+          <p:cNvSpPr>
+            <a:spLocks noGrp="1" noRot="1" noChangeAspect="1"/>
+          </p:cNvSpPr>
+          <p:nvPr>
+            <p:ph type="sldImg"/>
+          </p:nvPr>
+        </p:nvSpPr>
+        <p:spPr/>
+      </p:sp>
+      <p:sp>
+        <p:nvSpPr>
+          <p:cNvPr id="3" name="Notes Placeholder 2"/>
+          <p:cNvSpPr>
+            <a:spLocks noGrp="1"/>
+          </p:cNvSpPr>
+          <p:nvPr>
+            <p:ph type="body" idx="1"/>
+          </p:nvPr>
+        </p:nvSpPr>
+        <p:spPr/>
+        <p:txBody>
+          <a:bodyPr/>
+          <a:lstStyle/>
+          <a:p>
+            <a:r>
+              <a:rPr lang="en-US" dirty="0"/>
+              <a:t>Pattern 23: list-horizontal. 説明責任、比較、証跡、表形式の読みやすさを優先するモード向けテンプレート。
+Slide 27: 箇条書き横テンプレート
+report-list-horizontal-visual: 箇条書き横 (list-horizontal) report schematic template
+report-list-horizontal-visual long description: 少数の重要ポイントを横並びカードで配置し、同列の観点として比較しやすくする図解です。 説明責任、比較、証跡、表形式の読みやすさを優先するモード向けテンプレート。</a:t>
+            </a:r>
+            <a:endParaRPr lang="en-US" dirty="0"/>
+          </a:p>
+        </p:txBody>
+      </p:sp>
+      <p:sp>
+        <p:nvSpPr>
+          <p:cNvPr id="4" name="Slide Number Placeholder 3"/>
+          <p:cNvSpPr>
+            <a:spLocks noGrp="1"/>
+          </p:cNvSpPr>
+          <p:nvPr>
+            <p:ph type="sldNum" sz="quarter" idx="10"/>
+          </p:nvPr>
+        </p:nvSpPr>
+        <p:spPr/>
+        <p:txBody>
+          <a:bodyPr/>
+          <a:lstStyle/>
+          <a:p>
+            <a:fld id="{F7021451-1387-4CA6-816F-3879F97B5CBC}" type="slidenum">
+              <a:rPr lang="en-US"/>
+              <a:t>27</a:t>
+            </a:fld>
+            <a:endParaRPr lang="en-US"/>
+          </a:p>
+        </p:txBody>
+      </p:sp>
+    </p:spTree>
+    <p:extLst>
+      <p:ext uri="{BB962C8B-B14F-4D97-AF65-F5344CB8AC3E}">
+        <p14:creationId xmlns:p14="http://schemas.microsoft.com/office/powerpoint/2010/main" val="1024086991"/>
+      </p:ext>
+    </p:extLst>
+  </p:cSld>
+  <p:clrMapOvr>
+    <a:masterClrMapping/>
+  </p:clrMapOvr>
+</p:notes>
+</file>
+
+<file path=ppt/notesSlides/notesSlide28.xml><?xml version="1.0" encoding="utf-8"?>
+<p:notes xmlns:a="http://schemas.openxmlformats.org/drawingml/2006/main" xmlns:r="http://schemas.openxmlformats.org/officeDocument/2006/relationships" xmlns:p="http://schemas.openxmlformats.org/presentationml/2006/main">
+  <p:cSld>
+    <p:spTree>
+      <p:nvGrpSpPr>
+        <p:cNvPr id="1" name=""/>
+        <p:cNvGrpSpPr/>
+        <p:nvPr/>
+      </p:nvGrpSpPr>
+      <p:grpSpPr>
+        <a:xfrm>
+          <a:off x="0" y="0"/>
+          <a:ext cx="0" cy="0"/>
+          <a:chOff x="0" y="0"/>
+          <a:chExt cx="0" cy="0"/>
+        </a:xfrm>
+      </p:grpSpPr>
+      <p:sp>
+        <p:nvSpPr>
+          <p:cNvPr id="2" name="Slide Image Placeholder 1"/>
+          <p:cNvSpPr>
+            <a:spLocks noGrp="1" noRot="1" noChangeAspect="1"/>
+          </p:cNvSpPr>
+          <p:nvPr>
+            <p:ph type="sldImg"/>
+          </p:nvPr>
+        </p:nvSpPr>
+        <p:spPr/>
+      </p:sp>
+      <p:sp>
+        <p:nvSpPr>
+          <p:cNvPr id="3" name="Notes Placeholder 2"/>
+          <p:cNvSpPr>
+            <a:spLocks noGrp="1"/>
+          </p:cNvSpPr>
+          <p:nvPr>
+            <p:ph type="body" idx="1"/>
+          </p:nvPr>
+        </p:nvSpPr>
+        <p:spPr/>
+        <p:txBody>
+          <a:bodyPr/>
+          <a:lstStyle/>
+          <a:p>
+            <a:r>
+              <a:rPr lang="en-US" dirty="0"/>
+              <a:t>Pattern 24: list-enumeration. 説明責任、比較、証跡、表形式の読みやすさを優先するモード向けテンプレート。
+Slide 28: 箇条書き羅列テンプレート
+report-list-enumeration-visual: 箇条書き羅列 (list-enumeration) report schematic template
+report-list-enumeration-visual long description: 順番のある手順やチェック項目を番号付きで示し、抜け漏れなく追えるようにする図解です。 説明責任、比較、証跡、表形式の読みやすさを優先するモード向けテンプレート。</a:t>
+            </a:r>
+            <a:endParaRPr lang="en-US" dirty="0"/>
+          </a:p>
+        </p:txBody>
+      </p:sp>
+      <p:sp>
+        <p:nvSpPr>
+          <p:cNvPr id="4" name="Slide Number Placeholder 3"/>
+          <p:cNvSpPr>
+            <a:spLocks noGrp="1"/>
+          </p:cNvSpPr>
+          <p:nvPr>
+            <p:ph type="sldNum" sz="quarter" idx="10"/>
+          </p:nvPr>
+        </p:nvSpPr>
+        <p:spPr/>
+        <p:txBody>
+          <a:bodyPr/>
+          <a:lstStyle/>
+          <a:p>
+            <a:fld id="{F7021451-1387-4CA6-816F-3879F97B5CBC}" type="slidenum">
+              <a:rPr lang="en-US"/>
+              <a:t>28</a:t>
+            </a:fld>
+            <a:endParaRPr lang="en-US"/>
+          </a:p>
+        </p:txBody>
+      </p:sp>
+    </p:spTree>
+    <p:extLst>
+      <p:ext uri="{BB962C8B-B14F-4D97-AF65-F5344CB8AC3E}">
+        <p14:creationId xmlns:p14="http://schemas.microsoft.com/office/powerpoint/2010/main" val="1024086991"/>
+      </p:ext>
+    </p:extLst>
+  </p:cSld>
+  <p:clrMapOvr>
+    <a:masterClrMapping/>
+  </p:clrMapOvr>
+</p:notes>
+</file>
+
+<file path=ppt/notesSlides/notesSlide29.xml><?xml version="1.0" encoding="utf-8"?>
+<p:notes xmlns:a="http://schemas.openxmlformats.org/drawingml/2006/main" xmlns:r="http://schemas.openxmlformats.org/officeDocument/2006/relationships" xmlns:p="http://schemas.openxmlformats.org/presentationml/2006/main">
+  <p:cSld>
+    <p:spTree>
+      <p:nvGrpSpPr>
+        <p:cNvPr id="1" name=""/>
+        <p:cNvGrpSpPr/>
+        <p:nvPr/>
+      </p:nvGrpSpPr>
+      <p:grpSpPr>
+        <a:xfrm>
+          <a:off x="0" y="0"/>
+          <a:ext cx="0" cy="0"/>
+          <a:chOff x="0" y="0"/>
+          <a:chExt cx="0" cy="0"/>
+        </a:xfrm>
+      </p:grpSpPr>
+      <p:sp>
+        <p:nvSpPr>
+          <p:cNvPr id="2" name="Slide Image Placeholder 1"/>
+          <p:cNvSpPr>
+            <a:spLocks noGrp="1" noRot="1" noChangeAspect="1"/>
+          </p:cNvSpPr>
+          <p:nvPr>
+            <p:ph type="sldImg"/>
+          </p:nvPr>
+        </p:nvSpPr>
+        <p:spPr/>
+      </p:sp>
+      <p:sp>
+        <p:nvSpPr>
+          <p:cNvPr id="3" name="Notes Placeholder 2"/>
+          <p:cNvSpPr>
+            <a:spLocks noGrp="1"/>
+          </p:cNvSpPr>
+          <p:nvPr>
+            <p:ph type="body" idx="1"/>
+          </p:nvPr>
+        </p:nvSpPr>
+        <p:spPr/>
+        <p:txBody>
+          <a:bodyPr/>
+          <a:lstStyle/>
+          <a:p>
+            <a:r>
+              <a:rPr lang="en-US" dirty="0"/>
+              <a:t>Pattern 25: mockup. 説明責任、比較、証跡、表形式の読みやすさを優先するモード向けテンプレート。
+Slide 29: モックアップテンプレート
+report-mockup-visual: モックアップ (mockup) report schematic template
+report-mockup-visual long description: アプリやポータルの雰囲気を簡潔な画面風カードとして示し、概念を共有しやすくする図解です。 説明責任、比較、証跡、表形式の読みやすさを優先するモード向けテンプレート。</a:t>
+            </a:r>
+            <a:endParaRPr lang="en-US" dirty="0"/>
+          </a:p>
+        </p:txBody>
+      </p:sp>
+      <p:sp>
+        <p:nvSpPr>
+          <p:cNvPr id="4" name="Slide Number Placeholder 3"/>
+          <p:cNvSpPr>
+            <a:spLocks noGrp="1"/>
+          </p:cNvSpPr>
+          <p:nvPr>
+            <p:ph type="sldNum" sz="quarter" idx="10"/>
+          </p:nvPr>
+        </p:nvSpPr>
+        <p:spPr/>
+        <p:txBody>
+          <a:bodyPr/>
+          <a:lstStyle/>
+          <a:p>
+            <a:fld id="{F7021451-1387-4CA6-816F-3879F97B5CBC}" type="slidenum">
+              <a:rPr lang="en-US"/>
+              <a:t>29</a:t>
+            </a:fld>
+            <a:endParaRPr lang="en-US"/>
+          </a:p>
+        </p:txBody>
+      </p:sp>
+    </p:spTree>
+    <p:extLst>
+      <p:ext uri="{BB962C8B-B14F-4D97-AF65-F5344CB8AC3E}">
+        <p14:creationId xmlns:p14="http://schemas.microsoft.com/office/powerpoint/2010/main" val="1024086991"/>
+      </p:ext>
+    </p:extLst>
+  </p:cSld>
+  <p:clrMapOvr>
+    <a:masterClrMapping/>
+  </p:clrMapOvr>
+</p:notes>
+</file>
+
 <file path=ppt/notesSlides/notesSlide3.xml><?xml version="1.0" encoding="utf-8"?>
 <p:notes xmlns:a="http://schemas.openxmlformats.org/drawingml/2006/main" xmlns:r="http://schemas.openxmlformats.org/officeDocument/2006/relationships" xmlns:p="http://schemas.openxmlformats.org/presentationml/2006/main">
   <p:cSld>
@@ -708,6 +2202,96 @@
             <a:fld id="{F7021451-1387-4CA6-816F-3879F97B5CBC}" type="slidenum">
               <a:rPr lang="en-US"/>
               <a:t>3</a:t>
+            </a:fld>
+            <a:endParaRPr lang="en-US"/>
+          </a:p>
+        </p:txBody>
+      </p:sp>
+    </p:spTree>
+    <p:extLst>
+      <p:ext uri="{BB962C8B-B14F-4D97-AF65-F5344CB8AC3E}">
+        <p14:creationId xmlns:p14="http://schemas.microsoft.com/office/powerpoint/2010/main" val="1024086991"/>
+      </p:ext>
+    </p:extLst>
+  </p:cSld>
+  <p:clrMapOvr>
+    <a:masterClrMapping/>
+  </p:clrMapOvr>
+</p:notes>
+</file>
+
+<file path=ppt/notesSlides/notesSlide30.xml><?xml version="1.0" encoding="utf-8"?>
+<p:notes xmlns:a="http://schemas.openxmlformats.org/drawingml/2006/main" xmlns:r="http://schemas.openxmlformats.org/officeDocument/2006/relationships" xmlns:p="http://schemas.openxmlformats.org/presentationml/2006/main">
+  <p:cSld>
+    <p:spTree>
+      <p:nvGrpSpPr>
+        <p:cNvPr id="1" name=""/>
+        <p:cNvGrpSpPr/>
+        <p:nvPr/>
+      </p:nvGrpSpPr>
+      <p:grpSpPr>
+        <a:xfrm>
+          <a:off x="0" y="0"/>
+          <a:ext cx="0" cy="0"/>
+          <a:chOff x="0" y="0"/>
+          <a:chExt cx="0" cy="0"/>
+        </a:xfrm>
+      </p:grpSpPr>
+      <p:sp>
+        <p:nvSpPr>
+          <p:cNvPr id="2" name="Slide Image Placeholder 1"/>
+          <p:cNvSpPr>
+            <a:spLocks noGrp="1" noRot="1" noChangeAspect="1"/>
+          </p:cNvSpPr>
+          <p:nvPr>
+            <p:ph type="sldImg"/>
+          </p:nvPr>
+        </p:nvSpPr>
+        <p:spPr/>
+      </p:sp>
+      <p:sp>
+        <p:nvSpPr>
+          <p:cNvPr id="3" name="Notes Placeholder 2"/>
+          <p:cNvSpPr>
+            <a:spLocks noGrp="1"/>
+          </p:cNvSpPr>
+          <p:nvPr>
+            <p:ph type="body" idx="1"/>
+          </p:nvPr>
+        </p:nvSpPr>
+        <p:spPr/>
+        <p:txBody>
+          <a:bodyPr/>
+          <a:lstStyle/>
+          <a:p>
+            <a:r>
+              <a:rPr lang="en-US" dirty="0"/>
+              <a:t>Source URLs and attribution:
+1. Slideland schematic and taste references | URL: https://www.slideland.tech/docs/schematic | Notes: Layouts are inspired by common schematic categories, not copied from source visuals.
+Slide 30: 参考URL・出典</a:t>
+            </a:r>
+            <a:endParaRPr lang="en-US" dirty="0"/>
+          </a:p>
+        </p:txBody>
+      </p:sp>
+      <p:sp>
+        <p:nvSpPr>
+          <p:cNvPr id="4" name="Slide Number Placeholder 3"/>
+          <p:cNvSpPr>
+            <a:spLocks noGrp="1"/>
+          </p:cNvSpPr>
+          <p:nvPr>
+            <p:ph type="sldNum" sz="quarter" idx="10"/>
+          </p:nvPr>
+        </p:nvSpPr>
+        <p:spPr/>
+        <p:txBody>
+          <a:bodyPr/>
+          <a:lstStyle/>
+          <a:p>
+            <a:fld id="{F7021451-1387-4CA6-816F-3879F97B5CBC}" type="slidenum">
+              <a:rPr lang="en-US"/>
+              <a:t>30</a:t>
             </a:fld>
             <a:endParaRPr lang="en-US"/>
           </a:p>
@@ -797,6 +2381,461 @@
             <a:fld id="{F7021451-1387-4CA6-816F-3879F97B5CBC}" type="slidenum">
               <a:rPr lang="en-US"/>
               <a:t>4</a:t>
+            </a:fld>
+            <a:endParaRPr lang="en-US"/>
+          </a:p>
+        </p:txBody>
+      </p:sp>
+    </p:spTree>
+    <p:extLst>
+      <p:ext uri="{BB962C8B-B14F-4D97-AF65-F5344CB8AC3E}">
+        <p14:creationId xmlns:p14="http://schemas.microsoft.com/office/powerpoint/2010/main" val="1024086991"/>
+      </p:ext>
+    </p:extLst>
+  </p:cSld>
+  <p:clrMapOvr>
+    <a:masterClrMapping/>
+  </p:clrMapOvr>
+</p:notes>
+</file>
+
+<file path=ppt/notesSlides/notesSlide5.xml><?xml version="1.0" encoding="utf-8"?>
+<p:notes xmlns:a="http://schemas.openxmlformats.org/drawingml/2006/main" xmlns:r="http://schemas.openxmlformats.org/officeDocument/2006/relationships" xmlns:p="http://schemas.openxmlformats.org/presentationml/2006/main">
+  <p:cSld>
+    <p:spTree>
+      <p:nvGrpSpPr>
+        <p:cNvPr id="1" name=""/>
+        <p:cNvGrpSpPr/>
+        <p:nvPr/>
+      </p:nvGrpSpPr>
+      <p:grpSpPr>
+        <a:xfrm>
+          <a:off x="0" y="0"/>
+          <a:ext cx="0" cy="0"/>
+          <a:chOff x="0" y="0"/>
+          <a:chExt cx="0" cy="0"/>
+        </a:xfrm>
+      </p:grpSpPr>
+      <p:sp>
+        <p:nvSpPr>
+          <p:cNvPr id="2" name="Slide Image Placeholder 1"/>
+          <p:cNvSpPr>
+            <a:spLocks noGrp="1" noRot="1" noChangeAspect="1"/>
+          </p:cNvSpPr>
+          <p:nvPr>
+            <p:ph type="sldImg"/>
+          </p:nvPr>
+        </p:nvSpPr>
+        <p:spPr/>
+      </p:sp>
+      <p:sp>
+        <p:nvSpPr>
+          <p:cNvPr id="3" name="Notes Placeholder 2"/>
+          <p:cNvSpPr>
+            <a:spLocks noGrp="1"/>
+          </p:cNvSpPr>
+          <p:nvPr>
+            <p:ph type="body" idx="1"/>
+          </p:nvPr>
+        </p:nvSpPr>
+        <p:spPr/>
+        <p:txBody>
+          <a:bodyPr/>
+          <a:lstStyle/>
+          <a:p>
+            <a:r>
+              <a:rPr lang="en-US" dirty="0"/>
+              <a:t>Pattern 1: table. 説明責任、比較、証跡、表形式の読みやすさを優先するモード向けテンプレート。
+Slide 5: 表テンプレート
+report-table-visual: 表 (table) report schematic template
+report-table-visual long description: 主要な観点と確認事項を二列で整理し、論点の抜け漏れを減らす表形式の図解です。 説明責任、比較、証跡、表形式の読みやすさを優先するモード向けテンプレート。</a:t>
+            </a:r>
+            <a:endParaRPr lang="en-US" dirty="0"/>
+          </a:p>
+        </p:txBody>
+      </p:sp>
+      <p:sp>
+        <p:nvSpPr>
+          <p:cNvPr id="4" name="Slide Number Placeholder 3"/>
+          <p:cNvSpPr>
+            <a:spLocks noGrp="1"/>
+          </p:cNvSpPr>
+          <p:nvPr>
+            <p:ph type="sldNum" sz="quarter" idx="10"/>
+          </p:nvPr>
+        </p:nvSpPr>
+        <p:spPr/>
+        <p:txBody>
+          <a:bodyPr/>
+          <a:lstStyle/>
+          <a:p>
+            <a:fld id="{F7021451-1387-4CA6-816F-3879F97B5CBC}" type="slidenum">
+              <a:rPr lang="en-US"/>
+              <a:t>5</a:t>
+            </a:fld>
+            <a:endParaRPr lang="en-US"/>
+          </a:p>
+        </p:txBody>
+      </p:sp>
+    </p:spTree>
+    <p:extLst>
+      <p:ext uri="{BB962C8B-B14F-4D97-AF65-F5344CB8AC3E}">
+        <p14:creationId xmlns:p14="http://schemas.microsoft.com/office/powerpoint/2010/main" val="1024086991"/>
+      </p:ext>
+    </p:extLst>
+  </p:cSld>
+  <p:clrMapOvr>
+    <a:masterClrMapping/>
+  </p:clrMapOvr>
+</p:notes>
+</file>
+
+<file path=ppt/notesSlides/notesSlide6.xml><?xml version="1.0" encoding="utf-8"?>
+<p:notes xmlns:a="http://schemas.openxmlformats.org/drawingml/2006/main" xmlns:r="http://schemas.openxmlformats.org/officeDocument/2006/relationships" xmlns:p="http://schemas.openxmlformats.org/presentationml/2006/main">
+  <p:cSld>
+    <p:spTree>
+      <p:nvGrpSpPr>
+        <p:cNvPr id="1" name=""/>
+        <p:cNvGrpSpPr/>
+        <p:nvPr/>
+      </p:nvGrpSpPr>
+      <p:grpSpPr>
+        <a:xfrm>
+          <a:off x="0" y="0"/>
+          <a:ext cx="0" cy="0"/>
+          <a:chOff x="0" y="0"/>
+          <a:chExt cx="0" cy="0"/>
+        </a:xfrm>
+      </p:grpSpPr>
+      <p:sp>
+        <p:nvSpPr>
+          <p:cNvPr id="2" name="Slide Image Placeholder 1"/>
+          <p:cNvSpPr>
+            <a:spLocks noGrp="1" noRot="1" noChangeAspect="1"/>
+          </p:cNvSpPr>
+          <p:nvPr>
+            <p:ph type="sldImg"/>
+          </p:nvPr>
+        </p:nvSpPr>
+        <p:spPr/>
+      </p:sp>
+      <p:sp>
+        <p:nvSpPr>
+          <p:cNvPr id="3" name="Notes Placeholder 2"/>
+          <p:cNvSpPr>
+            <a:spLocks noGrp="1"/>
+          </p:cNvSpPr>
+          <p:nvPr>
+            <p:ph type="body" idx="1"/>
+          </p:nvPr>
+        </p:nvSpPr>
+        <p:spPr/>
+        <p:txBody>
+          <a:bodyPr/>
+          <a:lstStyle/>
+          <a:p>
+            <a:r>
+              <a:rPr lang="en-US" dirty="0"/>
+              <a:t>Pattern 2: tree. 説明責任、比較、証跡、表形式の読みやすさを優先するモード向けテンプレート。
+Slide 6: ツリーテンプレート
+report-tree-visual: ツリー (tree) report schematic template
+report-tree-visual long description: 中心テーマから構成要素へ枝分かれさせ、複雑な情報を上位下位の関係で理解しやすくする図解です。 説明責任、比較、証跡、表形式の読みやすさを優先するモード向けテンプレート。</a:t>
+            </a:r>
+            <a:endParaRPr lang="en-US" dirty="0"/>
+          </a:p>
+        </p:txBody>
+      </p:sp>
+      <p:sp>
+        <p:nvSpPr>
+          <p:cNvPr id="4" name="Slide Number Placeholder 3"/>
+          <p:cNvSpPr>
+            <a:spLocks noGrp="1"/>
+          </p:cNvSpPr>
+          <p:nvPr>
+            <p:ph type="sldNum" sz="quarter" idx="10"/>
+          </p:nvPr>
+        </p:nvSpPr>
+        <p:spPr/>
+        <p:txBody>
+          <a:bodyPr/>
+          <a:lstStyle/>
+          <a:p>
+            <a:fld id="{F7021451-1387-4CA6-816F-3879F97B5CBC}" type="slidenum">
+              <a:rPr lang="en-US"/>
+              <a:t>6</a:t>
+            </a:fld>
+            <a:endParaRPr lang="en-US"/>
+          </a:p>
+        </p:txBody>
+      </p:sp>
+    </p:spTree>
+    <p:extLst>
+      <p:ext uri="{BB962C8B-B14F-4D97-AF65-F5344CB8AC3E}">
+        <p14:creationId xmlns:p14="http://schemas.microsoft.com/office/powerpoint/2010/main" val="1024086991"/>
+      </p:ext>
+    </p:extLst>
+  </p:cSld>
+  <p:clrMapOvr>
+    <a:masterClrMapping/>
+  </p:clrMapOvr>
+</p:notes>
+</file>
+
+<file path=ppt/notesSlides/notesSlide7.xml><?xml version="1.0" encoding="utf-8"?>
+<p:notes xmlns:a="http://schemas.openxmlformats.org/drawingml/2006/main" xmlns:r="http://schemas.openxmlformats.org/officeDocument/2006/relationships" xmlns:p="http://schemas.openxmlformats.org/presentationml/2006/main">
+  <p:cSld>
+    <p:spTree>
+      <p:nvGrpSpPr>
+        <p:cNvPr id="1" name=""/>
+        <p:cNvGrpSpPr/>
+        <p:nvPr/>
+      </p:nvGrpSpPr>
+      <p:grpSpPr>
+        <a:xfrm>
+          <a:off x="0" y="0"/>
+          <a:ext cx="0" cy="0"/>
+          <a:chOff x="0" y="0"/>
+          <a:chExt cx="0" cy="0"/>
+        </a:xfrm>
+      </p:grpSpPr>
+      <p:sp>
+        <p:nvSpPr>
+          <p:cNvPr id="2" name="Slide Image Placeholder 1"/>
+          <p:cNvSpPr>
+            <a:spLocks noGrp="1" noRot="1" noChangeAspect="1"/>
+          </p:cNvSpPr>
+          <p:nvPr>
+            <p:ph type="sldImg"/>
+          </p:nvPr>
+        </p:nvSpPr>
+        <p:spPr/>
+      </p:sp>
+      <p:sp>
+        <p:nvSpPr>
+          <p:cNvPr id="3" name="Notes Placeholder 2"/>
+          <p:cNvSpPr>
+            <a:spLocks noGrp="1"/>
+          </p:cNvSpPr>
+          <p:nvPr>
+            <p:ph type="body" idx="1"/>
+          </p:nvPr>
+        </p:nvSpPr>
+        <p:spPr/>
+        <p:txBody>
+          <a:bodyPr/>
+          <a:lstStyle/>
+          <a:p>
+            <a:r>
+              <a:rPr lang="en-US" dirty="0"/>
+              <a:t>Pattern 3: flow. 説明責任、比較、証跡、表形式の読みやすさを優先するモード向けテンプレート。
+Slide 7: 横フローテンプレート
+report-flow-visual: 横フロー (flow) report schematic template
+report-flow-visual long description: 左から右へ進む作業や判断の流れを短いステップで示し、次の行動を迷わせない図解です。 説明責任、比較、証跡、表形式の読みやすさを優先するモード向けテンプレート。</a:t>
+            </a:r>
+            <a:endParaRPr lang="en-US" dirty="0"/>
+          </a:p>
+        </p:txBody>
+      </p:sp>
+      <p:sp>
+        <p:nvSpPr>
+          <p:cNvPr id="4" name="Slide Number Placeholder 3"/>
+          <p:cNvSpPr>
+            <a:spLocks noGrp="1"/>
+          </p:cNvSpPr>
+          <p:nvPr>
+            <p:ph type="sldNum" sz="quarter" idx="10"/>
+          </p:nvPr>
+        </p:nvSpPr>
+        <p:spPr/>
+        <p:txBody>
+          <a:bodyPr/>
+          <a:lstStyle/>
+          <a:p>
+            <a:fld id="{F7021451-1387-4CA6-816F-3879F97B5CBC}" type="slidenum">
+              <a:rPr lang="en-US"/>
+              <a:t>7</a:t>
+            </a:fld>
+            <a:endParaRPr lang="en-US"/>
+          </a:p>
+        </p:txBody>
+      </p:sp>
+    </p:spTree>
+    <p:extLst>
+      <p:ext uri="{BB962C8B-B14F-4D97-AF65-F5344CB8AC3E}">
+        <p14:creationId xmlns:p14="http://schemas.microsoft.com/office/powerpoint/2010/main" val="1024086991"/>
+      </p:ext>
+    </p:extLst>
+  </p:cSld>
+  <p:clrMapOvr>
+    <a:masterClrMapping/>
+  </p:clrMapOvr>
+</p:notes>
+</file>
+
+<file path=ppt/notesSlides/notesSlide8.xml><?xml version="1.0" encoding="utf-8"?>
+<p:notes xmlns:a="http://schemas.openxmlformats.org/drawingml/2006/main" xmlns:r="http://schemas.openxmlformats.org/officeDocument/2006/relationships" xmlns:p="http://schemas.openxmlformats.org/presentationml/2006/main">
+  <p:cSld>
+    <p:spTree>
+      <p:nvGrpSpPr>
+        <p:cNvPr id="1" name=""/>
+        <p:cNvGrpSpPr/>
+        <p:nvPr/>
+      </p:nvGrpSpPr>
+      <p:grpSpPr>
+        <a:xfrm>
+          <a:off x="0" y="0"/>
+          <a:ext cx="0" cy="0"/>
+          <a:chOff x="0" y="0"/>
+          <a:chExt cx="0" cy="0"/>
+        </a:xfrm>
+      </p:grpSpPr>
+      <p:sp>
+        <p:nvSpPr>
+          <p:cNvPr id="2" name="Slide Image Placeholder 1"/>
+          <p:cNvSpPr>
+            <a:spLocks noGrp="1" noRot="1" noChangeAspect="1"/>
+          </p:cNvSpPr>
+          <p:nvPr>
+            <p:ph type="sldImg"/>
+          </p:nvPr>
+        </p:nvSpPr>
+        <p:spPr/>
+      </p:sp>
+      <p:sp>
+        <p:nvSpPr>
+          <p:cNvPr id="3" name="Notes Placeholder 2"/>
+          <p:cNvSpPr>
+            <a:spLocks noGrp="1"/>
+          </p:cNvSpPr>
+          <p:nvPr>
+            <p:ph type="body" idx="1"/>
+          </p:nvPr>
+        </p:nvSpPr>
+        <p:spPr/>
+        <p:txBody>
+          <a:bodyPr/>
+          <a:lstStyle/>
+          <a:p>
+            <a:r>
+              <a:rPr lang="en-US" dirty="0"/>
+              <a:t>Pattern 4: vertical-flow. 説明責任、比較、証跡、表形式の読みやすさを優先するモード向けテンプレート。
+Slide 8: 縦フローテンプレート
+report-vertical-flow-visual: 縦フロー (vertical-flow) report schematic template
+report-vertical-flow-visual long description: 上から下へ流れる手順、承認、エスカレーションを、読み順どおりに追える図解です。 説明責任、比較、証跡、表形式の読みやすさを優先するモード向けテンプレート。</a:t>
+            </a:r>
+            <a:endParaRPr lang="en-US" dirty="0"/>
+          </a:p>
+        </p:txBody>
+      </p:sp>
+      <p:sp>
+        <p:nvSpPr>
+          <p:cNvPr id="4" name="Slide Number Placeholder 3"/>
+          <p:cNvSpPr>
+            <a:spLocks noGrp="1"/>
+          </p:cNvSpPr>
+          <p:nvPr>
+            <p:ph type="sldNum" sz="quarter" idx="10"/>
+          </p:nvPr>
+        </p:nvSpPr>
+        <p:spPr/>
+        <p:txBody>
+          <a:bodyPr/>
+          <a:lstStyle/>
+          <a:p>
+            <a:fld id="{F7021451-1387-4CA6-816F-3879F97B5CBC}" type="slidenum">
+              <a:rPr lang="en-US"/>
+              <a:t>8</a:t>
+            </a:fld>
+            <a:endParaRPr lang="en-US"/>
+          </a:p>
+        </p:txBody>
+      </p:sp>
+    </p:spTree>
+    <p:extLst>
+      <p:ext uri="{BB962C8B-B14F-4D97-AF65-F5344CB8AC3E}">
+        <p14:creationId xmlns:p14="http://schemas.microsoft.com/office/powerpoint/2010/main" val="1024086991"/>
+      </p:ext>
+    </p:extLst>
+  </p:cSld>
+  <p:clrMapOvr>
+    <a:masterClrMapping/>
+  </p:clrMapOvr>
+</p:notes>
+</file>
+
+<file path=ppt/notesSlides/notesSlide9.xml><?xml version="1.0" encoding="utf-8"?>
+<p:notes xmlns:a="http://schemas.openxmlformats.org/drawingml/2006/main" xmlns:r="http://schemas.openxmlformats.org/officeDocument/2006/relationships" xmlns:p="http://schemas.openxmlformats.org/presentationml/2006/main">
+  <p:cSld>
+    <p:spTree>
+      <p:nvGrpSpPr>
+        <p:cNvPr id="1" name=""/>
+        <p:cNvGrpSpPr/>
+        <p:nvPr/>
+      </p:nvGrpSpPr>
+      <p:grpSpPr>
+        <a:xfrm>
+          <a:off x="0" y="0"/>
+          <a:ext cx="0" cy="0"/>
+          <a:chOff x="0" y="0"/>
+          <a:chExt cx="0" cy="0"/>
+        </a:xfrm>
+      </p:grpSpPr>
+      <p:sp>
+        <p:nvSpPr>
+          <p:cNvPr id="2" name="Slide Image Placeholder 1"/>
+          <p:cNvSpPr>
+            <a:spLocks noGrp="1" noRot="1" noChangeAspect="1"/>
+          </p:cNvSpPr>
+          <p:nvPr>
+            <p:ph type="sldImg"/>
+          </p:nvPr>
+        </p:nvSpPr>
+        <p:spPr/>
+      </p:sp>
+      <p:sp>
+        <p:nvSpPr>
+          <p:cNvPr id="3" name="Notes Placeholder 2"/>
+          <p:cNvSpPr>
+            <a:spLocks noGrp="1"/>
+          </p:cNvSpPr>
+          <p:nvPr>
+            <p:ph type="body" idx="1"/>
+          </p:nvPr>
+        </p:nvSpPr>
+        <p:spPr/>
+        <p:txBody>
+          <a:bodyPr/>
+          <a:lstStyle/>
+          <a:p>
+            <a:r>
+              <a:rPr lang="en-US" dirty="0"/>
+              <a:t>Pattern 5: cycle. 説明責任、比較、証跡、表形式の読みやすさを優先するモード向けテンプレート。
+Slide 9: サイクルテンプレート
+report-cycle-visual: サイクル (cycle) report schematic template
+report-cycle-visual long description: 繰り返し発生する活動を循環として示し、単発ではなく継続的に改善する関係を伝える図解です。 説明責任、比較、証跡、表形式の読みやすさを優先するモード向けテンプレート。</a:t>
+            </a:r>
+            <a:endParaRPr lang="en-US" dirty="0"/>
+          </a:p>
+        </p:txBody>
+      </p:sp>
+      <p:sp>
+        <p:nvSpPr>
+          <p:cNvPr id="4" name="Slide Number Placeholder 3"/>
+          <p:cNvSpPr>
+            <a:spLocks noGrp="1"/>
+          </p:cNvSpPr>
+          <p:nvPr>
+            <p:ph type="sldNum" sz="quarter" idx="10"/>
+          </p:nvPr>
+        </p:nvSpPr>
+        <p:spPr/>
+        <p:txBody>
+          <a:bodyPr/>
+          <a:lstStyle/>
+          <a:p>
+            <a:fld id="{F7021451-1387-4CA6-816F-3879F97B5CBC}" type="slidenum">
+              <a:rPr lang="en-US"/>
+              <a:t>9</a:t>
             </a:fld>
             <a:endParaRPr lang="en-US"/>
           </a:p>
@@ -1592,6 +3631,566 @@
 </p:sld>
 </file>
 
+<file path=ppt/slides/slide10.xml><?xml version="1.0" encoding="utf-8"?>
+<p:sld xmlns:a="http://schemas.openxmlformats.org/drawingml/2006/main" xmlns:r="http://schemas.openxmlformats.org/officeDocument/2006/relationships" xmlns:p="http://schemas.openxmlformats.org/presentationml/2006/main">
+  <p:cSld name="Slide 10">
+    <p:bg>
+      <p:bgPr>
+        <a:solidFill>
+          <a:srgbClr val="FBFAF7"/>
+        </a:solidFill>
+      </p:bgPr>
+    </p:bg>
+    <p:spTree>
+      <p:nvGrpSpPr>
+        <p:cNvPr id="1" name=""/>
+        <p:cNvGrpSpPr/>
+        <p:nvPr/>
+      </p:nvGrpSpPr>
+      <p:grpSpPr>
+        <a:xfrm>
+          <a:off x="0" y="0"/>
+          <a:ext cx="0" cy="0"/>
+          <a:chOff x="0" y="0"/>
+          <a:chExt cx="0" cy="0"/>
+        </a:xfrm>
+      </p:grpSpPr>
+      <p:pic>
+        <p:nvPicPr>
+          <p:cNvPr id="2" name="Image 0" descr="前後比較 (before-after) report schematic template">    </p:cNvPr>
+          <p:cNvPicPr>
+            <a:picLocks noChangeAspect="1"/>
+          </p:cNvPicPr>
+          <p:nvPr/>
+        </p:nvPicPr>
+        <p:blipFill>
+          <a:blip r:embed="rId1"/>
+          <a:stretch>
+            <a:fillRect/>
+          </a:stretch>
+        </p:blipFill>
+        <p:spPr>
+          <a:xfrm>
+            <a:off x="0" y="0"/>
+            <a:ext cx="12191695" cy="6858000"/>
+          </a:xfrm>
+          <a:prstGeom prst="rect">
+            <a:avLst/>
+          </a:prstGeom>
+        </p:spPr>
+      </p:pic>
+    </p:spTree>
+  </p:cSld>
+  <p:clrMapOvr>
+    <a:masterClrMapping/>
+  </p:clrMapOvr>
+</p:sld>
+</file>
+
+<file path=ppt/slides/slide11.xml><?xml version="1.0" encoding="utf-8"?>
+<p:sld xmlns:a="http://schemas.openxmlformats.org/drawingml/2006/main" xmlns:r="http://schemas.openxmlformats.org/officeDocument/2006/relationships" xmlns:p="http://schemas.openxmlformats.org/presentationml/2006/main">
+  <p:cSld name="Slide 11">
+    <p:bg>
+      <p:bgPr>
+        <a:solidFill>
+          <a:srgbClr val="FBFAF7"/>
+        </a:solidFill>
+      </p:bgPr>
+    </p:bg>
+    <p:spTree>
+      <p:nvGrpSpPr>
+        <p:cNvPr id="1" name=""/>
+        <p:cNvGrpSpPr/>
+        <p:nvPr/>
+      </p:nvGrpSpPr>
+      <p:grpSpPr>
+        <a:xfrm>
+          <a:off x="0" y="0"/>
+          <a:ext cx="0" cy="0"/>
+          <a:chOff x="0" y="0"/>
+          <a:chExt cx="0" cy="0"/>
+        </a:xfrm>
+      </p:grpSpPr>
+      <p:pic>
+        <p:nvPicPr>
+          <p:cNvPr id="2" name="Image 0" descr="マップ (map) report schematic template">    </p:cNvPr>
+          <p:cNvPicPr>
+            <a:picLocks noChangeAspect="1"/>
+          </p:cNvPicPr>
+          <p:nvPr/>
+        </p:nvPicPr>
+        <p:blipFill>
+          <a:blip r:embed="rId1"/>
+          <a:stretch>
+            <a:fillRect/>
+          </a:stretch>
+        </p:blipFill>
+        <p:spPr>
+          <a:xfrm>
+            <a:off x="0" y="0"/>
+            <a:ext cx="12191695" cy="6858000"/>
+          </a:xfrm>
+          <a:prstGeom prst="rect">
+            <a:avLst/>
+          </a:prstGeom>
+        </p:spPr>
+      </p:pic>
+    </p:spTree>
+  </p:cSld>
+  <p:clrMapOvr>
+    <a:masterClrMapping/>
+  </p:clrMapOvr>
+</p:sld>
+</file>
+
+<file path=ppt/slides/slide12.xml><?xml version="1.0" encoding="utf-8"?>
+<p:sld xmlns:a="http://schemas.openxmlformats.org/drawingml/2006/main" xmlns:r="http://schemas.openxmlformats.org/officeDocument/2006/relationships" xmlns:p="http://schemas.openxmlformats.org/presentationml/2006/main">
+  <p:cSld name="Slide 12">
+    <p:bg>
+      <p:bgPr>
+        <a:solidFill>
+          <a:srgbClr val="FBFAF7"/>
+        </a:solidFill>
+      </p:bgPr>
+    </p:bg>
+    <p:spTree>
+      <p:nvGrpSpPr>
+        <p:cNvPr id="1" name=""/>
+        <p:cNvGrpSpPr/>
+        <p:nvPr/>
+      </p:nvGrpSpPr>
+      <p:grpSpPr>
+        <a:xfrm>
+          <a:off x="0" y="0"/>
+          <a:ext cx="0" cy="0"/>
+          <a:chOff x="0" y="0"/>
+          <a:chExt cx="0" cy="0"/>
+        </a:xfrm>
+      </p:grpSpPr>
+      <p:pic>
+        <p:nvPicPr>
+          <p:cNvPr id="2" name="Image 0" descr="パズル/ハニカム (puzzle) report schematic template">    </p:cNvPr>
+          <p:cNvPicPr>
+            <a:picLocks noChangeAspect="1"/>
+          </p:cNvPicPr>
+          <p:nvPr/>
+        </p:nvPicPr>
+        <p:blipFill>
+          <a:blip r:embed="rId1"/>
+          <a:stretch>
+            <a:fillRect/>
+          </a:stretch>
+        </p:blipFill>
+        <p:spPr>
+          <a:xfrm>
+            <a:off x="0" y="0"/>
+            <a:ext cx="12191695" cy="6858000"/>
+          </a:xfrm>
+          <a:prstGeom prst="rect">
+            <a:avLst/>
+          </a:prstGeom>
+        </p:spPr>
+      </p:pic>
+    </p:spTree>
+  </p:cSld>
+  <p:clrMapOvr>
+    <a:masterClrMapping/>
+  </p:clrMapOvr>
+</p:sld>
+</file>
+
+<file path=ppt/slides/slide13.xml><?xml version="1.0" encoding="utf-8"?>
+<p:sld xmlns:a="http://schemas.openxmlformats.org/drawingml/2006/main" xmlns:r="http://schemas.openxmlformats.org/officeDocument/2006/relationships" xmlns:p="http://schemas.openxmlformats.org/presentationml/2006/main">
+  <p:cSld name="Slide 13">
+    <p:bg>
+      <p:bgPr>
+        <a:solidFill>
+          <a:srgbClr val="FBFAF7"/>
+        </a:solidFill>
+      </p:bgPr>
+    </p:bg>
+    <p:spTree>
+      <p:nvGrpSpPr>
+        <p:cNvPr id="1" name=""/>
+        <p:cNvGrpSpPr/>
+        <p:nvPr/>
+      </p:nvGrpSpPr>
+      <p:grpSpPr>
+        <a:xfrm>
+          <a:off x="0" y="0"/>
+          <a:ext cx="0" cy="0"/>
+          <a:chOff x="0" y="0"/>
+          <a:chExt cx="0" cy="0"/>
+        </a:xfrm>
+      </p:grpSpPr>
+      <p:pic>
+        <p:nvPicPr>
+          <p:cNvPr id="2" name="Image 0" descr="相関図/概念図 (correlation) report schematic template">    </p:cNvPr>
+          <p:cNvPicPr>
+            <a:picLocks noChangeAspect="1"/>
+          </p:cNvPicPr>
+          <p:nvPr/>
+        </p:nvPicPr>
+        <p:blipFill>
+          <a:blip r:embed="rId1"/>
+          <a:stretch>
+            <a:fillRect/>
+          </a:stretch>
+        </p:blipFill>
+        <p:spPr>
+          <a:xfrm>
+            <a:off x="0" y="0"/>
+            <a:ext cx="12191695" cy="6858000"/>
+          </a:xfrm>
+          <a:prstGeom prst="rect">
+            <a:avLst/>
+          </a:prstGeom>
+        </p:spPr>
+      </p:pic>
+    </p:spTree>
+  </p:cSld>
+  <p:clrMapOvr>
+    <a:masterClrMapping/>
+  </p:clrMapOvr>
+</p:sld>
+</file>
+
+<file path=ppt/slides/slide14.xml><?xml version="1.0" encoding="utf-8"?>
+<p:sld xmlns:a="http://schemas.openxmlformats.org/drawingml/2006/main" xmlns:r="http://schemas.openxmlformats.org/officeDocument/2006/relationships" xmlns:p="http://schemas.openxmlformats.org/presentationml/2006/main">
+  <p:cSld name="Slide 14">
+    <p:bg>
+      <p:bgPr>
+        <a:solidFill>
+          <a:srgbClr val="FBFAF7"/>
+        </a:solidFill>
+      </p:bgPr>
+    </p:bg>
+    <p:spTree>
+      <p:nvGrpSpPr>
+        <p:cNvPr id="1" name=""/>
+        <p:cNvGrpSpPr/>
+        <p:nvPr/>
+      </p:nvGrpSpPr>
+      <p:grpSpPr>
+        <a:xfrm>
+          <a:off x="0" y="0"/>
+          <a:ext cx="0" cy="0"/>
+          <a:chOff x="0" y="0"/>
+          <a:chExt cx="0" cy="0"/>
+        </a:xfrm>
+      </p:grpSpPr>
+      <p:pic>
+        <p:nvPicPr>
+          <p:cNvPr id="2" name="Image 0" descr="マトリクス (matrix) report schematic template">    </p:cNvPr>
+          <p:cNvPicPr>
+            <a:picLocks noChangeAspect="1"/>
+          </p:cNvPicPr>
+          <p:nvPr/>
+        </p:nvPicPr>
+        <p:blipFill>
+          <a:blip r:embed="rId1"/>
+          <a:stretch>
+            <a:fillRect/>
+          </a:stretch>
+        </p:blipFill>
+        <p:spPr>
+          <a:xfrm>
+            <a:off x="0" y="0"/>
+            <a:ext cx="12191695" cy="6858000"/>
+          </a:xfrm>
+          <a:prstGeom prst="rect">
+            <a:avLst/>
+          </a:prstGeom>
+        </p:spPr>
+      </p:pic>
+    </p:spTree>
+  </p:cSld>
+  <p:clrMapOvr>
+    <a:masterClrMapping/>
+  </p:clrMapOvr>
+</p:sld>
+</file>
+
+<file path=ppt/slides/slide15.xml><?xml version="1.0" encoding="utf-8"?>
+<p:sld xmlns:a="http://schemas.openxmlformats.org/drawingml/2006/main" xmlns:r="http://schemas.openxmlformats.org/officeDocument/2006/relationships" xmlns:p="http://schemas.openxmlformats.org/presentationml/2006/main">
+  <p:cSld name="Slide 15">
+    <p:bg>
+      <p:bgPr>
+        <a:solidFill>
+          <a:srgbClr val="FBFAF7"/>
+        </a:solidFill>
+      </p:bgPr>
+    </p:bg>
+    <p:spTree>
+      <p:nvGrpSpPr>
+        <p:cNvPr id="1" name=""/>
+        <p:cNvGrpSpPr/>
+        <p:nvPr/>
+      </p:nvGrpSpPr>
+      <p:grpSpPr>
+        <a:xfrm>
+          <a:off x="0" y="0"/>
+          <a:ext cx="0" cy="0"/>
+          <a:chOff x="0" y="0"/>
+          <a:chExt cx="0" cy="0"/>
+        </a:xfrm>
+      </p:grpSpPr>
+      <p:pic>
+        <p:nvPicPr>
+          <p:cNvPr id="2" name="Image 0" descr="ベン図 (venn) report schematic template">    </p:cNvPr>
+          <p:cNvPicPr>
+            <a:picLocks noChangeAspect="1"/>
+          </p:cNvPicPr>
+          <p:nvPr/>
+        </p:nvPicPr>
+        <p:blipFill>
+          <a:blip r:embed="rId1"/>
+          <a:stretch>
+            <a:fillRect/>
+          </a:stretch>
+        </p:blipFill>
+        <p:spPr>
+          <a:xfrm>
+            <a:off x="0" y="0"/>
+            <a:ext cx="12191695" cy="6858000"/>
+          </a:xfrm>
+          <a:prstGeom prst="rect">
+            <a:avLst/>
+          </a:prstGeom>
+        </p:spPr>
+      </p:pic>
+    </p:spTree>
+  </p:cSld>
+  <p:clrMapOvr>
+    <a:masterClrMapping/>
+  </p:clrMapOvr>
+</p:sld>
+</file>
+
+<file path=ppt/slides/slide16.xml><?xml version="1.0" encoding="utf-8"?>
+<p:sld xmlns:a="http://schemas.openxmlformats.org/drawingml/2006/main" xmlns:r="http://schemas.openxmlformats.org/officeDocument/2006/relationships" xmlns:p="http://schemas.openxmlformats.org/presentationml/2006/main">
+  <p:cSld name="Slide 16">
+    <p:bg>
+      <p:bgPr>
+        <a:solidFill>
+          <a:srgbClr val="FBFAF7"/>
+        </a:solidFill>
+      </p:bgPr>
+    </p:bg>
+    <p:spTree>
+      <p:nvGrpSpPr>
+        <p:cNvPr id="1" name=""/>
+        <p:cNvGrpSpPr/>
+        <p:nvPr/>
+      </p:nvGrpSpPr>
+      <p:grpSpPr>
+        <a:xfrm>
+          <a:off x="0" y="0"/>
+          <a:ext cx="0" cy="0"/>
+          <a:chOff x="0" y="0"/>
+          <a:chExt cx="0" cy="0"/>
+        </a:xfrm>
+      </p:grpSpPr>
+      <p:pic>
+        <p:nvPicPr>
+          <p:cNvPr id="2" name="Image 0" descr="数式 (cross) report schematic template">    </p:cNvPr>
+          <p:cNvPicPr>
+            <a:picLocks noChangeAspect="1"/>
+          </p:cNvPicPr>
+          <p:nvPr/>
+        </p:nvPicPr>
+        <p:blipFill>
+          <a:blip r:embed="rId1"/>
+          <a:stretch>
+            <a:fillRect/>
+          </a:stretch>
+        </p:blipFill>
+        <p:spPr>
+          <a:xfrm>
+            <a:off x="0" y="0"/>
+            <a:ext cx="12191695" cy="6858000"/>
+          </a:xfrm>
+          <a:prstGeom prst="rect">
+            <a:avLst/>
+          </a:prstGeom>
+        </p:spPr>
+      </p:pic>
+    </p:spTree>
+  </p:cSld>
+  <p:clrMapOvr>
+    <a:masterClrMapping/>
+  </p:clrMapOvr>
+</p:sld>
+</file>
+
+<file path=ppt/slides/slide17.xml><?xml version="1.0" encoding="utf-8"?>
+<p:sld xmlns:a="http://schemas.openxmlformats.org/drawingml/2006/main" xmlns:r="http://schemas.openxmlformats.org/officeDocument/2006/relationships" xmlns:p="http://schemas.openxmlformats.org/presentationml/2006/main">
+  <p:cSld name="Slide 17">
+    <p:bg>
+      <p:bgPr>
+        <a:solidFill>
+          <a:srgbClr val="FBFAF7"/>
+        </a:solidFill>
+      </p:bgPr>
+    </p:bg>
+    <p:spTree>
+      <p:nvGrpSpPr>
+        <p:cNvPr id="1" name=""/>
+        <p:cNvGrpSpPr/>
+        <p:nvPr/>
+      </p:nvGrpSpPr>
+      <p:grpSpPr>
+        <a:xfrm>
+          <a:off x="0" y="0"/>
+          <a:ext cx="0" cy="0"/>
+          <a:chOff x="0" y="0"/>
+          <a:chExt cx="0" cy="0"/>
+        </a:xfrm>
+      </p:grpSpPr>
+      <p:pic>
+        <p:nvPicPr>
+          <p:cNvPr id="2" name="Image 0" descr="グループ/集合 (set) report schematic template">    </p:cNvPr>
+          <p:cNvPicPr>
+            <a:picLocks noChangeAspect="1"/>
+          </p:cNvPicPr>
+          <p:nvPr/>
+        </p:nvPicPr>
+        <p:blipFill>
+          <a:blip r:embed="rId1"/>
+          <a:stretch>
+            <a:fillRect/>
+          </a:stretch>
+        </p:blipFill>
+        <p:spPr>
+          <a:xfrm>
+            <a:off x="0" y="0"/>
+            <a:ext cx="12191695" cy="6858000"/>
+          </a:xfrm>
+          <a:prstGeom prst="rect">
+            <a:avLst/>
+          </a:prstGeom>
+        </p:spPr>
+      </p:pic>
+    </p:spTree>
+  </p:cSld>
+  <p:clrMapOvr>
+    <a:masterClrMapping/>
+  </p:clrMapOvr>
+</p:sld>
+</file>
+
+<file path=ppt/slides/slide18.xml><?xml version="1.0" encoding="utf-8"?>
+<p:sld xmlns:a="http://schemas.openxmlformats.org/drawingml/2006/main" xmlns:r="http://schemas.openxmlformats.org/officeDocument/2006/relationships" xmlns:p="http://schemas.openxmlformats.org/presentationml/2006/main">
+  <p:cSld name="Slide 18">
+    <p:bg>
+      <p:bgPr>
+        <a:solidFill>
+          <a:srgbClr val="FBFAF7"/>
+        </a:solidFill>
+      </p:bgPr>
+    </p:bg>
+    <p:spTree>
+      <p:nvGrpSpPr>
+        <p:cNvPr id="1" name=""/>
+        <p:cNvGrpSpPr/>
+        <p:nvPr/>
+      </p:nvGrpSpPr>
+      <p:grpSpPr>
+        <a:xfrm>
+          <a:off x="0" y="0"/>
+          <a:ext cx="0" cy="0"/>
+          <a:chOff x="0" y="0"/>
+          <a:chExt cx="0" cy="0"/>
+        </a:xfrm>
+      </p:grpSpPr>
+      <p:pic>
+        <p:nvPicPr>
+          <p:cNvPr id="2" name="Image 0" descr="項目比較 (contrast) report schematic template">    </p:cNvPr>
+          <p:cNvPicPr>
+            <a:picLocks noChangeAspect="1"/>
+          </p:cNvPicPr>
+          <p:nvPr/>
+        </p:nvPicPr>
+        <p:blipFill>
+          <a:blip r:embed="rId1"/>
+          <a:stretch>
+            <a:fillRect/>
+          </a:stretch>
+        </p:blipFill>
+        <p:spPr>
+          <a:xfrm>
+            <a:off x="0" y="0"/>
+            <a:ext cx="12191695" cy="6858000"/>
+          </a:xfrm>
+          <a:prstGeom prst="rect">
+            <a:avLst/>
+          </a:prstGeom>
+        </p:spPr>
+      </p:pic>
+    </p:spTree>
+  </p:cSld>
+  <p:clrMapOvr>
+    <a:masterClrMapping/>
+  </p:clrMapOvr>
+</p:sld>
+</file>
+
+<file path=ppt/slides/slide19.xml><?xml version="1.0" encoding="utf-8"?>
+<p:sld xmlns:a="http://schemas.openxmlformats.org/drawingml/2006/main" xmlns:r="http://schemas.openxmlformats.org/officeDocument/2006/relationships" xmlns:p="http://schemas.openxmlformats.org/presentationml/2006/main">
+  <p:cSld name="Slide 19">
+    <p:bg>
+      <p:bgPr>
+        <a:solidFill>
+          <a:srgbClr val="FBFAF7"/>
+        </a:solidFill>
+      </p:bgPr>
+    </p:bg>
+    <p:spTree>
+      <p:nvGrpSpPr>
+        <p:cNvPr id="1" name=""/>
+        <p:cNvGrpSpPr/>
+        <p:nvPr/>
+      </p:nvGrpSpPr>
+      <p:grpSpPr>
+        <a:xfrm>
+          <a:off x="0" y="0"/>
+          <a:ext cx="0" cy="0"/>
+          <a:chOff x="0" y="0"/>
+          <a:chExt cx="0" cy="0"/>
+        </a:xfrm>
+      </p:grpSpPr>
+      <p:pic>
+        <p:nvPicPr>
+          <p:cNvPr id="2" name="Image 0" descr="規模比較 (scale-contrast) report schematic template">    </p:cNvPr>
+          <p:cNvPicPr>
+            <a:picLocks noChangeAspect="1"/>
+          </p:cNvPicPr>
+          <p:nvPr/>
+        </p:nvPicPr>
+        <p:blipFill>
+          <a:blip r:embed="rId1"/>
+          <a:stretch>
+            <a:fillRect/>
+          </a:stretch>
+        </p:blipFill>
+        <p:spPr>
+          <a:xfrm>
+            <a:off x="0" y="0"/>
+            <a:ext cx="12191695" cy="6858000"/>
+          </a:xfrm>
+          <a:prstGeom prst="rect">
+            <a:avLst/>
+          </a:prstGeom>
+        </p:spPr>
+      </p:pic>
+    </p:spTree>
+  </p:cSld>
+  <p:clrMapOvr>
+    <a:masterClrMapping/>
+  </p:clrMapOvr>
+</p:sld>
+</file>
+
 <file path=ppt/slides/slide2.xml><?xml version="1.0" encoding="utf-8"?>
 <p:sld xmlns:a="http://schemas.openxmlformats.org/drawingml/2006/main" xmlns:r="http://schemas.openxmlformats.org/officeDocument/2006/relationships" xmlns:p="http://schemas.openxmlformats.org/presentationml/2006/main">
   <p:cSld name="Slide 2">
@@ -2435,6 +5034,566 @@
           </a:p>
         </p:txBody>
       </p:sp>
+    </p:spTree>
+  </p:cSld>
+  <p:clrMapOvr>
+    <a:masterClrMapping/>
+  </p:clrMapOvr>
+</p:sld>
+</file>
+
+<file path=ppt/slides/slide20.xml><?xml version="1.0" encoding="utf-8"?>
+<p:sld xmlns:a="http://schemas.openxmlformats.org/drawingml/2006/main" xmlns:r="http://schemas.openxmlformats.org/officeDocument/2006/relationships" xmlns:p="http://schemas.openxmlformats.org/presentationml/2006/main">
+  <p:cSld name="Slide 20">
+    <p:bg>
+      <p:bgPr>
+        <a:solidFill>
+          <a:srgbClr val="FBFAF7"/>
+        </a:solidFill>
+      </p:bgPr>
+    </p:bg>
+    <p:spTree>
+      <p:nvGrpSpPr>
+        <p:cNvPr id="1" name=""/>
+        <p:cNvGrpSpPr/>
+        <p:nvPr/>
+      </p:nvGrpSpPr>
+      <p:grpSpPr>
+        <a:xfrm>
+          <a:off x="0" y="0"/>
+          <a:ext cx="0" cy="0"/>
+          <a:chOff x="0" y="0"/>
+          <a:chExt cx="0" cy="0"/>
+        </a:xfrm>
+      </p:grpSpPr>
+      <p:pic>
+        <p:nvPicPr>
+          <p:cNvPr id="2" name="Image 0" descr="規模分析 (grow) report schematic template">    </p:cNvPr>
+          <p:cNvPicPr>
+            <a:picLocks noChangeAspect="1"/>
+          </p:cNvPicPr>
+          <p:nvPr/>
+        </p:nvPicPr>
+        <p:blipFill>
+          <a:blip r:embed="rId1"/>
+          <a:stretch>
+            <a:fillRect/>
+          </a:stretch>
+        </p:blipFill>
+        <p:spPr>
+          <a:xfrm>
+            <a:off x="0" y="0"/>
+            <a:ext cx="12191695" cy="6858000"/>
+          </a:xfrm>
+          <a:prstGeom prst="rect">
+            <a:avLst/>
+          </a:prstGeom>
+        </p:spPr>
+      </p:pic>
+    </p:spTree>
+  </p:cSld>
+  <p:clrMapOvr>
+    <a:masterClrMapping/>
+  </p:clrMapOvr>
+</p:sld>
+</file>
+
+<file path=ppt/slides/slide21.xml><?xml version="1.0" encoding="utf-8"?>
+<p:sld xmlns:a="http://schemas.openxmlformats.org/drawingml/2006/main" xmlns:r="http://schemas.openxmlformats.org/officeDocument/2006/relationships" xmlns:p="http://schemas.openxmlformats.org/presentationml/2006/main">
+  <p:cSld name="Slide 21">
+    <p:bg>
+      <p:bgPr>
+        <a:solidFill>
+          <a:srgbClr val="FBFAF7"/>
+        </a:solidFill>
+      </p:bgPr>
+    </p:bg>
+    <p:spTree>
+      <p:nvGrpSpPr>
+        <p:cNvPr id="1" name=""/>
+        <p:cNvGrpSpPr/>
+        <p:nvPr/>
+      </p:nvGrpSpPr>
+      <p:grpSpPr>
+        <a:xfrm>
+          <a:off x="0" y="0"/>
+          <a:ext cx="0" cy="0"/>
+          <a:chOff x="0" y="0"/>
+          <a:chExt cx="0" cy="0"/>
+        </a:xfrm>
+      </p:grpSpPr>
+      <p:pic>
+        <p:nvPicPr>
+          <p:cNvPr id="2" name="Image 0" descr="レイヤー構造 (layer) report schematic template">    </p:cNvPr>
+          <p:cNvPicPr>
+            <a:picLocks noChangeAspect="1"/>
+          </p:cNvPicPr>
+          <p:nvPr/>
+        </p:nvPicPr>
+        <p:blipFill>
+          <a:blip r:embed="rId1"/>
+          <a:stretch>
+            <a:fillRect/>
+          </a:stretch>
+        </p:blipFill>
+        <p:spPr>
+          <a:xfrm>
+            <a:off x="0" y="0"/>
+            <a:ext cx="12191695" cy="6858000"/>
+          </a:xfrm>
+          <a:prstGeom prst="rect">
+            <a:avLst/>
+          </a:prstGeom>
+        </p:spPr>
+      </p:pic>
+    </p:spTree>
+  </p:cSld>
+  <p:clrMapOvr>
+    <a:masterClrMapping/>
+  </p:clrMapOvr>
+</p:sld>
+</file>
+
+<file path=ppt/slides/slide22.xml><?xml version="1.0" encoding="utf-8"?>
+<p:sld xmlns:a="http://schemas.openxmlformats.org/drawingml/2006/main" xmlns:r="http://schemas.openxmlformats.org/officeDocument/2006/relationships" xmlns:p="http://schemas.openxmlformats.org/presentationml/2006/main">
+  <p:cSld name="Slide 22">
+    <p:bg>
+      <p:bgPr>
+        <a:solidFill>
+          <a:srgbClr val="FBFAF7"/>
+        </a:solidFill>
+      </p:bgPr>
+    </p:bg>
+    <p:spTree>
+      <p:nvGrpSpPr>
+        <p:cNvPr id="1" name=""/>
+        <p:cNvGrpSpPr/>
+        <p:nvPr/>
+      </p:nvGrpSpPr>
+      <p:grpSpPr>
+        <a:xfrm>
+          <a:off x="0" y="0"/>
+          <a:ext cx="0" cy="0"/>
+          <a:chOff x="0" y="0"/>
+          <a:chExt cx="0" cy="0"/>
+        </a:xfrm>
+      </p:grpSpPr>
+      <p:pic>
+        <p:nvPicPr>
+          <p:cNvPr id="2" name="Image 0" descr="トライアングル (triangle) report schematic template">    </p:cNvPr>
+          <p:cNvPicPr>
+            <a:picLocks noChangeAspect="1"/>
+          </p:cNvPicPr>
+          <p:nvPr/>
+        </p:nvPicPr>
+        <p:blipFill>
+          <a:blip r:embed="rId1"/>
+          <a:stretch>
+            <a:fillRect/>
+          </a:stretch>
+        </p:blipFill>
+        <p:spPr>
+          <a:xfrm>
+            <a:off x="0" y="0"/>
+            <a:ext cx="12191695" cy="6858000"/>
+          </a:xfrm>
+          <a:prstGeom prst="rect">
+            <a:avLst/>
+          </a:prstGeom>
+        </p:spPr>
+      </p:pic>
+    </p:spTree>
+  </p:cSld>
+  <p:clrMapOvr>
+    <a:masterClrMapping/>
+  </p:clrMapOvr>
+</p:sld>
+</file>
+
+<file path=ppt/slides/slide23.xml><?xml version="1.0" encoding="utf-8"?>
+<p:sld xmlns:a="http://schemas.openxmlformats.org/drawingml/2006/main" xmlns:r="http://schemas.openxmlformats.org/officeDocument/2006/relationships" xmlns:p="http://schemas.openxmlformats.org/presentationml/2006/main">
+  <p:cSld name="Slide 23">
+    <p:bg>
+      <p:bgPr>
+        <a:solidFill>
+          <a:srgbClr val="FBFAF7"/>
+        </a:solidFill>
+      </p:bgPr>
+    </p:bg>
+    <p:spTree>
+      <p:nvGrpSpPr>
+        <p:cNvPr id="1" name=""/>
+        <p:cNvGrpSpPr/>
+        <p:nvPr/>
+      </p:nvGrpSpPr>
+      <p:grpSpPr>
+        <a:xfrm>
+          <a:off x="0" y="0"/>
+          <a:ext cx="0" cy="0"/>
+          <a:chOff x="0" y="0"/>
+          <a:chExt cx="0" cy="0"/>
+        </a:xfrm>
+      </p:grpSpPr>
+      <p:pic>
+        <p:nvPicPr>
+          <p:cNvPr id="2" name="Image 0" descr="階段/ステップ (step) report schematic template">    </p:cNvPr>
+          <p:cNvPicPr>
+            <a:picLocks noChangeAspect="1"/>
+          </p:cNvPicPr>
+          <p:nvPr/>
+        </p:nvPicPr>
+        <p:blipFill>
+          <a:blip r:embed="rId1"/>
+          <a:stretch>
+            <a:fillRect/>
+          </a:stretch>
+        </p:blipFill>
+        <p:spPr>
+          <a:xfrm>
+            <a:off x="0" y="0"/>
+            <a:ext cx="12191695" cy="6858000"/>
+          </a:xfrm>
+          <a:prstGeom prst="rect">
+            <a:avLst/>
+          </a:prstGeom>
+        </p:spPr>
+      </p:pic>
+    </p:spTree>
+  </p:cSld>
+  <p:clrMapOvr>
+    <a:masterClrMapping/>
+  </p:clrMapOvr>
+</p:sld>
+</file>
+
+<file path=ppt/slides/slide24.xml><?xml version="1.0" encoding="utf-8"?>
+<p:sld xmlns:a="http://schemas.openxmlformats.org/drawingml/2006/main" xmlns:r="http://schemas.openxmlformats.org/officeDocument/2006/relationships" xmlns:p="http://schemas.openxmlformats.org/presentationml/2006/main">
+  <p:cSld name="Slide 24">
+    <p:bg>
+      <p:bgPr>
+        <a:solidFill>
+          <a:srgbClr val="FBFAF7"/>
+        </a:solidFill>
+      </p:bgPr>
+    </p:bg>
+    <p:spTree>
+      <p:nvGrpSpPr>
+        <p:cNvPr id="1" name=""/>
+        <p:cNvGrpSpPr/>
+        <p:nvPr/>
+      </p:nvGrpSpPr>
+      <p:grpSpPr>
+        <a:xfrm>
+          <a:off x="0" y="0"/>
+          <a:ext cx="0" cy="0"/>
+          <a:chOff x="0" y="0"/>
+          <a:chExt cx="0" cy="0"/>
+        </a:xfrm>
+      </p:grpSpPr>
+      <p:pic>
+        <p:nvPicPr>
+          <p:cNvPr id="2" name="Image 0" descr="ガントチャート (gantt) report schematic template">    </p:cNvPr>
+          <p:cNvPicPr>
+            <a:picLocks noChangeAspect="1"/>
+          </p:cNvPicPr>
+          <p:nvPr/>
+        </p:nvPicPr>
+        <p:blipFill>
+          <a:blip r:embed="rId1"/>
+          <a:stretch>
+            <a:fillRect/>
+          </a:stretch>
+        </p:blipFill>
+        <p:spPr>
+          <a:xfrm>
+            <a:off x="0" y="0"/>
+            <a:ext cx="12191695" cy="6858000"/>
+          </a:xfrm>
+          <a:prstGeom prst="rect">
+            <a:avLst/>
+          </a:prstGeom>
+        </p:spPr>
+      </p:pic>
+    </p:spTree>
+  </p:cSld>
+  <p:clrMapOvr>
+    <a:masterClrMapping/>
+  </p:clrMapOvr>
+</p:sld>
+</file>
+
+<file path=ppt/slides/slide25.xml><?xml version="1.0" encoding="utf-8"?>
+<p:sld xmlns:a="http://schemas.openxmlformats.org/drawingml/2006/main" xmlns:r="http://schemas.openxmlformats.org/officeDocument/2006/relationships" xmlns:p="http://schemas.openxmlformats.org/presentationml/2006/main">
+  <p:cSld name="Slide 25">
+    <p:bg>
+      <p:bgPr>
+        <a:solidFill>
+          <a:srgbClr val="FBFAF7"/>
+        </a:solidFill>
+      </p:bgPr>
+    </p:bg>
+    <p:spTree>
+      <p:nvGrpSpPr>
+        <p:cNvPr id="1" name=""/>
+        <p:cNvGrpSpPr/>
+        <p:nvPr/>
+      </p:nvGrpSpPr>
+      <p:grpSpPr>
+        <a:xfrm>
+          <a:off x="0" y="0"/>
+          <a:ext cx="0" cy="0"/>
+          <a:chOff x="0" y="0"/>
+          <a:chExt cx="0" cy="0"/>
+        </a:xfrm>
+      </p:grpSpPr>
+      <p:pic>
+        <p:nvPicPr>
+          <p:cNvPr id="2" name="Image 0" descr="ランキング (ranking) report schematic template">    </p:cNvPr>
+          <p:cNvPicPr>
+            <a:picLocks noChangeAspect="1"/>
+          </p:cNvPicPr>
+          <p:nvPr/>
+        </p:nvPicPr>
+        <p:blipFill>
+          <a:blip r:embed="rId1"/>
+          <a:stretch>
+            <a:fillRect/>
+          </a:stretch>
+        </p:blipFill>
+        <p:spPr>
+          <a:xfrm>
+            <a:off x="0" y="0"/>
+            <a:ext cx="12191695" cy="6858000"/>
+          </a:xfrm>
+          <a:prstGeom prst="rect">
+            <a:avLst/>
+          </a:prstGeom>
+        </p:spPr>
+      </p:pic>
+    </p:spTree>
+  </p:cSld>
+  <p:clrMapOvr>
+    <a:masterClrMapping/>
+  </p:clrMapOvr>
+</p:sld>
+</file>
+
+<file path=ppt/slides/slide26.xml><?xml version="1.0" encoding="utf-8"?>
+<p:sld xmlns:a="http://schemas.openxmlformats.org/drawingml/2006/main" xmlns:r="http://schemas.openxmlformats.org/officeDocument/2006/relationships" xmlns:p="http://schemas.openxmlformats.org/presentationml/2006/main">
+  <p:cSld name="Slide 26">
+    <p:bg>
+      <p:bgPr>
+        <a:solidFill>
+          <a:srgbClr val="FBFAF7"/>
+        </a:solidFill>
+      </p:bgPr>
+    </p:bg>
+    <p:spTree>
+      <p:nvGrpSpPr>
+        <p:cNvPr id="1" name=""/>
+        <p:cNvGrpSpPr/>
+        <p:nvPr/>
+      </p:nvGrpSpPr>
+      <p:grpSpPr>
+        <a:xfrm>
+          <a:off x="0" y="0"/>
+          <a:ext cx="0" cy="0"/>
+          <a:chOff x="0" y="0"/>
+          <a:chExt cx="0" cy="0"/>
+        </a:xfrm>
+      </p:grpSpPr>
+      <p:pic>
+        <p:nvPicPr>
+          <p:cNvPr id="2" name="Image 0" descr="箇条書き縦 (list) report schematic template">    </p:cNvPr>
+          <p:cNvPicPr>
+            <a:picLocks noChangeAspect="1"/>
+          </p:cNvPicPr>
+          <p:nvPr/>
+        </p:nvPicPr>
+        <p:blipFill>
+          <a:blip r:embed="rId1"/>
+          <a:stretch>
+            <a:fillRect/>
+          </a:stretch>
+        </p:blipFill>
+        <p:spPr>
+          <a:xfrm>
+            <a:off x="0" y="0"/>
+            <a:ext cx="12191695" cy="6858000"/>
+          </a:xfrm>
+          <a:prstGeom prst="rect">
+            <a:avLst/>
+          </a:prstGeom>
+        </p:spPr>
+      </p:pic>
+    </p:spTree>
+  </p:cSld>
+  <p:clrMapOvr>
+    <a:masterClrMapping/>
+  </p:clrMapOvr>
+</p:sld>
+</file>
+
+<file path=ppt/slides/slide27.xml><?xml version="1.0" encoding="utf-8"?>
+<p:sld xmlns:a="http://schemas.openxmlformats.org/drawingml/2006/main" xmlns:r="http://schemas.openxmlformats.org/officeDocument/2006/relationships" xmlns:p="http://schemas.openxmlformats.org/presentationml/2006/main">
+  <p:cSld name="Slide 27">
+    <p:bg>
+      <p:bgPr>
+        <a:solidFill>
+          <a:srgbClr val="FBFAF7"/>
+        </a:solidFill>
+      </p:bgPr>
+    </p:bg>
+    <p:spTree>
+      <p:nvGrpSpPr>
+        <p:cNvPr id="1" name=""/>
+        <p:cNvGrpSpPr/>
+        <p:nvPr/>
+      </p:nvGrpSpPr>
+      <p:grpSpPr>
+        <a:xfrm>
+          <a:off x="0" y="0"/>
+          <a:ext cx="0" cy="0"/>
+          <a:chOff x="0" y="0"/>
+          <a:chExt cx="0" cy="0"/>
+        </a:xfrm>
+      </p:grpSpPr>
+      <p:pic>
+        <p:nvPicPr>
+          <p:cNvPr id="2" name="Image 0" descr="箇条書き横 (list-horizontal) report schematic template">    </p:cNvPr>
+          <p:cNvPicPr>
+            <a:picLocks noChangeAspect="1"/>
+          </p:cNvPicPr>
+          <p:nvPr/>
+        </p:nvPicPr>
+        <p:blipFill>
+          <a:blip r:embed="rId1"/>
+          <a:stretch>
+            <a:fillRect/>
+          </a:stretch>
+        </p:blipFill>
+        <p:spPr>
+          <a:xfrm>
+            <a:off x="0" y="0"/>
+            <a:ext cx="12191695" cy="6858000"/>
+          </a:xfrm>
+          <a:prstGeom prst="rect">
+            <a:avLst/>
+          </a:prstGeom>
+        </p:spPr>
+      </p:pic>
+    </p:spTree>
+  </p:cSld>
+  <p:clrMapOvr>
+    <a:masterClrMapping/>
+  </p:clrMapOvr>
+</p:sld>
+</file>
+
+<file path=ppt/slides/slide28.xml><?xml version="1.0" encoding="utf-8"?>
+<p:sld xmlns:a="http://schemas.openxmlformats.org/drawingml/2006/main" xmlns:r="http://schemas.openxmlformats.org/officeDocument/2006/relationships" xmlns:p="http://schemas.openxmlformats.org/presentationml/2006/main">
+  <p:cSld name="Slide 28">
+    <p:bg>
+      <p:bgPr>
+        <a:solidFill>
+          <a:srgbClr val="FBFAF7"/>
+        </a:solidFill>
+      </p:bgPr>
+    </p:bg>
+    <p:spTree>
+      <p:nvGrpSpPr>
+        <p:cNvPr id="1" name=""/>
+        <p:cNvGrpSpPr/>
+        <p:nvPr/>
+      </p:nvGrpSpPr>
+      <p:grpSpPr>
+        <a:xfrm>
+          <a:off x="0" y="0"/>
+          <a:ext cx="0" cy="0"/>
+          <a:chOff x="0" y="0"/>
+          <a:chExt cx="0" cy="0"/>
+        </a:xfrm>
+      </p:grpSpPr>
+      <p:pic>
+        <p:nvPicPr>
+          <p:cNvPr id="2" name="Image 0" descr="箇条書き羅列 (list-enumeration) report schematic template">    </p:cNvPr>
+          <p:cNvPicPr>
+            <a:picLocks noChangeAspect="1"/>
+          </p:cNvPicPr>
+          <p:nvPr/>
+        </p:nvPicPr>
+        <p:blipFill>
+          <a:blip r:embed="rId1"/>
+          <a:stretch>
+            <a:fillRect/>
+          </a:stretch>
+        </p:blipFill>
+        <p:spPr>
+          <a:xfrm>
+            <a:off x="0" y="0"/>
+            <a:ext cx="12191695" cy="6858000"/>
+          </a:xfrm>
+          <a:prstGeom prst="rect">
+            <a:avLst/>
+          </a:prstGeom>
+        </p:spPr>
+      </p:pic>
+    </p:spTree>
+  </p:cSld>
+  <p:clrMapOvr>
+    <a:masterClrMapping/>
+  </p:clrMapOvr>
+</p:sld>
+</file>
+
+<file path=ppt/slides/slide29.xml><?xml version="1.0" encoding="utf-8"?>
+<p:sld xmlns:a="http://schemas.openxmlformats.org/drawingml/2006/main" xmlns:r="http://schemas.openxmlformats.org/officeDocument/2006/relationships" xmlns:p="http://schemas.openxmlformats.org/presentationml/2006/main">
+  <p:cSld name="Slide 29">
+    <p:bg>
+      <p:bgPr>
+        <a:solidFill>
+          <a:srgbClr val="FBFAF7"/>
+        </a:solidFill>
+      </p:bgPr>
+    </p:bg>
+    <p:spTree>
+      <p:nvGrpSpPr>
+        <p:cNvPr id="1" name=""/>
+        <p:cNvGrpSpPr/>
+        <p:nvPr/>
+      </p:nvGrpSpPr>
+      <p:grpSpPr>
+        <a:xfrm>
+          <a:off x="0" y="0"/>
+          <a:ext cx="0" cy="0"/>
+          <a:chOff x="0" y="0"/>
+          <a:chExt cx="0" cy="0"/>
+        </a:xfrm>
+      </p:grpSpPr>
+      <p:pic>
+        <p:nvPicPr>
+          <p:cNvPr id="2" name="Image 0" descr="モックアップ (mockup) report schematic template">    </p:cNvPr>
+          <p:cNvPicPr>
+            <a:picLocks noChangeAspect="1"/>
+          </p:cNvPicPr>
+          <p:nvPr/>
+        </p:nvPicPr>
+        <p:blipFill>
+          <a:blip r:embed="rId1"/>
+          <a:stretch>
+            <a:fillRect/>
+          </a:stretch>
+        </p:blipFill>
+        <p:spPr>
+          <a:xfrm>
+            <a:off x="0" y="0"/>
+            <a:ext cx="12191695" cy="6858000"/>
+          </a:xfrm>
+          <a:prstGeom prst="rect">
+            <a:avLst/>
+          </a:prstGeom>
+        </p:spPr>
+      </p:pic>
     </p:spTree>
   </p:cSld>
   <p:clrMapOvr>
@@ -3061,6 +6220,178 @@
 </p:sld>
 </file>
 
+<file path=ppt/slides/slide30.xml><?xml version="1.0" encoding="utf-8"?>
+<p:sld xmlns:a="http://schemas.openxmlformats.org/drawingml/2006/main" xmlns:r="http://schemas.openxmlformats.org/officeDocument/2006/relationships" xmlns:p="http://schemas.openxmlformats.org/presentationml/2006/main">
+  <p:cSld name="Slide 30">
+    <p:bg>
+      <p:bgPr>
+        <a:solidFill>
+          <a:srgbClr val="FBFAF7"/>
+        </a:solidFill>
+      </p:bgPr>
+    </p:bg>
+    <p:spTree>
+      <p:nvGrpSpPr>
+        <p:cNvPr id="1" name=""/>
+        <p:cNvGrpSpPr/>
+        <p:nvPr/>
+      </p:nvGrpSpPr>
+      <p:grpSpPr>
+        <a:xfrm>
+          <a:off x="0" y="0"/>
+          <a:ext cx="0" cy="0"/>
+          <a:chOff x="0" y="0"/>
+          <a:chExt cx="0" cy="0"/>
+        </a:xfrm>
+      </p:grpSpPr>
+      <p:sp>
+        <p:nvSpPr>
+          <p:cNvPr id="2" name="Text 0"/>
+          <p:cNvSpPr/>
+          <p:nvPr/>
+        </p:nvSpPr>
+        <p:spPr>
+          <a:xfrm>
+            <a:off x="685800" y="530352"/>
+            <a:ext cx="10789920" cy="822960"/>
+          </a:xfrm>
+          <a:prstGeom prst="rect">
+            <a:avLst/>
+          </a:prstGeom>
+          <a:noFill/>
+          <a:ln/>
+        </p:spPr>
+        <p:txBody>
+          <a:bodyPr wrap="square" lIns="254" tIns="254" rIns="254" bIns="254" rtlCol="0" anchor="ctr">
+            <a:normAutofit/>
+          </a:bodyPr>
+          <a:lstStyle/>
+          <a:p>
+            <a:pPr indent="0" marL="0">
+              <a:buNone/>
+            </a:pPr>
+            <a:r>
+              <a:rPr lang="en-US" sz="2800" b="1" dirty="0">
+                <a:solidFill>
+                  <a:srgbClr val="24211D"/>
+                </a:solidFill>
+                <a:latin typeface="Yu Gothic" pitchFamily="34" charset="0"/>
+                <a:ea typeface="Yu Gothic" pitchFamily="34" charset="-122"/>
+                <a:cs typeface="Yu Gothic" pitchFamily="34" charset="-120"/>
+              </a:rPr>
+              <a:t>参考URL・出典</a:t>
+            </a:r>
+            <a:endParaRPr lang="en-US" sz="2800" dirty="0"/>
+          </a:p>
+        </p:txBody>
+      </p:sp>
+      <p:sp>
+        <p:nvSpPr>
+          <p:cNvPr id="3" name="Text 1"/>
+          <p:cNvSpPr/>
+          <p:nvPr/>
+        </p:nvSpPr>
+        <p:spPr>
+          <a:xfrm>
+            <a:off x="713232" y="1353312"/>
+            <a:ext cx="10607040" cy="384048"/>
+          </a:xfrm>
+          <a:prstGeom prst="rect">
+            <a:avLst/>
+          </a:prstGeom>
+          <a:noFill/>
+          <a:ln/>
+        </p:spPr>
+        <p:txBody>
+          <a:bodyPr wrap="square" lIns="254" tIns="254" rIns="254" bIns="254" rtlCol="0" anchor="ctr">
+            <a:normAutofit/>
+          </a:bodyPr>
+          <a:lstStyle/>
+          <a:p>
+            <a:pPr indent="0" marL="0">
+              <a:buNone/>
+            </a:pPr>
+            <a:r>
+              <a:rPr lang="en-US" sz="2000" dirty="0">
+                <a:solidFill>
+                  <a:srgbClr val="5F5A52"/>
+                </a:solidFill>
+                <a:latin typeface="Yu Gothic" pitchFamily="34" charset="0"/>
+                <a:ea typeface="Yu Gothic" pitchFamily="34" charset="-122"/>
+                <a:cs typeface="Yu Gothic" pitchFamily="34" charset="-120"/>
+              </a:rPr>
+              <a:t>外部サイトを参照した内容は、以下のURLを出典として確認できます（1件）。</a:t>
+            </a:r>
+            <a:endParaRPr lang="en-US" sz="2000" dirty="0"/>
+          </a:p>
+        </p:txBody>
+      </p:sp>
+      <p:sp>
+        <p:nvSpPr>
+          <p:cNvPr id="4" name="Text 2"/>
+          <p:cNvSpPr/>
+          <p:nvPr/>
+        </p:nvSpPr>
+        <p:spPr>
+          <a:xfrm>
+            <a:off x="777240" y="1901952"/>
+            <a:ext cx="10469880" cy="4352544"/>
+          </a:xfrm>
+          <a:prstGeom prst="rect">
+            <a:avLst/>
+          </a:prstGeom>
+          <a:noFill/>
+          <a:ln/>
+        </p:spPr>
+        <p:txBody>
+          <a:bodyPr wrap="square" lIns="254" tIns="254" rIns="254" bIns="254" rtlCol="0" anchor="ctr">
+            <a:normAutofit/>
+          </a:bodyPr>
+          <a:lstStyle/>
+          <a:p>
+            <a:pPr indent="0" marL="0">
+              <a:buNone/>
+            </a:pPr>
+            <a:r>
+              <a:rPr lang="en-US" sz="1400" dirty="0">
+                <a:solidFill>
+                  <a:srgbClr val="24211D"/>
+                </a:solidFill>
+                <a:latin typeface="Yu Gothic" pitchFamily="34" charset="0"/>
+                <a:ea typeface="Yu Gothic" pitchFamily="34" charset="-122"/>
+                <a:cs typeface="Yu Gothic" pitchFamily="34" charset="-120"/>
+              </a:rPr>
+              <a:t>1. Slideland schematic and taste references</a:t>
+            </a:r>
+            <a:endParaRPr lang="en-US" sz="1400" dirty="0"/>
+          </a:p>
+          <a:p>
+            <a:pPr indent="0" marL="0">
+              <a:buNone/>
+            </a:pPr>
+            <a:r>
+              <a:rPr lang="en-US" sz="1400" dirty="0">
+                <a:solidFill>
+                  <a:srgbClr val="24211D"/>
+                </a:solidFill>
+                <a:latin typeface="Yu Gothic" pitchFamily="34" charset="0"/>
+                <a:ea typeface="Yu Gothic" pitchFamily="34" charset="-122"/>
+                <a:cs typeface="Yu Gothic" pitchFamily="34" charset="-120"/>
+              </a:rPr>
+              <a:t>https://www.slideland.tech/docs/schematic</a:t>
+            </a:r>
+            <a:endParaRPr lang="en-US" sz="1400" dirty="0"/>
+          </a:p>
+        </p:txBody>
+      </p:sp>
+    </p:spTree>
+  </p:cSld>
+  <p:clrMapOvr>
+    <a:masterClrMapping/>
+  </p:clrMapOvr>
+</p:sld>
+</file>
+
 <file path=ppt/slides/slide4.xml><?xml version="1.0" encoding="utf-8"?>
 <p:sld xmlns:a="http://schemas.openxmlformats.org/drawingml/2006/main" xmlns:r="http://schemas.openxmlformats.org/officeDocument/2006/relationships" xmlns:p="http://schemas.openxmlformats.org/presentationml/2006/main">
   <p:cSld name="Slide 4">
@@ -3246,6 +6577,286 @@
           </a:p>
         </p:txBody>
       </p:sp>
+    </p:spTree>
+  </p:cSld>
+  <p:clrMapOvr>
+    <a:masterClrMapping/>
+  </p:clrMapOvr>
+</p:sld>
+</file>
+
+<file path=ppt/slides/slide5.xml><?xml version="1.0" encoding="utf-8"?>
+<p:sld xmlns:a="http://schemas.openxmlformats.org/drawingml/2006/main" xmlns:r="http://schemas.openxmlformats.org/officeDocument/2006/relationships" xmlns:p="http://schemas.openxmlformats.org/presentationml/2006/main">
+  <p:cSld name="Slide 5">
+    <p:bg>
+      <p:bgPr>
+        <a:solidFill>
+          <a:srgbClr val="FBFAF7"/>
+        </a:solidFill>
+      </p:bgPr>
+    </p:bg>
+    <p:spTree>
+      <p:nvGrpSpPr>
+        <p:cNvPr id="1" name=""/>
+        <p:cNvGrpSpPr/>
+        <p:nvPr/>
+      </p:nvGrpSpPr>
+      <p:grpSpPr>
+        <a:xfrm>
+          <a:off x="0" y="0"/>
+          <a:ext cx="0" cy="0"/>
+          <a:chOff x="0" y="0"/>
+          <a:chExt cx="0" cy="0"/>
+        </a:xfrm>
+      </p:grpSpPr>
+      <p:pic>
+        <p:nvPicPr>
+          <p:cNvPr id="2" name="Image 0" descr="表 (table) report schematic template">    </p:cNvPr>
+          <p:cNvPicPr>
+            <a:picLocks noChangeAspect="1"/>
+          </p:cNvPicPr>
+          <p:nvPr/>
+        </p:nvPicPr>
+        <p:blipFill>
+          <a:blip r:embed="rId1"/>
+          <a:stretch>
+            <a:fillRect/>
+          </a:stretch>
+        </p:blipFill>
+        <p:spPr>
+          <a:xfrm>
+            <a:off x="0" y="0"/>
+            <a:ext cx="12191695" cy="6858000"/>
+          </a:xfrm>
+          <a:prstGeom prst="rect">
+            <a:avLst/>
+          </a:prstGeom>
+        </p:spPr>
+      </p:pic>
+    </p:spTree>
+  </p:cSld>
+  <p:clrMapOvr>
+    <a:masterClrMapping/>
+  </p:clrMapOvr>
+</p:sld>
+</file>
+
+<file path=ppt/slides/slide6.xml><?xml version="1.0" encoding="utf-8"?>
+<p:sld xmlns:a="http://schemas.openxmlformats.org/drawingml/2006/main" xmlns:r="http://schemas.openxmlformats.org/officeDocument/2006/relationships" xmlns:p="http://schemas.openxmlformats.org/presentationml/2006/main">
+  <p:cSld name="Slide 6">
+    <p:bg>
+      <p:bgPr>
+        <a:solidFill>
+          <a:srgbClr val="FBFAF7"/>
+        </a:solidFill>
+      </p:bgPr>
+    </p:bg>
+    <p:spTree>
+      <p:nvGrpSpPr>
+        <p:cNvPr id="1" name=""/>
+        <p:cNvGrpSpPr/>
+        <p:nvPr/>
+      </p:nvGrpSpPr>
+      <p:grpSpPr>
+        <a:xfrm>
+          <a:off x="0" y="0"/>
+          <a:ext cx="0" cy="0"/>
+          <a:chOff x="0" y="0"/>
+          <a:chExt cx="0" cy="0"/>
+        </a:xfrm>
+      </p:grpSpPr>
+      <p:pic>
+        <p:nvPicPr>
+          <p:cNvPr id="2" name="Image 0" descr="ツリー (tree) report schematic template">    </p:cNvPr>
+          <p:cNvPicPr>
+            <a:picLocks noChangeAspect="1"/>
+          </p:cNvPicPr>
+          <p:nvPr/>
+        </p:nvPicPr>
+        <p:blipFill>
+          <a:blip r:embed="rId1"/>
+          <a:stretch>
+            <a:fillRect/>
+          </a:stretch>
+        </p:blipFill>
+        <p:spPr>
+          <a:xfrm>
+            <a:off x="0" y="0"/>
+            <a:ext cx="12191695" cy="6858000"/>
+          </a:xfrm>
+          <a:prstGeom prst="rect">
+            <a:avLst/>
+          </a:prstGeom>
+        </p:spPr>
+      </p:pic>
+    </p:spTree>
+  </p:cSld>
+  <p:clrMapOvr>
+    <a:masterClrMapping/>
+  </p:clrMapOvr>
+</p:sld>
+</file>
+
+<file path=ppt/slides/slide7.xml><?xml version="1.0" encoding="utf-8"?>
+<p:sld xmlns:a="http://schemas.openxmlformats.org/drawingml/2006/main" xmlns:r="http://schemas.openxmlformats.org/officeDocument/2006/relationships" xmlns:p="http://schemas.openxmlformats.org/presentationml/2006/main">
+  <p:cSld name="Slide 7">
+    <p:bg>
+      <p:bgPr>
+        <a:solidFill>
+          <a:srgbClr val="FBFAF7"/>
+        </a:solidFill>
+      </p:bgPr>
+    </p:bg>
+    <p:spTree>
+      <p:nvGrpSpPr>
+        <p:cNvPr id="1" name=""/>
+        <p:cNvGrpSpPr/>
+        <p:nvPr/>
+      </p:nvGrpSpPr>
+      <p:grpSpPr>
+        <a:xfrm>
+          <a:off x="0" y="0"/>
+          <a:ext cx="0" cy="0"/>
+          <a:chOff x="0" y="0"/>
+          <a:chExt cx="0" cy="0"/>
+        </a:xfrm>
+      </p:grpSpPr>
+      <p:pic>
+        <p:nvPicPr>
+          <p:cNvPr id="2" name="Image 0" descr="横フロー (flow) report schematic template">    </p:cNvPr>
+          <p:cNvPicPr>
+            <a:picLocks noChangeAspect="1"/>
+          </p:cNvPicPr>
+          <p:nvPr/>
+        </p:nvPicPr>
+        <p:blipFill>
+          <a:blip r:embed="rId1"/>
+          <a:stretch>
+            <a:fillRect/>
+          </a:stretch>
+        </p:blipFill>
+        <p:spPr>
+          <a:xfrm>
+            <a:off x="0" y="0"/>
+            <a:ext cx="12191695" cy="6858000"/>
+          </a:xfrm>
+          <a:prstGeom prst="rect">
+            <a:avLst/>
+          </a:prstGeom>
+        </p:spPr>
+      </p:pic>
+    </p:spTree>
+  </p:cSld>
+  <p:clrMapOvr>
+    <a:masterClrMapping/>
+  </p:clrMapOvr>
+</p:sld>
+</file>
+
+<file path=ppt/slides/slide8.xml><?xml version="1.0" encoding="utf-8"?>
+<p:sld xmlns:a="http://schemas.openxmlformats.org/drawingml/2006/main" xmlns:r="http://schemas.openxmlformats.org/officeDocument/2006/relationships" xmlns:p="http://schemas.openxmlformats.org/presentationml/2006/main">
+  <p:cSld name="Slide 8">
+    <p:bg>
+      <p:bgPr>
+        <a:solidFill>
+          <a:srgbClr val="FBFAF7"/>
+        </a:solidFill>
+      </p:bgPr>
+    </p:bg>
+    <p:spTree>
+      <p:nvGrpSpPr>
+        <p:cNvPr id="1" name=""/>
+        <p:cNvGrpSpPr/>
+        <p:nvPr/>
+      </p:nvGrpSpPr>
+      <p:grpSpPr>
+        <a:xfrm>
+          <a:off x="0" y="0"/>
+          <a:ext cx="0" cy="0"/>
+          <a:chOff x="0" y="0"/>
+          <a:chExt cx="0" cy="0"/>
+        </a:xfrm>
+      </p:grpSpPr>
+      <p:pic>
+        <p:nvPicPr>
+          <p:cNvPr id="2" name="Image 0" descr="縦フロー (vertical-flow) report schematic template">    </p:cNvPr>
+          <p:cNvPicPr>
+            <a:picLocks noChangeAspect="1"/>
+          </p:cNvPicPr>
+          <p:nvPr/>
+        </p:nvPicPr>
+        <p:blipFill>
+          <a:blip r:embed="rId1"/>
+          <a:stretch>
+            <a:fillRect/>
+          </a:stretch>
+        </p:blipFill>
+        <p:spPr>
+          <a:xfrm>
+            <a:off x="0" y="0"/>
+            <a:ext cx="12191695" cy="6858000"/>
+          </a:xfrm>
+          <a:prstGeom prst="rect">
+            <a:avLst/>
+          </a:prstGeom>
+        </p:spPr>
+      </p:pic>
+    </p:spTree>
+  </p:cSld>
+  <p:clrMapOvr>
+    <a:masterClrMapping/>
+  </p:clrMapOvr>
+</p:sld>
+</file>
+
+<file path=ppt/slides/slide9.xml><?xml version="1.0" encoding="utf-8"?>
+<p:sld xmlns:a="http://schemas.openxmlformats.org/drawingml/2006/main" xmlns:r="http://schemas.openxmlformats.org/officeDocument/2006/relationships" xmlns:p="http://schemas.openxmlformats.org/presentationml/2006/main">
+  <p:cSld name="Slide 9">
+    <p:bg>
+      <p:bgPr>
+        <a:solidFill>
+          <a:srgbClr val="FBFAF7"/>
+        </a:solidFill>
+      </p:bgPr>
+    </p:bg>
+    <p:spTree>
+      <p:nvGrpSpPr>
+        <p:cNvPr id="1" name=""/>
+        <p:cNvGrpSpPr/>
+        <p:nvPr/>
+      </p:nvGrpSpPr>
+      <p:grpSpPr>
+        <a:xfrm>
+          <a:off x="0" y="0"/>
+          <a:ext cx="0" cy="0"/>
+          <a:chOff x="0" y="0"/>
+          <a:chExt cx="0" cy="0"/>
+        </a:xfrm>
+      </p:grpSpPr>
+      <p:pic>
+        <p:nvPicPr>
+          <p:cNvPr id="2" name="Image 0" descr="サイクル (cycle) report schematic template">    </p:cNvPr>
+          <p:cNvPicPr>
+            <a:picLocks noChangeAspect="1"/>
+          </p:cNvPicPr>
+          <p:nvPr/>
+        </p:nvPicPr>
+        <p:blipFill>
+          <a:blip r:embed="rId1"/>
+          <a:stretch>
+            <a:fillRect/>
+          </a:stretch>
+        </p:blipFill>
+        <p:spPr>
+          <a:xfrm>
+            <a:off x="0" y="0"/>
+            <a:ext cx="12191695" cy="6858000"/>
+          </a:xfrm>
+          <a:prstGeom prst="rect">
+            <a:avLst/>
+          </a:prstGeom>
+        </p:spPr>
+      </p:pic>
     </p:spTree>
   </p:cSld>
   <p:clrMapOvr>

--- a/samples/pptcreater-overview-report.pptx
+++ b/samples/pptcreater-overview-report.pptx
@@ -3255,7 +3255,7 @@
         <p:spPr>
           <a:xfrm>
             <a:off x="7040880" y="914400"/>
-            <a:ext cx="4480560" cy="4846320"/>
+            <a:ext cx="4480560" cy="4992624"/>
           </a:xfrm>
           <a:prstGeom prst="roundRect">
             <a:avLst/>
@@ -5665,7 +5665,7 @@
         <p:spPr>
           <a:xfrm>
             <a:off x="636422" y="1920240"/>
-            <a:ext cx="3383280" cy="3383280"/>
+            <a:ext cx="3383280" cy="3529584"/>
           </a:xfrm>
           <a:prstGeom prst="roundRect">
             <a:avLst/>
@@ -5751,7 +5751,7 @@
         <p:spPr>
           <a:xfrm>
             <a:off x="4403750" y="1920240"/>
-            <a:ext cx="3383280" cy="3383280"/>
+            <a:ext cx="3383280" cy="3529584"/>
           </a:xfrm>
           <a:prstGeom prst="roundRect">
             <a:avLst/>
@@ -5837,7 +5837,7 @@
         <p:spPr>
           <a:xfrm>
             <a:off x="8171078" y="1920240"/>
-            <a:ext cx="3383280" cy="3383280"/>
+            <a:ext cx="3383280" cy="3529584"/>
           </a:xfrm>
           <a:prstGeom prst="roundRect">
             <a:avLst/>
